--- a/public/taqdimot.pptx
+++ b/public/taqdimot.pptx
@@ -2,21 +2,21 @@
 <file path=ppt/presentation.xml><?xml version="1.0" encoding="utf-8"?>
 <p:presentation xmlns:a="http://schemas.openxmlformats.org/drawingml/2006/main" xmlns:r="http://schemas.openxmlformats.org/officeDocument/2006/relationships" xmlns:p="http://schemas.openxmlformats.org/presentationml/2006/main" saveSubsetFonts="1" autoCompressPictures="0">
   <p:sldMasterIdLst>
-    <p:sldMasterId id="2147483648" r:id="rId1"/>
+    <p:sldMasterId id="2147483886" r:id="rId1"/>
   </p:sldMasterIdLst>
   <p:sldIdLst>
-    <p:sldId id="256" r:id="rId7"/>
-    <p:sldId id="257" r:id="rId8"/>
-    <p:sldId id="258" r:id="rId9"/>
-    <p:sldId id="259" r:id="rId10"/>
-    <p:sldId id="260" r:id="rId11"/>
-    <p:sldId id="261" r:id="rId12"/>
-    <p:sldId id="262" r:id="rId13"/>
-    <p:sldId id="263" r:id="rId14"/>
-    <p:sldId id="264" r:id="rId15"/>
-    <p:sldId id="265" r:id="rId16"/>
+    <p:sldId id="256" r:id="rId2"/>
+    <p:sldId id="257" r:id="rId3"/>
+    <p:sldId id="258" r:id="rId4"/>
+    <p:sldId id="259" r:id="rId5"/>
+    <p:sldId id="260" r:id="rId6"/>
+    <p:sldId id="261" r:id="rId7"/>
+    <p:sldId id="262" r:id="rId8"/>
+    <p:sldId id="263" r:id="rId9"/>
+    <p:sldId id="264" r:id="rId10"/>
+    <p:sldId id="265" r:id="rId11"/>
   </p:sldIdLst>
-  <p:sldSz cx="12188952" cy="6858000" type="screen4x3"/>
+  <p:sldSz cx="12188825" cy="6858000"/>
   <p:notesSz cx="6858000" cy="9144000"/>
   <p:defaultTextStyle>
     <a:defPPr>
@@ -113,6 +113,22 @@
       </a:defRPr>
     </a:lvl9pPr>
   </p:defaultTextStyle>
+  <p:extLst>
+    <p:ext uri="{EFAFB233-063F-42B5-8137-9DF3F51BA10A}">
+      <p15:sldGuideLst xmlns:p15="http://schemas.microsoft.com/office/powerpoint/2012/main">
+        <p15:guide id="1" orient="horz" pos="2160">
+          <p15:clr>
+            <a:srgbClr val="A4A3A4"/>
+          </p15:clr>
+        </p15:guide>
+        <p15:guide id="2" pos="2880">
+          <p15:clr>
+            <a:srgbClr val="A4A3A4"/>
+          </p15:clr>
+        </p15:guide>
+      </p15:sldGuideLst>
+    </p:ext>
+  </p:extLst>
 </p:presentation>
 </file>
 
@@ -145,19 +161,23 @@
         </p:nvSpPr>
         <p:spPr>
           <a:xfrm>
-            <a:off x="685800" y="2130425"/>
-            <a:ext cx="7772400" cy="1470025"/>
-          </a:xfrm>
-        </p:spPr>
-        <p:txBody>
-          <a:bodyPr/>
-          <a:lstStyle/>
-          <a:p>
-            <a:r>
-              <a:rPr lang="en-US" smtClean="0"/>
+            <a:off x="1154654" y="1447800"/>
+            <a:ext cx="8823360" cy="3329581"/>
+          </a:xfrm>
+        </p:spPr>
+        <p:txBody>
+          <a:bodyPr anchor="b"/>
+          <a:lstStyle>
+            <a:lvl1pPr>
+              <a:defRPr sz="7198"/>
+            </a:lvl1pPr>
+          </a:lstStyle>
+          <a:p>
+            <a:r>
+              <a:rPr lang="en-US"/>
               <a:t>Click to edit Master title style</a:t>
             </a:r>
-            <a:endParaRPr lang="en-US"/>
+            <a:endParaRPr lang="en-US" dirty="0"/>
           </a:p>
         </p:txBody>
       </p:sp>
@@ -173,14 +193,25 @@
         </p:nvSpPr>
         <p:spPr>
           <a:xfrm>
-            <a:off x="1371600" y="3886200"/>
-            <a:ext cx="6400800" cy="1752600"/>
-          </a:xfrm>
-        </p:spPr>
-        <p:txBody>
-          <a:bodyPr/>
+            <a:off x="1154654" y="4777380"/>
+            <a:ext cx="8823360" cy="861420"/>
+          </a:xfrm>
+        </p:spPr>
+        <p:txBody>
+          <a:bodyPr anchor="t"/>
           <a:lstStyle>
-            <a:lvl1pPr marL="0" indent="0" algn="ctr">
+            <a:lvl1pPr marL="0" indent="0" algn="l">
+              <a:buNone/>
+              <a:defRPr cap="all">
+                <a:solidFill>
+                  <a:schemeClr val="bg2">
+                    <a:lumMod val="40000"/>
+                    <a:lumOff val="60000"/>
+                  </a:schemeClr>
+                </a:solidFill>
+              </a:defRPr>
+            </a:lvl1pPr>
+            <a:lvl2pPr marL="457063" indent="0" algn="ctr">
               <a:buNone/>
               <a:defRPr>
                 <a:solidFill>
@@ -189,8 +220,8 @@
                   </a:schemeClr>
                 </a:solidFill>
               </a:defRPr>
-            </a:lvl1pPr>
-            <a:lvl2pPr marL="457200" indent="0" algn="ctr">
+            </a:lvl2pPr>
+            <a:lvl3pPr marL="914126" indent="0" algn="ctr">
               <a:buNone/>
               <a:defRPr>
                 <a:solidFill>
@@ -199,8 +230,8 @@
                   </a:schemeClr>
                 </a:solidFill>
               </a:defRPr>
-            </a:lvl2pPr>
-            <a:lvl3pPr marL="914400" indent="0" algn="ctr">
+            </a:lvl3pPr>
+            <a:lvl4pPr marL="1371189" indent="0" algn="ctr">
               <a:buNone/>
               <a:defRPr>
                 <a:solidFill>
@@ -209,8 +240,8 @@
                   </a:schemeClr>
                 </a:solidFill>
               </a:defRPr>
-            </a:lvl3pPr>
-            <a:lvl4pPr marL="1371600" indent="0" algn="ctr">
+            </a:lvl4pPr>
+            <a:lvl5pPr marL="1828251" indent="0" algn="ctr">
               <a:buNone/>
               <a:defRPr>
                 <a:solidFill>
@@ -219,8 +250,8 @@
                   </a:schemeClr>
                 </a:solidFill>
               </a:defRPr>
-            </a:lvl4pPr>
-            <a:lvl5pPr marL="1828800" indent="0" algn="ctr">
+            </a:lvl5pPr>
+            <a:lvl6pPr marL="2285314" indent="0" algn="ctr">
               <a:buNone/>
               <a:defRPr>
                 <a:solidFill>
@@ -229,8 +260,8 @@
                   </a:schemeClr>
                 </a:solidFill>
               </a:defRPr>
-            </a:lvl5pPr>
-            <a:lvl6pPr marL="2286000" indent="0" algn="ctr">
+            </a:lvl6pPr>
+            <a:lvl7pPr marL="2742377" indent="0" algn="ctr">
               <a:buNone/>
               <a:defRPr>
                 <a:solidFill>
@@ -239,8 +270,8 @@
                   </a:schemeClr>
                 </a:solidFill>
               </a:defRPr>
-            </a:lvl6pPr>
-            <a:lvl7pPr marL="2743200" indent="0" algn="ctr">
+            </a:lvl7pPr>
+            <a:lvl8pPr marL="3199440" indent="0" algn="ctr">
               <a:buNone/>
               <a:defRPr>
                 <a:solidFill>
@@ -249,8 +280,8 @@
                   </a:schemeClr>
                 </a:solidFill>
               </a:defRPr>
-            </a:lvl7pPr>
-            <a:lvl8pPr marL="3200400" indent="0" algn="ctr">
+            </a:lvl8pPr>
+            <a:lvl9pPr marL="3656503" indent="0" algn="ctr">
               <a:buNone/>
               <a:defRPr>
                 <a:solidFill>
@@ -259,24 +290,14 @@
                   </a:schemeClr>
                 </a:solidFill>
               </a:defRPr>
-            </a:lvl8pPr>
-            <a:lvl9pPr marL="3657600" indent="0" algn="ctr">
-              <a:buNone/>
-              <a:defRPr>
-                <a:solidFill>
-                  <a:schemeClr val="tx1">
-                    <a:tint val="75000"/>
-                  </a:schemeClr>
-                </a:solidFill>
-              </a:defRPr>
             </a:lvl9pPr>
           </a:lstStyle>
           <a:p>
             <a:r>
-              <a:rPr lang="en-US" smtClean="0"/>
+              <a:rPr lang="en-US"/>
               <a:t>Click to edit Master subtitle style</a:t>
             </a:r>
-            <a:endParaRPr lang="en-US"/>
+            <a:endParaRPr lang="en-US" dirty="0"/>
           </a:p>
         </p:txBody>
       </p:sp>
@@ -297,7 +318,7 @@
           <a:p>
             <a:fld id="{5BCAD085-E8A6-8845-BD4E-CB4CCA059FC4}" type="datetimeFigureOut">
               <a:rPr lang="en-US" smtClean="0"/>
-              <a:t>1/27/13</a:t>
+              <a:t>10/26/26</a:t>
             </a:fld>
             <a:endParaRPr lang="en-US"/>
           </a:p>
@@ -348,7 +369,7 @@
     </p:spTree>
     <p:extLst>
       <p:ext uri="{BB962C8B-B14F-4D97-AF65-F5344CB8AC3E}">
-        <p14:creationId xmlns:p14="http://schemas.microsoft.com/office/powerpoint/2010/main" val="3168075583"/>
+        <p14:creationId xmlns:p14="http://schemas.microsoft.com/office/powerpoint/2010/main" val="3849323136"/>
       </p:ext>
     </p:extLst>
   </p:cSld>
@@ -359,6 +380,2556 @@
 </file>
 
 <file path=ppt/slideLayouts/slideLayout10.xml><?xml version="1.0" encoding="utf-8"?>
+<p:sldLayout xmlns:a="http://schemas.openxmlformats.org/drawingml/2006/main" xmlns:r="http://schemas.openxmlformats.org/officeDocument/2006/relationships" xmlns:p="http://schemas.openxmlformats.org/presentationml/2006/main" preserve="1">
+  <p:cSld name="Panoramic Picture with Caption">
+    <p:spTree>
+      <p:nvGrpSpPr>
+        <p:cNvPr id="1" name=""/>
+        <p:cNvGrpSpPr/>
+        <p:nvPr/>
+      </p:nvGrpSpPr>
+      <p:grpSpPr>
+        <a:xfrm>
+          <a:off x="0" y="0"/>
+          <a:ext cx="0" cy="0"/>
+          <a:chOff x="0" y="0"/>
+          <a:chExt cx="0" cy="0"/>
+        </a:xfrm>
+      </p:grpSpPr>
+      <p:sp>
+        <p:nvSpPr>
+          <p:cNvPr id="2" name="Title 1"/>
+          <p:cNvSpPr>
+            <a:spLocks noGrp="1"/>
+          </p:cNvSpPr>
+          <p:nvPr>
+            <p:ph type="title"/>
+          </p:nvPr>
+        </p:nvSpPr>
+        <p:spPr>
+          <a:xfrm>
+            <a:off x="1154656" y="4800587"/>
+            <a:ext cx="8823359" cy="566738"/>
+          </a:xfrm>
+        </p:spPr>
+        <p:txBody>
+          <a:bodyPr anchor="b">
+            <a:normAutofit/>
+          </a:bodyPr>
+          <a:lstStyle>
+            <a:lvl1pPr algn="l">
+              <a:defRPr sz="2399" b="0"/>
+            </a:lvl1pPr>
+          </a:lstStyle>
+          <a:p>
+            <a:r>
+              <a:rPr lang="en-US"/>
+              <a:t>Click to edit Master title style</a:t>
+            </a:r>
+            <a:endParaRPr lang="en-US" dirty="0"/>
+          </a:p>
+        </p:txBody>
+      </p:sp>
+      <p:sp>
+        <p:nvSpPr>
+          <p:cNvPr id="3" name="Picture Placeholder 2"/>
+          <p:cNvSpPr>
+            <a:spLocks noGrp="1" noChangeAspect="1"/>
+          </p:cNvSpPr>
+          <p:nvPr>
+            <p:ph type="pic" idx="1"/>
+          </p:nvPr>
+        </p:nvSpPr>
+        <p:spPr>
+          <a:xfrm>
+            <a:off x="1154654" y="685800"/>
+            <a:ext cx="8823360" cy="3640666"/>
+          </a:xfrm>
+          <a:prstGeom prst="roundRect">
+            <a:avLst>
+              <a:gd name="adj" fmla="val 1858"/>
+            </a:avLst>
+          </a:prstGeom>
+          <a:effectLst>
+            <a:outerShdw blurRad="50800" dist="50800" dir="5400000" algn="tl" rotWithShape="0">
+              <a:srgbClr val="000000">
+                <a:alpha val="43000"/>
+              </a:srgbClr>
+            </a:outerShdw>
+          </a:effectLst>
+        </p:spPr>
+        <p:txBody>
+          <a:bodyPr anchor="t">
+            <a:normAutofit/>
+          </a:bodyPr>
+          <a:lstStyle>
+            <a:lvl1pPr marL="0" indent="0" algn="ctr">
+              <a:buNone/>
+              <a:defRPr sz="1600"/>
+            </a:lvl1pPr>
+            <a:lvl2pPr marL="457063" indent="0">
+              <a:buNone/>
+              <a:defRPr sz="1600"/>
+            </a:lvl2pPr>
+            <a:lvl3pPr marL="914126" indent="0">
+              <a:buNone/>
+              <a:defRPr sz="1600"/>
+            </a:lvl3pPr>
+            <a:lvl4pPr marL="1371189" indent="0">
+              <a:buNone/>
+              <a:defRPr sz="1600"/>
+            </a:lvl4pPr>
+            <a:lvl5pPr marL="1828251" indent="0">
+              <a:buNone/>
+              <a:defRPr sz="1600"/>
+            </a:lvl5pPr>
+            <a:lvl6pPr marL="2285314" indent="0">
+              <a:buNone/>
+              <a:defRPr sz="1600"/>
+            </a:lvl6pPr>
+            <a:lvl7pPr marL="2742377" indent="0">
+              <a:buNone/>
+              <a:defRPr sz="1600"/>
+            </a:lvl7pPr>
+            <a:lvl8pPr marL="3199440" indent="0">
+              <a:buNone/>
+              <a:defRPr sz="1600"/>
+            </a:lvl8pPr>
+            <a:lvl9pPr marL="3656503" indent="0">
+              <a:buNone/>
+              <a:defRPr sz="1600"/>
+            </a:lvl9pPr>
+          </a:lstStyle>
+          <a:p>
+            <a:endParaRPr lang="en-US" dirty="0"/>
+          </a:p>
+        </p:txBody>
+      </p:sp>
+      <p:sp>
+        <p:nvSpPr>
+          <p:cNvPr id="4" name="Text Placeholder 3"/>
+          <p:cNvSpPr>
+            <a:spLocks noGrp="1"/>
+          </p:cNvSpPr>
+          <p:nvPr>
+            <p:ph type="body" sz="half" idx="2"/>
+          </p:nvPr>
+        </p:nvSpPr>
+        <p:spPr>
+          <a:xfrm>
+            <a:off x="1154655" y="5367325"/>
+            <a:ext cx="8823358" cy="493712"/>
+          </a:xfrm>
+        </p:spPr>
+        <p:txBody>
+          <a:bodyPr>
+            <a:normAutofit/>
+          </a:bodyPr>
+          <a:lstStyle>
+            <a:lvl1pPr marL="0" indent="0">
+              <a:buNone/>
+              <a:defRPr sz="1200"/>
+            </a:lvl1pPr>
+            <a:lvl2pPr marL="457063" indent="0">
+              <a:buNone/>
+              <a:defRPr sz="1200"/>
+            </a:lvl2pPr>
+            <a:lvl3pPr marL="914126" indent="0">
+              <a:buNone/>
+              <a:defRPr sz="1000"/>
+            </a:lvl3pPr>
+            <a:lvl4pPr marL="1371189" indent="0">
+              <a:buNone/>
+              <a:defRPr sz="900"/>
+            </a:lvl4pPr>
+            <a:lvl5pPr marL="1828251" indent="0">
+              <a:buNone/>
+              <a:defRPr sz="900"/>
+            </a:lvl5pPr>
+            <a:lvl6pPr marL="2285314" indent="0">
+              <a:buNone/>
+              <a:defRPr sz="900"/>
+            </a:lvl6pPr>
+            <a:lvl7pPr marL="2742377" indent="0">
+              <a:buNone/>
+              <a:defRPr sz="900"/>
+            </a:lvl7pPr>
+            <a:lvl8pPr marL="3199440" indent="0">
+              <a:buNone/>
+              <a:defRPr sz="900"/>
+            </a:lvl8pPr>
+            <a:lvl9pPr marL="3656503" indent="0">
+              <a:buNone/>
+              <a:defRPr sz="900"/>
+            </a:lvl9pPr>
+          </a:lstStyle>
+          <a:p>
+            <a:pPr lvl="0"/>
+            <a:r>
+              <a:rPr lang="en-US"/>
+              <a:t>Click to edit Master text styles</a:t>
+            </a:r>
+          </a:p>
+        </p:txBody>
+      </p:sp>
+      <p:sp>
+        <p:nvSpPr>
+          <p:cNvPr id="5" name="Date Placeholder 4"/>
+          <p:cNvSpPr>
+            <a:spLocks noGrp="1"/>
+          </p:cNvSpPr>
+          <p:nvPr>
+            <p:ph type="dt" sz="half" idx="10"/>
+          </p:nvPr>
+        </p:nvSpPr>
+        <p:spPr/>
+        <p:txBody>
+          <a:bodyPr/>
+          <a:lstStyle/>
+          <a:p>
+            <a:fld id="{5BCAD085-E8A6-8845-BD4E-CB4CCA059FC4}" type="datetimeFigureOut">
+              <a:rPr lang="en-US" smtClean="0"/>
+              <a:t>10/26/26</a:t>
+            </a:fld>
+            <a:endParaRPr lang="en-US"/>
+          </a:p>
+        </p:txBody>
+      </p:sp>
+      <p:sp>
+        <p:nvSpPr>
+          <p:cNvPr id="6" name="Footer Placeholder 5"/>
+          <p:cNvSpPr>
+            <a:spLocks noGrp="1"/>
+          </p:cNvSpPr>
+          <p:nvPr>
+            <p:ph type="ftr" sz="quarter" idx="11"/>
+          </p:nvPr>
+        </p:nvSpPr>
+        <p:spPr/>
+        <p:txBody>
+          <a:bodyPr/>
+          <a:lstStyle/>
+          <a:p>
+            <a:endParaRPr lang="en-US"/>
+          </a:p>
+        </p:txBody>
+      </p:sp>
+      <p:sp>
+        <p:nvSpPr>
+          <p:cNvPr id="7" name="Slide Number Placeholder 6"/>
+          <p:cNvSpPr>
+            <a:spLocks noGrp="1"/>
+          </p:cNvSpPr>
+          <p:nvPr>
+            <p:ph type="sldNum" sz="quarter" idx="12"/>
+          </p:nvPr>
+        </p:nvSpPr>
+        <p:spPr/>
+        <p:txBody>
+          <a:bodyPr/>
+          <a:lstStyle/>
+          <a:p>
+            <a:fld id="{C1FF6DA9-008F-8B48-92A6-B652298478BF}" type="slidenum">
+              <a:rPr lang="en-US" smtClean="0"/>
+              <a:t>‹#›</a:t>
+            </a:fld>
+            <a:endParaRPr lang="en-US"/>
+          </a:p>
+        </p:txBody>
+      </p:sp>
+    </p:spTree>
+    <p:extLst>
+      <p:ext uri="{BB962C8B-B14F-4D97-AF65-F5344CB8AC3E}">
+        <p14:creationId xmlns:p14="http://schemas.microsoft.com/office/powerpoint/2010/main" val="3519999329"/>
+      </p:ext>
+    </p:extLst>
+  </p:cSld>
+  <p:clrMapOvr>
+    <a:masterClrMapping/>
+  </p:clrMapOvr>
+</p:sldLayout>
+</file>
+
+<file path=ppt/slideLayouts/slideLayout11.xml><?xml version="1.0" encoding="utf-8"?>
+<p:sldLayout xmlns:a="http://schemas.openxmlformats.org/drawingml/2006/main" xmlns:r="http://schemas.openxmlformats.org/officeDocument/2006/relationships" xmlns:p="http://schemas.openxmlformats.org/presentationml/2006/main" preserve="1">
+  <p:cSld name="Title and Caption">
+    <p:spTree>
+      <p:nvGrpSpPr>
+        <p:cNvPr id="1" name=""/>
+        <p:cNvGrpSpPr/>
+        <p:nvPr/>
+      </p:nvGrpSpPr>
+      <p:grpSpPr>
+        <a:xfrm>
+          <a:off x="0" y="0"/>
+          <a:ext cx="0" cy="0"/>
+          <a:chOff x="0" y="0"/>
+          <a:chExt cx="0" cy="0"/>
+        </a:xfrm>
+      </p:grpSpPr>
+      <p:sp>
+        <p:nvSpPr>
+          <p:cNvPr id="2" name="Title 1"/>
+          <p:cNvSpPr>
+            <a:spLocks noGrp="1"/>
+          </p:cNvSpPr>
+          <p:nvPr>
+            <p:ph type="title"/>
+          </p:nvPr>
+        </p:nvSpPr>
+        <p:spPr>
+          <a:xfrm>
+            <a:off x="1154654" y="1447800"/>
+            <a:ext cx="8823361" cy="1981200"/>
+          </a:xfrm>
+        </p:spPr>
+        <p:txBody>
+          <a:bodyPr/>
+          <a:lstStyle>
+            <a:lvl1pPr>
+              <a:defRPr sz="4799"/>
+            </a:lvl1pPr>
+          </a:lstStyle>
+          <a:p>
+            <a:r>
+              <a:rPr lang="en-US"/>
+              <a:t>Click to edit Master title style</a:t>
+            </a:r>
+            <a:endParaRPr lang="en-US" dirty="0"/>
+          </a:p>
+        </p:txBody>
+      </p:sp>
+      <p:sp>
+        <p:nvSpPr>
+          <p:cNvPr id="8" name="Text Placeholder 3"/>
+          <p:cNvSpPr>
+            <a:spLocks noGrp="1"/>
+          </p:cNvSpPr>
+          <p:nvPr>
+            <p:ph type="body" sz="half" idx="2"/>
+          </p:nvPr>
+        </p:nvSpPr>
+        <p:spPr>
+          <a:xfrm>
+            <a:off x="1154654" y="3657600"/>
+            <a:ext cx="8823361" cy="2362200"/>
+          </a:xfrm>
+        </p:spPr>
+        <p:txBody>
+          <a:bodyPr anchor="ctr">
+            <a:normAutofit/>
+          </a:bodyPr>
+          <a:lstStyle>
+            <a:lvl1pPr marL="0" indent="0">
+              <a:buNone/>
+              <a:defRPr sz="1799"/>
+            </a:lvl1pPr>
+            <a:lvl2pPr marL="457063" indent="0">
+              <a:buNone/>
+              <a:defRPr sz="1200"/>
+            </a:lvl2pPr>
+            <a:lvl3pPr marL="914126" indent="0">
+              <a:buNone/>
+              <a:defRPr sz="1000"/>
+            </a:lvl3pPr>
+            <a:lvl4pPr marL="1371189" indent="0">
+              <a:buNone/>
+              <a:defRPr sz="900"/>
+            </a:lvl4pPr>
+            <a:lvl5pPr marL="1828251" indent="0">
+              <a:buNone/>
+              <a:defRPr sz="900"/>
+            </a:lvl5pPr>
+            <a:lvl6pPr marL="2285314" indent="0">
+              <a:buNone/>
+              <a:defRPr sz="900"/>
+            </a:lvl6pPr>
+            <a:lvl7pPr marL="2742377" indent="0">
+              <a:buNone/>
+              <a:defRPr sz="900"/>
+            </a:lvl7pPr>
+            <a:lvl8pPr marL="3199440" indent="0">
+              <a:buNone/>
+              <a:defRPr sz="900"/>
+            </a:lvl8pPr>
+            <a:lvl9pPr marL="3656503" indent="0">
+              <a:buNone/>
+              <a:defRPr sz="900"/>
+            </a:lvl9pPr>
+          </a:lstStyle>
+          <a:p>
+            <a:pPr lvl="0"/>
+            <a:r>
+              <a:rPr lang="en-US"/>
+              <a:t>Click to edit Master text styles</a:t>
+            </a:r>
+          </a:p>
+        </p:txBody>
+      </p:sp>
+      <p:sp>
+        <p:nvSpPr>
+          <p:cNvPr id="4" name="Date Placeholder 3"/>
+          <p:cNvSpPr>
+            <a:spLocks noGrp="1"/>
+          </p:cNvSpPr>
+          <p:nvPr>
+            <p:ph type="dt" sz="half" idx="10"/>
+          </p:nvPr>
+        </p:nvSpPr>
+        <p:spPr/>
+        <p:txBody>
+          <a:bodyPr/>
+          <a:lstStyle/>
+          <a:p>
+            <a:fld id="{5BCAD085-E8A6-8845-BD4E-CB4CCA059FC4}" type="datetimeFigureOut">
+              <a:rPr lang="en-US" smtClean="0"/>
+              <a:t>10/26/26</a:t>
+            </a:fld>
+            <a:endParaRPr lang="en-US"/>
+          </a:p>
+        </p:txBody>
+      </p:sp>
+      <p:sp>
+        <p:nvSpPr>
+          <p:cNvPr id="5" name="Footer Placeholder 4"/>
+          <p:cNvSpPr>
+            <a:spLocks noGrp="1"/>
+          </p:cNvSpPr>
+          <p:nvPr>
+            <p:ph type="ftr" sz="quarter" idx="11"/>
+          </p:nvPr>
+        </p:nvSpPr>
+        <p:spPr/>
+        <p:txBody>
+          <a:bodyPr/>
+          <a:lstStyle/>
+          <a:p>
+            <a:endParaRPr lang="en-US"/>
+          </a:p>
+        </p:txBody>
+      </p:sp>
+      <p:sp>
+        <p:nvSpPr>
+          <p:cNvPr id="6" name="Slide Number Placeholder 5"/>
+          <p:cNvSpPr>
+            <a:spLocks noGrp="1"/>
+          </p:cNvSpPr>
+          <p:nvPr>
+            <p:ph type="sldNum" sz="quarter" idx="12"/>
+          </p:nvPr>
+        </p:nvSpPr>
+        <p:spPr/>
+        <p:txBody>
+          <a:bodyPr/>
+          <a:lstStyle/>
+          <a:p>
+            <a:fld id="{C1FF6DA9-008F-8B48-92A6-B652298478BF}" type="slidenum">
+              <a:rPr lang="en-US" smtClean="0"/>
+              <a:t>‹#›</a:t>
+            </a:fld>
+            <a:endParaRPr lang="en-US"/>
+          </a:p>
+        </p:txBody>
+      </p:sp>
+    </p:spTree>
+    <p:extLst>
+      <p:ext uri="{BB962C8B-B14F-4D97-AF65-F5344CB8AC3E}">
+        <p14:creationId xmlns:p14="http://schemas.microsoft.com/office/powerpoint/2010/main" val="3854085635"/>
+      </p:ext>
+    </p:extLst>
+  </p:cSld>
+  <p:clrMapOvr>
+    <a:masterClrMapping/>
+  </p:clrMapOvr>
+</p:sldLayout>
+</file>
+
+<file path=ppt/slideLayouts/slideLayout12.xml><?xml version="1.0" encoding="utf-8"?>
+<p:sldLayout xmlns:a="http://schemas.openxmlformats.org/drawingml/2006/main" xmlns:r="http://schemas.openxmlformats.org/officeDocument/2006/relationships" xmlns:p="http://schemas.openxmlformats.org/presentationml/2006/main" preserve="1">
+  <p:cSld name="Quote with Caption">
+    <p:spTree>
+      <p:nvGrpSpPr>
+        <p:cNvPr id="1" name=""/>
+        <p:cNvGrpSpPr/>
+        <p:nvPr/>
+      </p:nvGrpSpPr>
+      <p:grpSpPr>
+        <a:xfrm>
+          <a:off x="0" y="0"/>
+          <a:ext cx="0" cy="0"/>
+          <a:chOff x="0" y="0"/>
+          <a:chExt cx="0" cy="0"/>
+        </a:xfrm>
+      </p:grpSpPr>
+      <p:sp>
+        <p:nvSpPr>
+          <p:cNvPr id="2" name="Title 1"/>
+          <p:cNvSpPr>
+            <a:spLocks noGrp="1"/>
+          </p:cNvSpPr>
+          <p:nvPr>
+            <p:ph type="title"/>
+          </p:nvPr>
+        </p:nvSpPr>
+        <p:spPr>
+          <a:xfrm>
+            <a:off x="1574391" y="1447800"/>
+            <a:ext cx="7997232" cy="2323374"/>
+          </a:xfrm>
+        </p:spPr>
+        <p:txBody>
+          <a:bodyPr/>
+          <a:lstStyle>
+            <a:lvl1pPr>
+              <a:defRPr sz="4799"/>
+            </a:lvl1pPr>
+          </a:lstStyle>
+          <a:p>
+            <a:r>
+              <a:rPr lang="en-US"/>
+              <a:t>Click to edit Master title style</a:t>
+            </a:r>
+            <a:endParaRPr lang="en-US" dirty="0"/>
+          </a:p>
+        </p:txBody>
+      </p:sp>
+      <p:sp>
+        <p:nvSpPr>
+          <p:cNvPr id="11" name="Text Placeholder 3"/>
+          <p:cNvSpPr>
+            <a:spLocks noGrp="1"/>
+          </p:cNvSpPr>
+          <p:nvPr>
+            <p:ph type="body" sz="half" idx="14"/>
+          </p:nvPr>
+        </p:nvSpPr>
+        <p:spPr>
+          <a:xfrm>
+            <a:off x="1929898" y="3771174"/>
+            <a:ext cx="7277753" cy="342174"/>
+          </a:xfrm>
+        </p:spPr>
+        <p:txBody>
+          <a:bodyPr vert="horz" lIns="91440" tIns="45720" rIns="91440" bIns="45720" rtlCol="0" anchor="t">
+            <a:normAutofit/>
+          </a:bodyPr>
+          <a:lstStyle>
+            <a:lvl1pPr marL="0" indent="0">
+              <a:buNone/>
+              <a:defRPr lang="en-US" sz="1400" b="0" i="0" kern="1200" cap="small" dirty="0">
+                <a:solidFill>
+                  <a:schemeClr val="bg2">
+                    <a:lumMod val="40000"/>
+                    <a:lumOff val="60000"/>
+                  </a:schemeClr>
+                </a:solidFill>
+                <a:latin typeface="+mj-lt"/>
+                <a:ea typeface="+mj-ea"/>
+                <a:cs typeface="+mj-cs"/>
+              </a:defRPr>
+            </a:lvl1pPr>
+            <a:lvl2pPr marL="457063" indent="0">
+              <a:buNone/>
+              <a:defRPr sz="1200"/>
+            </a:lvl2pPr>
+            <a:lvl3pPr marL="914126" indent="0">
+              <a:buNone/>
+              <a:defRPr sz="1000"/>
+            </a:lvl3pPr>
+            <a:lvl4pPr marL="1371189" indent="0">
+              <a:buNone/>
+              <a:defRPr sz="900"/>
+            </a:lvl4pPr>
+            <a:lvl5pPr marL="1828251" indent="0">
+              <a:buNone/>
+              <a:defRPr sz="900"/>
+            </a:lvl5pPr>
+            <a:lvl6pPr marL="2285314" indent="0">
+              <a:buNone/>
+              <a:defRPr sz="900"/>
+            </a:lvl6pPr>
+            <a:lvl7pPr marL="2742377" indent="0">
+              <a:buNone/>
+              <a:defRPr sz="900"/>
+            </a:lvl7pPr>
+            <a:lvl8pPr marL="3199440" indent="0">
+              <a:buNone/>
+              <a:defRPr sz="900"/>
+            </a:lvl8pPr>
+            <a:lvl9pPr marL="3656503" indent="0">
+              <a:buNone/>
+              <a:defRPr sz="900"/>
+            </a:lvl9pPr>
+          </a:lstStyle>
+          <a:p>
+            <a:pPr marL="0" lvl="0" indent="0">
+              <a:buNone/>
+            </a:pPr>
+            <a:r>
+              <a:rPr lang="en-US"/>
+              <a:t>Click to edit Master text styles</a:t>
+            </a:r>
+          </a:p>
+        </p:txBody>
+      </p:sp>
+      <p:sp>
+        <p:nvSpPr>
+          <p:cNvPr id="10" name="Text Placeholder 3"/>
+          <p:cNvSpPr>
+            <a:spLocks noGrp="1"/>
+          </p:cNvSpPr>
+          <p:nvPr>
+            <p:ph type="body" sz="half" idx="2"/>
+          </p:nvPr>
+        </p:nvSpPr>
+        <p:spPr>
+          <a:xfrm>
+            <a:off x="1154654" y="4350657"/>
+            <a:ext cx="8823361" cy="1676400"/>
+          </a:xfrm>
+        </p:spPr>
+        <p:txBody>
+          <a:bodyPr anchor="ctr">
+            <a:normAutofit/>
+          </a:bodyPr>
+          <a:lstStyle>
+            <a:lvl1pPr marL="0" indent="0">
+              <a:buNone/>
+              <a:defRPr sz="1799"/>
+            </a:lvl1pPr>
+            <a:lvl2pPr marL="457063" indent="0">
+              <a:buNone/>
+              <a:defRPr sz="1200"/>
+            </a:lvl2pPr>
+            <a:lvl3pPr marL="914126" indent="0">
+              <a:buNone/>
+              <a:defRPr sz="1000"/>
+            </a:lvl3pPr>
+            <a:lvl4pPr marL="1371189" indent="0">
+              <a:buNone/>
+              <a:defRPr sz="900"/>
+            </a:lvl4pPr>
+            <a:lvl5pPr marL="1828251" indent="0">
+              <a:buNone/>
+              <a:defRPr sz="900"/>
+            </a:lvl5pPr>
+            <a:lvl6pPr marL="2285314" indent="0">
+              <a:buNone/>
+              <a:defRPr sz="900"/>
+            </a:lvl6pPr>
+            <a:lvl7pPr marL="2742377" indent="0">
+              <a:buNone/>
+              <a:defRPr sz="900"/>
+            </a:lvl7pPr>
+            <a:lvl8pPr marL="3199440" indent="0">
+              <a:buNone/>
+              <a:defRPr sz="900"/>
+            </a:lvl8pPr>
+            <a:lvl9pPr marL="3656503" indent="0">
+              <a:buNone/>
+              <a:defRPr sz="900"/>
+            </a:lvl9pPr>
+          </a:lstStyle>
+          <a:p>
+            <a:pPr lvl="0"/>
+            <a:r>
+              <a:rPr lang="en-US"/>
+              <a:t>Click to edit Master text styles</a:t>
+            </a:r>
+          </a:p>
+        </p:txBody>
+      </p:sp>
+      <p:sp>
+        <p:nvSpPr>
+          <p:cNvPr id="4" name="Date Placeholder 3"/>
+          <p:cNvSpPr>
+            <a:spLocks noGrp="1"/>
+          </p:cNvSpPr>
+          <p:nvPr>
+            <p:ph type="dt" sz="half" idx="10"/>
+          </p:nvPr>
+        </p:nvSpPr>
+        <p:spPr/>
+        <p:txBody>
+          <a:bodyPr/>
+          <a:lstStyle/>
+          <a:p>
+            <a:fld id="{5BCAD085-E8A6-8845-BD4E-CB4CCA059FC4}" type="datetimeFigureOut">
+              <a:rPr lang="en-US" smtClean="0"/>
+              <a:t>10/26/26</a:t>
+            </a:fld>
+            <a:endParaRPr lang="en-US"/>
+          </a:p>
+        </p:txBody>
+      </p:sp>
+      <p:sp>
+        <p:nvSpPr>
+          <p:cNvPr id="5" name="Footer Placeholder 4"/>
+          <p:cNvSpPr>
+            <a:spLocks noGrp="1"/>
+          </p:cNvSpPr>
+          <p:nvPr>
+            <p:ph type="ftr" sz="quarter" idx="11"/>
+          </p:nvPr>
+        </p:nvSpPr>
+        <p:spPr/>
+        <p:txBody>
+          <a:bodyPr/>
+          <a:lstStyle/>
+          <a:p>
+            <a:endParaRPr lang="en-US"/>
+          </a:p>
+        </p:txBody>
+      </p:sp>
+      <p:sp>
+        <p:nvSpPr>
+          <p:cNvPr id="6" name="Slide Number Placeholder 5"/>
+          <p:cNvSpPr>
+            <a:spLocks noGrp="1"/>
+          </p:cNvSpPr>
+          <p:nvPr>
+            <p:ph type="sldNum" sz="quarter" idx="12"/>
+          </p:nvPr>
+        </p:nvSpPr>
+        <p:spPr/>
+        <p:txBody>
+          <a:bodyPr/>
+          <a:lstStyle/>
+          <a:p>
+            <a:fld id="{C1FF6DA9-008F-8B48-92A6-B652298478BF}" type="slidenum">
+              <a:rPr lang="en-US" smtClean="0"/>
+              <a:t>‹#›</a:t>
+            </a:fld>
+            <a:endParaRPr lang="en-US"/>
+          </a:p>
+        </p:txBody>
+      </p:sp>
+      <p:sp>
+        <p:nvSpPr>
+          <p:cNvPr id="12" name="TextBox 11"/>
+          <p:cNvSpPr txBox="1"/>
+          <p:nvPr/>
+        </p:nvSpPr>
+        <p:spPr>
+          <a:xfrm>
+            <a:off x="898061" y="971253"/>
+            <a:ext cx="801703" cy="1969770"/>
+          </a:xfrm>
+          <a:prstGeom prst="rect">
+            <a:avLst/>
+          </a:prstGeom>
+          <a:noFill/>
+        </p:spPr>
+        <p:txBody>
+          <a:bodyPr wrap="square" rtlCol="0">
+            <a:spAutoFit/>
+          </a:bodyPr>
+          <a:lstStyle>
+            <a:defPPr>
+              <a:defRPr lang="en-US"/>
+            </a:defPPr>
+            <a:lvl1pPr algn="r">
+              <a:defRPr sz="12200" b="0" i="0">
+                <a:solidFill>
+                  <a:schemeClr val="bg2">
+                    <a:lumMod val="40000"/>
+                    <a:lumOff val="60000"/>
+                  </a:schemeClr>
+                </a:solidFill>
+                <a:latin typeface="Arial"/>
+                <a:ea typeface="+mj-ea"/>
+                <a:cs typeface="+mj-cs"/>
+              </a:defRPr>
+            </a:lvl1pPr>
+          </a:lstStyle>
+          <a:p>
+            <a:pPr lvl="0"/>
+            <a:r>
+              <a:rPr lang="en-US" sz="12196" dirty="0"/>
+              <a:t>“</a:t>
+            </a:r>
+          </a:p>
+        </p:txBody>
+      </p:sp>
+      <p:sp>
+        <p:nvSpPr>
+          <p:cNvPr id="15" name="TextBox 14"/>
+          <p:cNvSpPr txBox="1"/>
+          <p:nvPr/>
+        </p:nvSpPr>
+        <p:spPr>
+          <a:xfrm>
+            <a:off x="9328060" y="2613787"/>
+            <a:ext cx="801703" cy="1969770"/>
+          </a:xfrm>
+          <a:prstGeom prst="rect">
+            <a:avLst/>
+          </a:prstGeom>
+          <a:noFill/>
+        </p:spPr>
+        <p:txBody>
+          <a:bodyPr wrap="square" rtlCol="0">
+            <a:spAutoFit/>
+          </a:bodyPr>
+          <a:lstStyle>
+            <a:defPPr>
+              <a:defRPr lang="en-US"/>
+            </a:defPPr>
+            <a:lvl1pPr algn="r">
+              <a:defRPr sz="12200" b="0" i="0">
+                <a:solidFill>
+                  <a:schemeClr val="bg2">
+                    <a:lumMod val="40000"/>
+                    <a:lumOff val="60000"/>
+                  </a:schemeClr>
+                </a:solidFill>
+                <a:latin typeface="Arial"/>
+                <a:ea typeface="+mj-ea"/>
+                <a:cs typeface="+mj-cs"/>
+              </a:defRPr>
+            </a:lvl1pPr>
+          </a:lstStyle>
+          <a:p>
+            <a:pPr lvl="0"/>
+            <a:r>
+              <a:rPr lang="en-US" sz="12196" dirty="0"/>
+              <a:t>”</a:t>
+            </a:r>
+          </a:p>
+        </p:txBody>
+      </p:sp>
+    </p:spTree>
+    <p:extLst>
+      <p:ext uri="{BB962C8B-B14F-4D97-AF65-F5344CB8AC3E}">
+        <p14:creationId xmlns:p14="http://schemas.microsoft.com/office/powerpoint/2010/main" val="1532379794"/>
+      </p:ext>
+    </p:extLst>
+  </p:cSld>
+  <p:clrMapOvr>
+    <a:masterClrMapping/>
+  </p:clrMapOvr>
+</p:sldLayout>
+</file>
+
+<file path=ppt/slideLayouts/slideLayout13.xml><?xml version="1.0" encoding="utf-8"?>
+<p:sldLayout xmlns:a="http://schemas.openxmlformats.org/drawingml/2006/main" xmlns:r="http://schemas.openxmlformats.org/officeDocument/2006/relationships" xmlns:p="http://schemas.openxmlformats.org/presentationml/2006/main" preserve="1">
+  <p:cSld name="Name Card">
+    <p:spTree>
+      <p:nvGrpSpPr>
+        <p:cNvPr id="1" name=""/>
+        <p:cNvGrpSpPr/>
+        <p:nvPr/>
+      </p:nvGrpSpPr>
+      <p:grpSpPr>
+        <a:xfrm>
+          <a:off x="0" y="0"/>
+          <a:ext cx="0" cy="0"/>
+          <a:chOff x="0" y="0"/>
+          <a:chExt cx="0" cy="0"/>
+        </a:xfrm>
+      </p:grpSpPr>
+      <p:sp>
+        <p:nvSpPr>
+          <p:cNvPr id="2" name="Title 1"/>
+          <p:cNvSpPr>
+            <a:spLocks noGrp="1"/>
+          </p:cNvSpPr>
+          <p:nvPr>
+            <p:ph type="title"/>
+          </p:nvPr>
+        </p:nvSpPr>
+        <p:spPr>
+          <a:xfrm>
+            <a:off x="1154653" y="3124201"/>
+            <a:ext cx="8823362" cy="1653180"/>
+          </a:xfrm>
+        </p:spPr>
+        <p:txBody>
+          <a:bodyPr anchor="b"/>
+          <a:lstStyle>
+            <a:lvl1pPr algn="l">
+              <a:defRPr sz="3999" b="0" cap="none"/>
+            </a:lvl1pPr>
+          </a:lstStyle>
+          <a:p>
+            <a:r>
+              <a:rPr lang="en-US"/>
+              <a:t>Click to edit Master title style</a:t>
+            </a:r>
+            <a:endParaRPr lang="en-US" dirty="0"/>
+          </a:p>
+        </p:txBody>
+      </p:sp>
+      <p:sp>
+        <p:nvSpPr>
+          <p:cNvPr id="3" name="Text Placeholder 2"/>
+          <p:cNvSpPr>
+            <a:spLocks noGrp="1"/>
+          </p:cNvSpPr>
+          <p:nvPr>
+            <p:ph type="body" idx="1"/>
+          </p:nvPr>
+        </p:nvSpPr>
+        <p:spPr>
+          <a:xfrm>
+            <a:off x="1154654" y="4777381"/>
+            <a:ext cx="8823361" cy="860400"/>
+          </a:xfrm>
+        </p:spPr>
+        <p:txBody>
+          <a:bodyPr anchor="t"/>
+          <a:lstStyle>
+            <a:lvl1pPr marL="0" indent="0" algn="l">
+              <a:buNone/>
+              <a:defRPr sz="1999" cap="none">
+                <a:solidFill>
+                  <a:schemeClr val="bg2">
+                    <a:lumMod val="40000"/>
+                    <a:lumOff val="60000"/>
+                  </a:schemeClr>
+                </a:solidFill>
+              </a:defRPr>
+            </a:lvl1pPr>
+            <a:lvl2pPr marL="457063" indent="0">
+              <a:buNone/>
+              <a:defRPr sz="1799">
+                <a:solidFill>
+                  <a:schemeClr val="tx1">
+                    <a:tint val="75000"/>
+                  </a:schemeClr>
+                </a:solidFill>
+              </a:defRPr>
+            </a:lvl2pPr>
+            <a:lvl3pPr marL="914126" indent="0">
+              <a:buNone/>
+              <a:defRPr sz="1600">
+                <a:solidFill>
+                  <a:schemeClr val="tx1">
+                    <a:tint val="75000"/>
+                  </a:schemeClr>
+                </a:solidFill>
+              </a:defRPr>
+            </a:lvl3pPr>
+            <a:lvl4pPr marL="1371189" indent="0">
+              <a:buNone/>
+              <a:defRPr sz="1400">
+                <a:solidFill>
+                  <a:schemeClr val="tx1">
+                    <a:tint val="75000"/>
+                  </a:schemeClr>
+                </a:solidFill>
+              </a:defRPr>
+            </a:lvl4pPr>
+            <a:lvl5pPr marL="1828251" indent="0">
+              <a:buNone/>
+              <a:defRPr sz="1400">
+                <a:solidFill>
+                  <a:schemeClr val="tx1">
+                    <a:tint val="75000"/>
+                  </a:schemeClr>
+                </a:solidFill>
+              </a:defRPr>
+            </a:lvl5pPr>
+            <a:lvl6pPr marL="2285314" indent="0">
+              <a:buNone/>
+              <a:defRPr sz="1400">
+                <a:solidFill>
+                  <a:schemeClr val="tx1">
+                    <a:tint val="75000"/>
+                  </a:schemeClr>
+                </a:solidFill>
+              </a:defRPr>
+            </a:lvl6pPr>
+            <a:lvl7pPr marL="2742377" indent="0">
+              <a:buNone/>
+              <a:defRPr sz="1400">
+                <a:solidFill>
+                  <a:schemeClr val="tx1">
+                    <a:tint val="75000"/>
+                  </a:schemeClr>
+                </a:solidFill>
+              </a:defRPr>
+            </a:lvl7pPr>
+            <a:lvl8pPr marL="3199440" indent="0">
+              <a:buNone/>
+              <a:defRPr sz="1400">
+                <a:solidFill>
+                  <a:schemeClr val="tx1">
+                    <a:tint val="75000"/>
+                  </a:schemeClr>
+                </a:solidFill>
+              </a:defRPr>
+            </a:lvl8pPr>
+            <a:lvl9pPr marL="3656503" indent="0">
+              <a:buNone/>
+              <a:defRPr sz="1400">
+                <a:solidFill>
+                  <a:schemeClr val="tx1">
+                    <a:tint val="75000"/>
+                  </a:schemeClr>
+                </a:solidFill>
+              </a:defRPr>
+            </a:lvl9pPr>
+          </a:lstStyle>
+          <a:p>
+            <a:pPr lvl="0"/>
+            <a:r>
+              <a:rPr lang="en-US"/>
+              <a:t>Click to edit Master text styles</a:t>
+            </a:r>
+          </a:p>
+        </p:txBody>
+      </p:sp>
+      <p:sp>
+        <p:nvSpPr>
+          <p:cNvPr id="4" name="Date Placeholder 3"/>
+          <p:cNvSpPr>
+            <a:spLocks noGrp="1"/>
+          </p:cNvSpPr>
+          <p:nvPr>
+            <p:ph type="dt" sz="half" idx="10"/>
+          </p:nvPr>
+        </p:nvSpPr>
+        <p:spPr/>
+        <p:txBody>
+          <a:bodyPr/>
+          <a:lstStyle/>
+          <a:p>
+            <a:fld id="{5BCAD085-E8A6-8845-BD4E-CB4CCA059FC4}" type="datetimeFigureOut">
+              <a:rPr lang="en-US" smtClean="0"/>
+              <a:t>10/26/26</a:t>
+            </a:fld>
+            <a:endParaRPr lang="en-US"/>
+          </a:p>
+        </p:txBody>
+      </p:sp>
+      <p:sp>
+        <p:nvSpPr>
+          <p:cNvPr id="5" name="Footer Placeholder 4"/>
+          <p:cNvSpPr>
+            <a:spLocks noGrp="1"/>
+          </p:cNvSpPr>
+          <p:nvPr>
+            <p:ph type="ftr" sz="quarter" idx="11"/>
+          </p:nvPr>
+        </p:nvSpPr>
+        <p:spPr/>
+        <p:txBody>
+          <a:bodyPr/>
+          <a:lstStyle/>
+          <a:p>
+            <a:endParaRPr lang="en-US"/>
+          </a:p>
+        </p:txBody>
+      </p:sp>
+      <p:sp>
+        <p:nvSpPr>
+          <p:cNvPr id="6" name="Slide Number Placeholder 5"/>
+          <p:cNvSpPr>
+            <a:spLocks noGrp="1"/>
+          </p:cNvSpPr>
+          <p:nvPr>
+            <p:ph type="sldNum" sz="quarter" idx="12"/>
+          </p:nvPr>
+        </p:nvSpPr>
+        <p:spPr/>
+        <p:txBody>
+          <a:bodyPr/>
+          <a:lstStyle/>
+          <a:p>
+            <a:fld id="{C1FF6DA9-008F-8B48-92A6-B652298478BF}" type="slidenum">
+              <a:rPr lang="en-US" smtClean="0"/>
+              <a:t>‹#›</a:t>
+            </a:fld>
+            <a:endParaRPr lang="en-US"/>
+          </a:p>
+        </p:txBody>
+      </p:sp>
+    </p:spTree>
+    <p:extLst>
+      <p:ext uri="{BB962C8B-B14F-4D97-AF65-F5344CB8AC3E}">
+        <p14:creationId xmlns:p14="http://schemas.microsoft.com/office/powerpoint/2010/main" val="2200954384"/>
+      </p:ext>
+    </p:extLst>
+  </p:cSld>
+  <p:clrMapOvr>
+    <a:masterClrMapping/>
+  </p:clrMapOvr>
+</p:sldLayout>
+</file>
+
+<file path=ppt/slideLayouts/slideLayout14.xml><?xml version="1.0" encoding="utf-8"?>
+<p:sldLayout xmlns:a="http://schemas.openxmlformats.org/drawingml/2006/main" xmlns:r="http://schemas.openxmlformats.org/officeDocument/2006/relationships" xmlns:p="http://schemas.openxmlformats.org/presentationml/2006/main" preserve="1">
+  <p:cSld name="3 Column">
+    <p:spTree>
+      <p:nvGrpSpPr>
+        <p:cNvPr id="1" name=""/>
+        <p:cNvGrpSpPr/>
+        <p:nvPr/>
+      </p:nvGrpSpPr>
+      <p:grpSpPr>
+        <a:xfrm>
+          <a:off x="0" y="0"/>
+          <a:ext cx="0" cy="0"/>
+          <a:chOff x="0" y="0"/>
+          <a:chExt cx="0" cy="0"/>
+        </a:xfrm>
+      </p:grpSpPr>
+      <p:sp>
+        <p:nvSpPr>
+          <p:cNvPr id="2" name="Title 1"/>
+          <p:cNvSpPr>
+            <a:spLocks noGrp="1"/>
+          </p:cNvSpPr>
+          <p:nvPr>
+            <p:ph type="title"/>
+          </p:nvPr>
+        </p:nvSpPr>
+        <p:spPr/>
+        <p:txBody>
+          <a:bodyPr/>
+          <a:lstStyle>
+            <a:lvl1pPr>
+              <a:defRPr sz="4199"/>
+            </a:lvl1pPr>
+          </a:lstStyle>
+          <a:p>
+            <a:r>
+              <a:rPr lang="en-US"/>
+              <a:t>Click to edit Master title style</a:t>
+            </a:r>
+            <a:endParaRPr lang="en-US" dirty="0"/>
+          </a:p>
+        </p:txBody>
+      </p:sp>
+      <p:sp>
+        <p:nvSpPr>
+          <p:cNvPr id="3" name="Text Placeholder 2"/>
+          <p:cNvSpPr>
+            <a:spLocks noGrp="1"/>
+          </p:cNvSpPr>
+          <p:nvPr>
+            <p:ph type="body" idx="1"/>
+          </p:nvPr>
+        </p:nvSpPr>
+        <p:spPr>
+          <a:xfrm>
+            <a:off x="632782" y="1981200"/>
+            <a:ext cx="2946099" cy="576262"/>
+          </a:xfrm>
+        </p:spPr>
+        <p:txBody>
+          <a:bodyPr anchor="b">
+            <a:noAutofit/>
+          </a:bodyPr>
+          <a:lstStyle>
+            <a:lvl1pPr marL="0" indent="0">
+              <a:buNone/>
+              <a:defRPr sz="2399" b="0">
+                <a:solidFill>
+                  <a:schemeClr val="bg2">
+                    <a:lumMod val="40000"/>
+                    <a:lumOff val="60000"/>
+                  </a:schemeClr>
+                </a:solidFill>
+              </a:defRPr>
+            </a:lvl1pPr>
+            <a:lvl2pPr marL="457063" indent="0">
+              <a:buNone/>
+              <a:defRPr sz="1999" b="1"/>
+            </a:lvl2pPr>
+            <a:lvl3pPr marL="914126" indent="0">
+              <a:buNone/>
+              <a:defRPr sz="1799" b="1"/>
+            </a:lvl3pPr>
+            <a:lvl4pPr marL="1371189" indent="0">
+              <a:buNone/>
+              <a:defRPr sz="1600" b="1"/>
+            </a:lvl4pPr>
+            <a:lvl5pPr marL="1828251" indent="0">
+              <a:buNone/>
+              <a:defRPr sz="1600" b="1"/>
+            </a:lvl5pPr>
+            <a:lvl6pPr marL="2285314" indent="0">
+              <a:buNone/>
+              <a:defRPr sz="1600" b="1"/>
+            </a:lvl6pPr>
+            <a:lvl7pPr marL="2742377" indent="0">
+              <a:buNone/>
+              <a:defRPr sz="1600" b="1"/>
+            </a:lvl7pPr>
+            <a:lvl8pPr marL="3199440" indent="0">
+              <a:buNone/>
+              <a:defRPr sz="1600" b="1"/>
+            </a:lvl8pPr>
+            <a:lvl9pPr marL="3656503" indent="0">
+              <a:buNone/>
+              <a:defRPr sz="1600" b="1"/>
+            </a:lvl9pPr>
+          </a:lstStyle>
+          <a:p>
+            <a:pPr lvl="0"/>
+            <a:r>
+              <a:rPr lang="en-US"/>
+              <a:t>Click to edit Master text styles</a:t>
+            </a:r>
+          </a:p>
+        </p:txBody>
+      </p:sp>
+      <p:sp>
+        <p:nvSpPr>
+          <p:cNvPr id="16" name="Text Placeholder 3"/>
+          <p:cNvSpPr>
+            <a:spLocks noGrp="1"/>
+          </p:cNvSpPr>
+          <p:nvPr>
+            <p:ph type="body" sz="half" idx="15"/>
+          </p:nvPr>
+        </p:nvSpPr>
+        <p:spPr>
+          <a:xfrm>
+            <a:off x="652293" y="2667000"/>
+            <a:ext cx="2926588" cy="3589338"/>
+          </a:xfrm>
+        </p:spPr>
+        <p:txBody>
+          <a:bodyPr anchor="t">
+            <a:normAutofit/>
+          </a:bodyPr>
+          <a:lstStyle>
+            <a:lvl1pPr marL="0" indent="0">
+              <a:buNone/>
+              <a:defRPr sz="1400"/>
+            </a:lvl1pPr>
+            <a:lvl2pPr marL="457063" indent="0">
+              <a:buNone/>
+              <a:defRPr sz="1200"/>
+            </a:lvl2pPr>
+            <a:lvl3pPr marL="914126" indent="0">
+              <a:buNone/>
+              <a:defRPr sz="1000"/>
+            </a:lvl3pPr>
+            <a:lvl4pPr marL="1371189" indent="0">
+              <a:buNone/>
+              <a:defRPr sz="900"/>
+            </a:lvl4pPr>
+            <a:lvl5pPr marL="1828251" indent="0">
+              <a:buNone/>
+              <a:defRPr sz="900"/>
+            </a:lvl5pPr>
+            <a:lvl6pPr marL="2285314" indent="0">
+              <a:buNone/>
+              <a:defRPr sz="900"/>
+            </a:lvl6pPr>
+            <a:lvl7pPr marL="2742377" indent="0">
+              <a:buNone/>
+              <a:defRPr sz="900"/>
+            </a:lvl7pPr>
+            <a:lvl8pPr marL="3199440" indent="0">
+              <a:buNone/>
+              <a:defRPr sz="900"/>
+            </a:lvl8pPr>
+            <a:lvl9pPr marL="3656503" indent="0">
+              <a:buNone/>
+              <a:defRPr sz="900"/>
+            </a:lvl9pPr>
+          </a:lstStyle>
+          <a:p>
+            <a:pPr lvl="0"/>
+            <a:r>
+              <a:rPr lang="en-US"/>
+              <a:t>Click to edit Master text styles</a:t>
+            </a:r>
+          </a:p>
+        </p:txBody>
+      </p:sp>
+      <p:sp>
+        <p:nvSpPr>
+          <p:cNvPr id="5" name="Text Placeholder 4"/>
+          <p:cNvSpPr>
+            <a:spLocks noGrp="1"/>
+          </p:cNvSpPr>
+          <p:nvPr>
+            <p:ph type="body" sz="quarter" idx="3"/>
+          </p:nvPr>
+        </p:nvSpPr>
+        <p:spPr>
+          <a:xfrm>
+            <a:off x="3882648" y="1981200"/>
+            <a:ext cx="2935476" cy="576262"/>
+          </a:xfrm>
+        </p:spPr>
+        <p:txBody>
+          <a:bodyPr anchor="b">
+            <a:noAutofit/>
+          </a:bodyPr>
+          <a:lstStyle>
+            <a:lvl1pPr marL="0" indent="0">
+              <a:buNone/>
+              <a:defRPr sz="2399" b="0">
+                <a:solidFill>
+                  <a:schemeClr val="bg2">
+                    <a:lumMod val="40000"/>
+                    <a:lumOff val="60000"/>
+                  </a:schemeClr>
+                </a:solidFill>
+              </a:defRPr>
+            </a:lvl1pPr>
+            <a:lvl2pPr marL="457063" indent="0">
+              <a:buNone/>
+              <a:defRPr sz="1999" b="1"/>
+            </a:lvl2pPr>
+            <a:lvl3pPr marL="914126" indent="0">
+              <a:buNone/>
+              <a:defRPr sz="1799" b="1"/>
+            </a:lvl3pPr>
+            <a:lvl4pPr marL="1371189" indent="0">
+              <a:buNone/>
+              <a:defRPr sz="1600" b="1"/>
+            </a:lvl4pPr>
+            <a:lvl5pPr marL="1828251" indent="0">
+              <a:buNone/>
+              <a:defRPr sz="1600" b="1"/>
+            </a:lvl5pPr>
+            <a:lvl6pPr marL="2285314" indent="0">
+              <a:buNone/>
+              <a:defRPr sz="1600" b="1"/>
+            </a:lvl6pPr>
+            <a:lvl7pPr marL="2742377" indent="0">
+              <a:buNone/>
+              <a:defRPr sz="1600" b="1"/>
+            </a:lvl7pPr>
+            <a:lvl8pPr marL="3199440" indent="0">
+              <a:buNone/>
+              <a:defRPr sz="1600" b="1"/>
+            </a:lvl8pPr>
+            <a:lvl9pPr marL="3656503" indent="0">
+              <a:buNone/>
+              <a:defRPr sz="1600" b="1"/>
+            </a:lvl9pPr>
+          </a:lstStyle>
+          <a:p>
+            <a:pPr lvl="0"/>
+            <a:r>
+              <a:rPr lang="en-US"/>
+              <a:t>Click to edit Master text styles</a:t>
+            </a:r>
+          </a:p>
+        </p:txBody>
+      </p:sp>
+      <p:sp>
+        <p:nvSpPr>
+          <p:cNvPr id="19" name="Text Placeholder 3"/>
+          <p:cNvSpPr>
+            <a:spLocks noGrp="1"/>
+          </p:cNvSpPr>
+          <p:nvPr>
+            <p:ph type="body" sz="half" idx="16"/>
+          </p:nvPr>
+        </p:nvSpPr>
+        <p:spPr>
+          <a:xfrm>
+            <a:off x="3872097" y="2667000"/>
+            <a:ext cx="2946027" cy="3589338"/>
+          </a:xfrm>
+        </p:spPr>
+        <p:txBody>
+          <a:bodyPr anchor="t">
+            <a:normAutofit/>
+          </a:bodyPr>
+          <a:lstStyle>
+            <a:lvl1pPr marL="0" indent="0">
+              <a:buNone/>
+              <a:defRPr sz="1400"/>
+            </a:lvl1pPr>
+            <a:lvl2pPr marL="457063" indent="0">
+              <a:buNone/>
+              <a:defRPr sz="1200"/>
+            </a:lvl2pPr>
+            <a:lvl3pPr marL="914126" indent="0">
+              <a:buNone/>
+              <a:defRPr sz="1000"/>
+            </a:lvl3pPr>
+            <a:lvl4pPr marL="1371189" indent="0">
+              <a:buNone/>
+              <a:defRPr sz="900"/>
+            </a:lvl4pPr>
+            <a:lvl5pPr marL="1828251" indent="0">
+              <a:buNone/>
+              <a:defRPr sz="900"/>
+            </a:lvl5pPr>
+            <a:lvl6pPr marL="2285314" indent="0">
+              <a:buNone/>
+              <a:defRPr sz="900"/>
+            </a:lvl6pPr>
+            <a:lvl7pPr marL="2742377" indent="0">
+              <a:buNone/>
+              <a:defRPr sz="900"/>
+            </a:lvl7pPr>
+            <a:lvl8pPr marL="3199440" indent="0">
+              <a:buNone/>
+              <a:defRPr sz="900"/>
+            </a:lvl8pPr>
+            <a:lvl9pPr marL="3656503" indent="0">
+              <a:buNone/>
+              <a:defRPr sz="900"/>
+            </a:lvl9pPr>
+          </a:lstStyle>
+          <a:p>
+            <a:pPr lvl="0"/>
+            <a:r>
+              <a:rPr lang="en-US"/>
+              <a:t>Click to edit Master text styles</a:t>
+            </a:r>
+          </a:p>
+        </p:txBody>
+      </p:sp>
+      <p:sp>
+        <p:nvSpPr>
+          <p:cNvPr id="14" name="Text Placeholder 4"/>
+          <p:cNvSpPr>
+            <a:spLocks noGrp="1"/>
+          </p:cNvSpPr>
+          <p:nvPr>
+            <p:ph type="body" sz="quarter" idx="13"/>
+          </p:nvPr>
+        </p:nvSpPr>
+        <p:spPr>
+          <a:xfrm>
+            <a:off x="7122845" y="1981200"/>
+            <a:ext cx="2931349" cy="576262"/>
+          </a:xfrm>
+        </p:spPr>
+        <p:txBody>
+          <a:bodyPr anchor="b">
+            <a:noAutofit/>
+          </a:bodyPr>
+          <a:lstStyle>
+            <a:lvl1pPr marL="0" indent="0">
+              <a:buNone/>
+              <a:defRPr sz="2399" b="0">
+                <a:solidFill>
+                  <a:schemeClr val="bg2">
+                    <a:lumMod val="40000"/>
+                    <a:lumOff val="60000"/>
+                  </a:schemeClr>
+                </a:solidFill>
+              </a:defRPr>
+            </a:lvl1pPr>
+            <a:lvl2pPr marL="457063" indent="0">
+              <a:buNone/>
+              <a:defRPr sz="1999" b="1"/>
+            </a:lvl2pPr>
+            <a:lvl3pPr marL="914126" indent="0">
+              <a:buNone/>
+              <a:defRPr sz="1799" b="1"/>
+            </a:lvl3pPr>
+            <a:lvl4pPr marL="1371189" indent="0">
+              <a:buNone/>
+              <a:defRPr sz="1600" b="1"/>
+            </a:lvl4pPr>
+            <a:lvl5pPr marL="1828251" indent="0">
+              <a:buNone/>
+              <a:defRPr sz="1600" b="1"/>
+            </a:lvl5pPr>
+            <a:lvl6pPr marL="2285314" indent="0">
+              <a:buNone/>
+              <a:defRPr sz="1600" b="1"/>
+            </a:lvl6pPr>
+            <a:lvl7pPr marL="2742377" indent="0">
+              <a:buNone/>
+              <a:defRPr sz="1600" b="1"/>
+            </a:lvl7pPr>
+            <a:lvl8pPr marL="3199440" indent="0">
+              <a:buNone/>
+              <a:defRPr sz="1600" b="1"/>
+            </a:lvl8pPr>
+            <a:lvl9pPr marL="3656503" indent="0">
+              <a:buNone/>
+              <a:defRPr sz="1600" b="1"/>
+            </a:lvl9pPr>
+          </a:lstStyle>
+          <a:p>
+            <a:pPr lvl="0"/>
+            <a:r>
+              <a:rPr lang="en-US"/>
+              <a:t>Click to edit Master text styles</a:t>
+            </a:r>
+          </a:p>
+        </p:txBody>
+      </p:sp>
+      <p:sp>
+        <p:nvSpPr>
+          <p:cNvPr id="20" name="Text Placeholder 3"/>
+          <p:cNvSpPr>
+            <a:spLocks noGrp="1"/>
+          </p:cNvSpPr>
+          <p:nvPr>
+            <p:ph type="body" sz="half" idx="17"/>
+          </p:nvPr>
+        </p:nvSpPr>
+        <p:spPr>
+          <a:xfrm>
+            <a:off x="7122845" y="2667000"/>
+            <a:ext cx="2931349" cy="3589338"/>
+          </a:xfrm>
+        </p:spPr>
+        <p:txBody>
+          <a:bodyPr anchor="t">
+            <a:normAutofit/>
+          </a:bodyPr>
+          <a:lstStyle>
+            <a:lvl1pPr marL="0" indent="0">
+              <a:buNone/>
+              <a:defRPr sz="1400"/>
+            </a:lvl1pPr>
+            <a:lvl2pPr marL="457063" indent="0">
+              <a:buNone/>
+              <a:defRPr sz="1200"/>
+            </a:lvl2pPr>
+            <a:lvl3pPr marL="914126" indent="0">
+              <a:buNone/>
+              <a:defRPr sz="1000"/>
+            </a:lvl3pPr>
+            <a:lvl4pPr marL="1371189" indent="0">
+              <a:buNone/>
+              <a:defRPr sz="900"/>
+            </a:lvl4pPr>
+            <a:lvl5pPr marL="1828251" indent="0">
+              <a:buNone/>
+              <a:defRPr sz="900"/>
+            </a:lvl5pPr>
+            <a:lvl6pPr marL="2285314" indent="0">
+              <a:buNone/>
+              <a:defRPr sz="900"/>
+            </a:lvl6pPr>
+            <a:lvl7pPr marL="2742377" indent="0">
+              <a:buNone/>
+              <a:defRPr sz="900"/>
+            </a:lvl7pPr>
+            <a:lvl8pPr marL="3199440" indent="0">
+              <a:buNone/>
+              <a:defRPr sz="900"/>
+            </a:lvl8pPr>
+            <a:lvl9pPr marL="3656503" indent="0">
+              <a:buNone/>
+              <a:defRPr sz="900"/>
+            </a:lvl9pPr>
+          </a:lstStyle>
+          <a:p>
+            <a:pPr lvl="0"/>
+            <a:r>
+              <a:rPr lang="en-US"/>
+              <a:t>Click to edit Master text styles</a:t>
+            </a:r>
+          </a:p>
+        </p:txBody>
+      </p:sp>
+      <p:cxnSp>
+        <p:nvCxnSpPr>
+          <p:cNvPr id="17" name="Straight Connector 16"/>
+          <p:cNvCxnSpPr/>
+          <p:nvPr/>
+        </p:nvCxnSpPr>
+        <p:spPr>
+          <a:xfrm>
+            <a:off x="3725172" y="2133600"/>
+            <a:ext cx="0" cy="3962400"/>
+          </a:xfrm>
+          <a:prstGeom prst="line">
+            <a:avLst/>
+          </a:prstGeom>
+          <a:ln w="12700" cmpd="sng">
+            <a:solidFill>
+              <a:schemeClr val="bg2">
+                <a:lumMod val="40000"/>
+                <a:lumOff val="60000"/>
+                <a:alpha val="40000"/>
+              </a:schemeClr>
+            </a:solidFill>
+          </a:ln>
+        </p:spPr>
+        <p:style>
+          <a:lnRef idx="2">
+            <a:schemeClr val="accent1"/>
+          </a:lnRef>
+          <a:fillRef idx="0">
+            <a:schemeClr val="accent1"/>
+          </a:fillRef>
+          <a:effectRef idx="1">
+            <a:schemeClr val="accent1"/>
+          </a:effectRef>
+          <a:fontRef idx="minor">
+            <a:schemeClr val="tx1"/>
+          </a:fontRef>
+        </p:style>
+      </p:cxnSp>
+      <p:cxnSp>
+        <p:nvCxnSpPr>
+          <p:cNvPr id="18" name="Straight Connector 17"/>
+          <p:cNvCxnSpPr/>
+          <p:nvPr/>
+        </p:nvCxnSpPr>
+        <p:spPr>
+          <a:xfrm>
+            <a:off x="6960414" y="2133600"/>
+            <a:ext cx="0" cy="3966882"/>
+          </a:xfrm>
+          <a:prstGeom prst="line">
+            <a:avLst/>
+          </a:prstGeom>
+          <a:ln w="12700" cmpd="sng">
+            <a:solidFill>
+              <a:schemeClr val="bg2">
+                <a:lumMod val="40000"/>
+                <a:lumOff val="60000"/>
+                <a:alpha val="40000"/>
+              </a:schemeClr>
+            </a:solidFill>
+          </a:ln>
+        </p:spPr>
+        <p:style>
+          <a:lnRef idx="2">
+            <a:schemeClr val="accent1"/>
+          </a:lnRef>
+          <a:fillRef idx="0">
+            <a:schemeClr val="accent1"/>
+          </a:fillRef>
+          <a:effectRef idx="1">
+            <a:schemeClr val="accent1"/>
+          </a:effectRef>
+          <a:fontRef idx="minor">
+            <a:schemeClr val="tx1"/>
+          </a:fontRef>
+        </p:style>
+      </p:cxnSp>
+      <p:sp>
+        <p:nvSpPr>
+          <p:cNvPr id="7" name="Date Placeholder 3"/>
+          <p:cNvSpPr>
+            <a:spLocks noGrp="1"/>
+          </p:cNvSpPr>
+          <p:nvPr>
+            <p:ph type="dt" sz="half" idx="10"/>
+          </p:nvPr>
+        </p:nvSpPr>
+        <p:spPr/>
+        <p:txBody>
+          <a:bodyPr/>
+          <a:lstStyle/>
+          <a:p>
+            <a:fld id="{5BCAD085-E8A6-8845-BD4E-CB4CCA059FC4}" type="datetimeFigureOut">
+              <a:rPr lang="en-US" smtClean="0"/>
+              <a:t>10/26/26</a:t>
+            </a:fld>
+            <a:endParaRPr lang="en-US"/>
+          </a:p>
+        </p:txBody>
+      </p:sp>
+      <p:sp>
+        <p:nvSpPr>
+          <p:cNvPr id="4" name="Footer Placeholder 4"/>
+          <p:cNvSpPr>
+            <a:spLocks noGrp="1"/>
+          </p:cNvSpPr>
+          <p:nvPr>
+            <p:ph type="ftr" sz="quarter" idx="11"/>
+          </p:nvPr>
+        </p:nvSpPr>
+        <p:spPr/>
+        <p:txBody>
+          <a:bodyPr/>
+          <a:lstStyle/>
+          <a:p>
+            <a:endParaRPr lang="en-US"/>
+          </a:p>
+        </p:txBody>
+      </p:sp>
+      <p:sp>
+        <p:nvSpPr>
+          <p:cNvPr id="6" name="Slide Number Placeholder 5"/>
+          <p:cNvSpPr>
+            <a:spLocks noGrp="1"/>
+          </p:cNvSpPr>
+          <p:nvPr>
+            <p:ph type="sldNum" sz="quarter" idx="12"/>
+          </p:nvPr>
+        </p:nvSpPr>
+        <p:spPr/>
+        <p:txBody>
+          <a:bodyPr/>
+          <a:lstStyle/>
+          <a:p>
+            <a:fld id="{C1FF6DA9-008F-8B48-92A6-B652298478BF}" type="slidenum">
+              <a:rPr lang="en-US" smtClean="0"/>
+              <a:t>‹#›</a:t>
+            </a:fld>
+            <a:endParaRPr lang="en-US"/>
+          </a:p>
+        </p:txBody>
+      </p:sp>
+    </p:spTree>
+    <p:extLst>
+      <p:ext uri="{BB962C8B-B14F-4D97-AF65-F5344CB8AC3E}">
+        <p14:creationId xmlns:p14="http://schemas.microsoft.com/office/powerpoint/2010/main" val="4125430845"/>
+      </p:ext>
+    </p:extLst>
+  </p:cSld>
+  <p:clrMapOvr>
+    <a:masterClrMapping/>
+  </p:clrMapOvr>
+</p:sldLayout>
+</file>
+
+<file path=ppt/slideLayouts/slideLayout15.xml><?xml version="1.0" encoding="utf-8"?>
+<p:sldLayout xmlns:a="http://schemas.openxmlformats.org/drawingml/2006/main" xmlns:r="http://schemas.openxmlformats.org/officeDocument/2006/relationships" xmlns:p="http://schemas.openxmlformats.org/presentationml/2006/main" preserve="1">
+  <p:cSld name="3 Picture Column">
+    <p:spTree>
+      <p:nvGrpSpPr>
+        <p:cNvPr id="1" name=""/>
+        <p:cNvGrpSpPr/>
+        <p:nvPr/>
+      </p:nvGrpSpPr>
+      <p:grpSpPr>
+        <a:xfrm>
+          <a:off x="0" y="0"/>
+          <a:ext cx="0" cy="0"/>
+          <a:chOff x="0" y="0"/>
+          <a:chExt cx="0" cy="0"/>
+        </a:xfrm>
+      </p:grpSpPr>
+      <p:sp>
+        <p:nvSpPr>
+          <p:cNvPr id="2" name="Title 1"/>
+          <p:cNvSpPr>
+            <a:spLocks noGrp="1"/>
+          </p:cNvSpPr>
+          <p:nvPr>
+            <p:ph type="title"/>
+          </p:nvPr>
+        </p:nvSpPr>
+        <p:spPr/>
+        <p:txBody>
+          <a:bodyPr/>
+          <a:lstStyle>
+            <a:lvl1pPr>
+              <a:defRPr sz="4199"/>
+            </a:lvl1pPr>
+          </a:lstStyle>
+          <a:p>
+            <a:r>
+              <a:rPr lang="en-US"/>
+              <a:t>Click to edit Master title style</a:t>
+            </a:r>
+            <a:endParaRPr lang="en-US" dirty="0"/>
+          </a:p>
+        </p:txBody>
+      </p:sp>
+      <p:sp>
+        <p:nvSpPr>
+          <p:cNvPr id="3" name="Text Placeholder 2"/>
+          <p:cNvSpPr>
+            <a:spLocks noGrp="1"/>
+          </p:cNvSpPr>
+          <p:nvPr>
+            <p:ph type="body" idx="1"/>
+          </p:nvPr>
+        </p:nvSpPr>
+        <p:spPr>
+          <a:xfrm>
+            <a:off x="652293" y="4250949"/>
+            <a:ext cx="2939284" cy="576262"/>
+          </a:xfrm>
+        </p:spPr>
+        <p:txBody>
+          <a:bodyPr anchor="b">
+            <a:noAutofit/>
+          </a:bodyPr>
+          <a:lstStyle>
+            <a:lvl1pPr marL="0" indent="0">
+              <a:buNone/>
+              <a:defRPr sz="2399" b="0">
+                <a:solidFill>
+                  <a:schemeClr val="bg2">
+                    <a:lumMod val="40000"/>
+                    <a:lumOff val="60000"/>
+                  </a:schemeClr>
+                </a:solidFill>
+              </a:defRPr>
+            </a:lvl1pPr>
+            <a:lvl2pPr marL="457063" indent="0">
+              <a:buNone/>
+              <a:defRPr sz="1999" b="1"/>
+            </a:lvl2pPr>
+            <a:lvl3pPr marL="914126" indent="0">
+              <a:buNone/>
+              <a:defRPr sz="1799" b="1"/>
+            </a:lvl3pPr>
+            <a:lvl4pPr marL="1371189" indent="0">
+              <a:buNone/>
+              <a:defRPr sz="1600" b="1"/>
+            </a:lvl4pPr>
+            <a:lvl5pPr marL="1828251" indent="0">
+              <a:buNone/>
+              <a:defRPr sz="1600" b="1"/>
+            </a:lvl5pPr>
+            <a:lvl6pPr marL="2285314" indent="0">
+              <a:buNone/>
+              <a:defRPr sz="1600" b="1"/>
+            </a:lvl6pPr>
+            <a:lvl7pPr marL="2742377" indent="0">
+              <a:buNone/>
+              <a:defRPr sz="1600" b="1"/>
+            </a:lvl7pPr>
+            <a:lvl8pPr marL="3199440" indent="0">
+              <a:buNone/>
+              <a:defRPr sz="1600" b="1"/>
+            </a:lvl8pPr>
+            <a:lvl9pPr marL="3656503" indent="0">
+              <a:buNone/>
+              <a:defRPr sz="1600" b="1"/>
+            </a:lvl9pPr>
+          </a:lstStyle>
+          <a:p>
+            <a:pPr lvl="0"/>
+            <a:r>
+              <a:rPr lang="en-US"/>
+              <a:t>Click to edit Master text styles</a:t>
+            </a:r>
+          </a:p>
+        </p:txBody>
+      </p:sp>
+      <p:sp>
+        <p:nvSpPr>
+          <p:cNvPr id="29" name="Picture Placeholder 2"/>
+          <p:cNvSpPr>
+            <a:spLocks noGrp="1" noChangeAspect="1"/>
+          </p:cNvSpPr>
+          <p:nvPr>
+            <p:ph type="pic" idx="15"/>
+          </p:nvPr>
+        </p:nvSpPr>
+        <p:spPr>
+          <a:xfrm>
+            <a:off x="652293" y="2209800"/>
+            <a:ext cx="2939284" cy="1524000"/>
+          </a:xfrm>
+          <a:prstGeom prst="roundRect">
+            <a:avLst>
+              <a:gd name="adj" fmla="val 1858"/>
+            </a:avLst>
+          </a:prstGeom>
+          <a:effectLst>
+            <a:outerShdw blurRad="50800" dist="50800" dir="5400000" algn="tl" rotWithShape="0">
+              <a:srgbClr val="000000">
+                <a:alpha val="43000"/>
+              </a:srgbClr>
+            </a:outerShdw>
+          </a:effectLst>
+        </p:spPr>
+        <p:txBody>
+          <a:bodyPr anchor="t">
+            <a:normAutofit/>
+          </a:bodyPr>
+          <a:lstStyle>
+            <a:lvl1pPr marL="0" indent="0" algn="ctr">
+              <a:buNone/>
+              <a:defRPr sz="1600"/>
+            </a:lvl1pPr>
+            <a:lvl2pPr marL="457063" indent="0">
+              <a:buNone/>
+              <a:defRPr sz="1600"/>
+            </a:lvl2pPr>
+            <a:lvl3pPr marL="914126" indent="0">
+              <a:buNone/>
+              <a:defRPr sz="1600"/>
+            </a:lvl3pPr>
+            <a:lvl4pPr marL="1371189" indent="0">
+              <a:buNone/>
+              <a:defRPr sz="1600"/>
+            </a:lvl4pPr>
+            <a:lvl5pPr marL="1828251" indent="0">
+              <a:buNone/>
+              <a:defRPr sz="1600"/>
+            </a:lvl5pPr>
+            <a:lvl6pPr marL="2285314" indent="0">
+              <a:buNone/>
+              <a:defRPr sz="1600"/>
+            </a:lvl6pPr>
+            <a:lvl7pPr marL="2742377" indent="0">
+              <a:buNone/>
+              <a:defRPr sz="1600"/>
+            </a:lvl7pPr>
+            <a:lvl8pPr marL="3199440" indent="0">
+              <a:buNone/>
+              <a:defRPr sz="1600"/>
+            </a:lvl8pPr>
+            <a:lvl9pPr marL="3656503" indent="0">
+              <a:buNone/>
+              <a:defRPr sz="1600"/>
+            </a:lvl9pPr>
+          </a:lstStyle>
+          <a:p>
+            <a:endParaRPr lang="en-US" dirty="0"/>
+          </a:p>
+        </p:txBody>
+      </p:sp>
+      <p:sp>
+        <p:nvSpPr>
+          <p:cNvPr id="22" name="Text Placeholder 3"/>
+          <p:cNvSpPr>
+            <a:spLocks noGrp="1"/>
+          </p:cNvSpPr>
+          <p:nvPr>
+            <p:ph type="body" sz="half" idx="18"/>
+          </p:nvPr>
+        </p:nvSpPr>
+        <p:spPr>
+          <a:xfrm>
+            <a:off x="652293" y="4827212"/>
+            <a:ext cx="2939284" cy="659189"/>
+          </a:xfrm>
+        </p:spPr>
+        <p:txBody>
+          <a:bodyPr anchor="t">
+            <a:normAutofit/>
+          </a:bodyPr>
+          <a:lstStyle>
+            <a:lvl1pPr marL="0" indent="0">
+              <a:buNone/>
+              <a:defRPr sz="1400"/>
+            </a:lvl1pPr>
+            <a:lvl2pPr marL="457063" indent="0">
+              <a:buNone/>
+              <a:defRPr sz="1200"/>
+            </a:lvl2pPr>
+            <a:lvl3pPr marL="914126" indent="0">
+              <a:buNone/>
+              <a:defRPr sz="1000"/>
+            </a:lvl3pPr>
+            <a:lvl4pPr marL="1371189" indent="0">
+              <a:buNone/>
+              <a:defRPr sz="900"/>
+            </a:lvl4pPr>
+            <a:lvl5pPr marL="1828251" indent="0">
+              <a:buNone/>
+              <a:defRPr sz="900"/>
+            </a:lvl5pPr>
+            <a:lvl6pPr marL="2285314" indent="0">
+              <a:buNone/>
+              <a:defRPr sz="900"/>
+            </a:lvl6pPr>
+            <a:lvl7pPr marL="2742377" indent="0">
+              <a:buNone/>
+              <a:defRPr sz="900"/>
+            </a:lvl7pPr>
+            <a:lvl8pPr marL="3199440" indent="0">
+              <a:buNone/>
+              <a:defRPr sz="900"/>
+            </a:lvl8pPr>
+            <a:lvl9pPr marL="3656503" indent="0">
+              <a:buNone/>
+              <a:defRPr sz="900"/>
+            </a:lvl9pPr>
+          </a:lstStyle>
+          <a:p>
+            <a:pPr lvl="0"/>
+            <a:r>
+              <a:rPr lang="en-US"/>
+              <a:t>Click to edit Master text styles</a:t>
+            </a:r>
+          </a:p>
+        </p:txBody>
+      </p:sp>
+      <p:sp>
+        <p:nvSpPr>
+          <p:cNvPr id="5" name="Text Placeholder 4"/>
+          <p:cNvSpPr>
+            <a:spLocks noGrp="1"/>
+          </p:cNvSpPr>
+          <p:nvPr>
+            <p:ph type="body" sz="quarter" idx="3"/>
+          </p:nvPr>
+        </p:nvSpPr>
+        <p:spPr>
+          <a:xfrm>
+            <a:off x="3888363" y="4250949"/>
+            <a:ext cx="2929762" cy="576262"/>
+          </a:xfrm>
+        </p:spPr>
+        <p:txBody>
+          <a:bodyPr anchor="b">
+            <a:noAutofit/>
+          </a:bodyPr>
+          <a:lstStyle>
+            <a:lvl1pPr marL="0" indent="0">
+              <a:buNone/>
+              <a:defRPr sz="2399" b="0">
+                <a:solidFill>
+                  <a:schemeClr val="bg2">
+                    <a:lumMod val="40000"/>
+                    <a:lumOff val="60000"/>
+                  </a:schemeClr>
+                </a:solidFill>
+              </a:defRPr>
+            </a:lvl1pPr>
+            <a:lvl2pPr marL="457063" indent="0">
+              <a:buNone/>
+              <a:defRPr sz="1999" b="1"/>
+            </a:lvl2pPr>
+            <a:lvl3pPr marL="914126" indent="0">
+              <a:buNone/>
+              <a:defRPr sz="1799" b="1"/>
+            </a:lvl3pPr>
+            <a:lvl4pPr marL="1371189" indent="0">
+              <a:buNone/>
+              <a:defRPr sz="1600" b="1"/>
+            </a:lvl4pPr>
+            <a:lvl5pPr marL="1828251" indent="0">
+              <a:buNone/>
+              <a:defRPr sz="1600" b="1"/>
+            </a:lvl5pPr>
+            <a:lvl6pPr marL="2285314" indent="0">
+              <a:buNone/>
+              <a:defRPr sz="1600" b="1"/>
+            </a:lvl6pPr>
+            <a:lvl7pPr marL="2742377" indent="0">
+              <a:buNone/>
+              <a:defRPr sz="1600" b="1"/>
+            </a:lvl7pPr>
+            <a:lvl8pPr marL="3199440" indent="0">
+              <a:buNone/>
+              <a:defRPr sz="1600" b="1"/>
+            </a:lvl8pPr>
+            <a:lvl9pPr marL="3656503" indent="0">
+              <a:buNone/>
+              <a:defRPr sz="1600" b="1"/>
+            </a:lvl9pPr>
+          </a:lstStyle>
+          <a:p>
+            <a:pPr lvl="0"/>
+            <a:r>
+              <a:rPr lang="en-US"/>
+              <a:t>Click to edit Master text styles</a:t>
+            </a:r>
+          </a:p>
+        </p:txBody>
+      </p:sp>
+      <p:sp>
+        <p:nvSpPr>
+          <p:cNvPr id="30" name="Picture Placeholder 2"/>
+          <p:cNvSpPr>
+            <a:spLocks noGrp="1" noChangeAspect="1"/>
+          </p:cNvSpPr>
+          <p:nvPr>
+            <p:ph type="pic" idx="21"/>
+          </p:nvPr>
+        </p:nvSpPr>
+        <p:spPr>
+          <a:xfrm>
+            <a:off x="3888362" y="2209800"/>
+            <a:ext cx="2929762" cy="1524000"/>
+          </a:xfrm>
+          <a:prstGeom prst="roundRect">
+            <a:avLst>
+              <a:gd name="adj" fmla="val 1858"/>
+            </a:avLst>
+          </a:prstGeom>
+          <a:effectLst>
+            <a:outerShdw blurRad="50800" dist="50800" dir="5400000" algn="tl" rotWithShape="0">
+              <a:srgbClr val="000000">
+                <a:alpha val="43000"/>
+              </a:srgbClr>
+            </a:outerShdw>
+          </a:effectLst>
+        </p:spPr>
+        <p:txBody>
+          <a:bodyPr anchor="t">
+            <a:normAutofit/>
+          </a:bodyPr>
+          <a:lstStyle>
+            <a:lvl1pPr marL="0" indent="0" algn="ctr">
+              <a:buNone/>
+              <a:defRPr sz="1600"/>
+            </a:lvl1pPr>
+            <a:lvl2pPr marL="457063" indent="0">
+              <a:buNone/>
+              <a:defRPr sz="1600"/>
+            </a:lvl2pPr>
+            <a:lvl3pPr marL="914126" indent="0">
+              <a:buNone/>
+              <a:defRPr sz="1600"/>
+            </a:lvl3pPr>
+            <a:lvl4pPr marL="1371189" indent="0">
+              <a:buNone/>
+              <a:defRPr sz="1600"/>
+            </a:lvl4pPr>
+            <a:lvl5pPr marL="1828251" indent="0">
+              <a:buNone/>
+              <a:defRPr sz="1600"/>
+            </a:lvl5pPr>
+            <a:lvl6pPr marL="2285314" indent="0">
+              <a:buNone/>
+              <a:defRPr sz="1600"/>
+            </a:lvl6pPr>
+            <a:lvl7pPr marL="2742377" indent="0">
+              <a:buNone/>
+              <a:defRPr sz="1600"/>
+            </a:lvl7pPr>
+            <a:lvl8pPr marL="3199440" indent="0">
+              <a:buNone/>
+              <a:defRPr sz="1600"/>
+            </a:lvl8pPr>
+            <a:lvl9pPr marL="3656503" indent="0">
+              <a:buNone/>
+              <a:defRPr sz="1600"/>
+            </a:lvl9pPr>
+          </a:lstStyle>
+          <a:p>
+            <a:endParaRPr lang="en-US" dirty="0"/>
+          </a:p>
+        </p:txBody>
+      </p:sp>
+      <p:sp>
+        <p:nvSpPr>
+          <p:cNvPr id="23" name="Text Placeholder 3"/>
+          <p:cNvSpPr>
+            <a:spLocks noGrp="1"/>
+          </p:cNvSpPr>
+          <p:nvPr>
+            <p:ph type="body" sz="half" idx="19"/>
+          </p:nvPr>
+        </p:nvSpPr>
+        <p:spPr>
+          <a:xfrm>
+            <a:off x="3887009" y="4827211"/>
+            <a:ext cx="2933642" cy="659189"/>
+          </a:xfrm>
+        </p:spPr>
+        <p:txBody>
+          <a:bodyPr anchor="t">
+            <a:normAutofit/>
+          </a:bodyPr>
+          <a:lstStyle>
+            <a:lvl1pPr marL="0" indent="0">
+              <a:buNone/>
+              <a:defRPr sz="1400"/>
+            </a:lvl1pPr>
+            <a:lvl2pPr marL="457063" indent="0">
+              <a:buNone/>
+              <a:defRPr sz="1200"/>
+            </a:lvl2pPr>
+            <a:lvl3pPr marL="914126" indent="0">
+              <a:buNone/>
+              <a:defRPr sz="1000"/>
+            </a:lvl3pPr>
+            <a:lvl4pPr marL="1371189" indent="0">
+              <a:buNone/>
+              <a:defRPr sz="900"/>
+            </a:lvl4pPr>
+            <a:lvl5pPr marL="1828251" indent="0">
+              <a:buNone/>
+              <a:defRPr sz="900"/>
+            </a:lvl5pPr>
+            <a:lvl6pPr marL="2285314" indent="0">
+              <a:buNone/>
+              <a:defRPr sz="900"/>
+            </a:lvl6pPr>
+            <a:lvl7pPr marL="2742377" indent="0">
+              <a:buNone/>
+              <a:defRPr sz="900"/>
+            </a:lvl7pPr>
+            <a:lvl8pPr marL="3199440" indent="0">
+              <a:buNone/>
+              <a:defRPr sz="900"/>
+            </a:lvl8pPr>
+            <a:lvl9pPr marL="3656503" indent="0">
+              <a:buNone/>
+              <a:defRPr sz="900"/>
+            </a:lvl9pPr>
+          </a:lstStyle>
+          <a:p>
+            <a:pPr lvl="0"/>
+            <a:r>
+              <a:rPr lang="en-US"/>
+              <a:t>Click to edit Master text styles</a:t>
+            </a:r>
+          </a:p>
+        </p:txBody>
+      </p:sp>
+      <p:sp>
+        <p:nvSpPr>
+          <p:cNvPr id="14" name="Text Placeholder 4"/>
+          <p:cNvSpPr>
+            <a:spLocks noGrp="1"/>
+          </p:cNvSpPr>
+          <p:nvPr>
+            <p:ph type="body" sz="quarter" idx="13"/>
+          </p:nvPr>
+        </p:nvSpPr>
+        <p:spPr>
+          <a:xfrm>
+            <a:off x="7122845" y="4250949"/>
+            <a:ext cx="2931349" cy="576262"/>
+          </a:xfrm>
+        </p:spPr>
+        <p:txBody>
+          <a:bodyPr anchor="b">
+            <a:noAutofit/>
+          </a:bodyPr>
+          <a:lstStyle>
+            <a:lvl1pPr marL="0" indent="0">
+              <a:buNone/>
+              <a:defRPr sz="2399" b="0">
+                <a:solidFill>
+                  <a:schemeClr val="bg2">
+                    <a:lumMod val="40000"/>
+                    <a:lumOff val="60000"/>
+                  </a:schemeClr>
+                </a:solidFill>
+              </a:defRPr>
+            </a:lvl1pPr>
+            <a:lvl2pPr marL="457063" indent="0">
+              <a:buNone/>
+              <a:defRPr sz="1999" b="1"/>
+            </a:lvl2pPr>
+            <a:lvl3pPr marL="914126" indent="0">
+              <a:buNone/>
+              <a:defRPr sz="1799" b="1"/>
+            </a:lvl3pPr>
+            <a:lvl4pPr marL="1371189" indent="0">
+              <a:buNone/>
+              <a:defRPr sz="1600" b="1"/>
+            </a:lvl4pPr>
+            <a:lvl5pPr marL="1828251" indent="0">
+              <a:buNone/>
+              <a:defRPr sz="1600" b="1"/>
+            </a:lvl5pPr>
+            <a:lvl6pPr marL="2285314" indent="0">
+              <a:buNone/>
+              <a:defRPr sz="1600" b="1"/>
+            </a:lvl6pPr>
+            <a:lvl7pPr marL="2742377" indent="0">
+              <a:buNone/>
+              <a:defRPr sz="1600" b="1"/>
+            </a:lvl7pPr>
+            <a:lvl8pPr marL="3199440" indent="0">
+              <a:buNone/>
+              <a:defRPr sz="1600" b="1"/>
+            </a:lvl8pPr>
+            <a:lvl9pPr marL="3656503" indent="0">
+              <a:buNone/>
+              <a:defRPr sz="1600" b="1"/>
+            </a:lvl9pPr>
+          </a:lstStyle>
+          <a:p>
+            <a:pPr lvl="0"/>
+            <a:r>
+              <a:rPr lang="en-US"/>
+              <a:t>Click to edit Master text styles</a:t>
+            </a:r>
+          </a:p>
+        </p:txBody>
+      </p:sp>
+      <p:sp>
+        <p:nvSpPr>
+          <p:cNvPr id="31" name="Picture Placeholder 2"/>
+          <p:cNvSpPr>
+            <a:spLocks noGrp="1" noChangeAspect="1"/>
+          </p:cNvSpPr>
+          <p:nvPr>
+            <p:ph type="pic" idx="22"/>
+          </p:nvPr>
+        </p:nvSpPr>
+        <p:spPr>
+          <a:xfrm>
+            <a:off x="7122844" y="2209800"/>
+            <a:ext cx="2931349" cy="1524000"/>
+          </a:xfrm>
+          <a:prstGeom prst="roundRect">
+            <a:avLst>
+              <a:gd name="adj" fmla="val 1858"/>
+            </a:avLst>
+          </a:prstGeom>
+          <a:effectLst>
+            <a:outerShdw blurRad="50800" dist="50800" dir="5400000" algn="tl" rotWithShape="0">
+              <a:srgbClr val="000000">
+                <a:alpha val="43000"/>
+              </a:srgbClr>
+            </a:outerShdw>
+          </a:effectLst>
+        </p:spPr>
+        <p:txBody>
+          <a:bodyPr anchor="t">
+            <a:normAutofit/>
+          </a:bodyPr>
+          <a:lstStyle>
+            <a:lvl1pPr marL="0" indent="0" algn="ctr">
+              <a:buNone/>
+              <a:defRPr sz="1600"/>
+            </a:lvl1pPr>
+            <a:lvl2pPr marL="457063" indent="0">
+              <a:buNone/>
+              <a:defRPr sz="1600"/>
+            </a:lvl2pPr>
+            <a:lvl3pPr marL="914126" indent="0">
+              <a:buNone/>
+              <a:defRPr sz="1600"/>
+            </a:lvl3pPr>
+            <a:lvl4pPr marL="1371189" indent="0">
+              <a:buNone/>
+              <a:defRPr sz="1600"/>
+            </a:lvl4pPr>
+            <a:lvl5pPr marL="1828251" indent="0">
+              <a:buNone/>
+              <a:defRPr sz="1600"/>
+            </a:lvl5pPr>
+            <a:lvl6pPr marL="2285314" indent="0">
+              <a:buNone/>
+              <a:defRPr sz="1600"/>
+            </a:lvl6pPr>
+            <a:lvl7pPr marL="2742377" indent="0">
+              <a:buNone/>
+              <a:defRPr sz="1600"/>
+            </a:lvl7pPr>
+            <a:lvl8pPr marL="3199440" indent="0">
+              <a:buNone/>
+              <a:defRPr sz="1600"/>
+            </a:lvl8pPr>
+            <a:lvl9pPr marL="3656503" indent="0">
+              <a:buNone/>
+              <a:defRPr sz="1600"/>
+            </a:lvl9pPr>
+          </a:lstStyle>
+          <a:p>
+            <a:endParaRPr lang="en-US" dirty="0"/>
+          </a:p>
+        </p:txBody>
+      </p:sp>
+      <p:sp>
+        <p:nvSpPr>
+          <p:cNvPr id="24" name="Text Placeholder 3"/>
+          <p:cNvSpPr>
+            <a:spLocks noGrp="1"/>
+          </p:cNvSpPr>
+          <p:nvPr>
+            <p:ph type="body" sz="half" idx="20"/>
+          </p:nvPr>
+        </p:nvSpPr>
+        <p:spPr>
+          <a:xfrm>
+            <a:off x="7122720" y="4827209"/>
+            <a:ext cx="2935232" cy="659189"/>
+          </a:xfrm>
+        </p:spPr>
+        <p:txBody>
+          <a:bodyPr anchor="t">
+            <a:normAutofit/>
+          </a:bodyPr>
+          <a:lstStyle>
+            <a:lvl1pPr marL="0" indent="0">
+              <a:buNone/>
+              <a:defRPr sz="1400"/>
+            </a:lvl1pPr>
+            <a:lvl2pPr marL="457063" indent="0">
+              <a:buNone/>
+              <a:defRPr sz="1200"/>
+            </a:lvl2pPr>
+            <a:lvl3pPr marL="914126" indent="0">
+              <a:buNone/>
+              <a:defRPr sz="1000"/>
+            </a:lvl3pPr>
+            <a:lvl4pPr marL="1371189" indent="0">
+              <a:buNone/>
+              <a:defRPr sz="900"/>
+            </a:lvl4pPr>
+            <a:lvl5pPr marL="1828251" indent="0">
+              <a:buNone/>
+              <a:defRPr sz="900"/>
+            </a:lvl5pPr>
+            <a:lvl6pPr marL="2285314" indent="0">
+              <a:buNone/>
+              <a:defRPr sz="900"/>
+            </a:lvl6pPr>
+            <a:lvl7pPr marL="2742377" indent="0">
+              <a:buNone/>
+              <a:defRPr sz="900"/>
+            </a:lvl7pPr>
+            <a:lvl8pPr marL="3199440" indent="0">
+              <a:buNone/>
+              <a:defRPr sz="900"/>
+            </a:lvl8pPr>
+            <a:lvl9pPr marL="3656503" indent="0">
+              <a:buNone/>
+              <a:defRPr sz="900"/>
+            </a:lvl9pPr>
+          </a:lstStyle>
+          <a:p>
+            <a:pPr lvl="0"/>
+            <a:r>
+              <a:rPr lang="en-US"/>
+              <a:t>Click to edit Master text styles</a:t>
+            </a:r>
+          </a:p>
+        </p:txBody>
+      </p:sp>
+      <p:cxnSp>
+        <p:nvCxnSpPr>
+          <p:cNvPr id="19" name="Straight Connector 18"/>
+          <p:cNvCxnSpPr/>
+          <p:nvPr/>
+        </p:nvCxnSpPr>
+        <p:spPr>
+          <a:xfrm>
+            <a:off x="3725172" y="2133600"/>
+            <a:ext cx="0" cy="3962400"/>
+          </a:xfrm>
+          <a:prstGeom prst="line">
+            <a:avLst/>
+          </a:prstGeom>
+          <a:ln w="12700" cmpd="sng">
+            <a:solidFill>
+              <a:schemeClr val="bg2">
+                <a:lumMod val="40000"/>
+                <a:lumOff val="60000"/>
+                <a:alpha val="40000"/>
+              </a:schemeClr>
+            </a:solidFill>
+          </a:ln>
+        </p:spPr>
+        <p:style>
+          <a:lnRef idx="2">
+            <a:schemeClr val="accent1"/>
+          </a:lnRef>
+          <a:fillRef idx="0">
+            <a:schemeClr val="accent1"/>
+          </a:fillRef>
+          <a:effectRef idx="1">
+            <a:schemeClr val="accent1"/>
+          </a:effectRef>
+          <a:fontRef idx="minor">
+            <a:schemeClr val="tx1"/>
+          </a:fontRef>
+        </p:style>
+      </p:cxnSp>
+      <p:cxnSp>
+        <p:nvCxnSpPr>
+          <p:cNvPr id="20" name="Straight Connector 19"/>
+          <p:cNvCxnSpPr/>
+          <p:nvPr/>
+        </p:nvCxnSpPr>
+        <p:spPr>
+          <a:xfrm>
+            <a:off x="6960414" y="2133600"/>
+            <a:ext cx="0" cy="3966882"/>
+          </a:xfrm>
+          <a:prstGeom prst="line">
+            <a:avLst/>
+          </a:prstGeom>
+          <a:ln w="12700" cmpd="sng">
+            <a:solidFill>
+              <a:schemeClr val="bg2">
+                <a:lumMod val="40000"/>
+                <a:lumOff val="60000"/>
+                <a:alpha val="40000"/>
+              </a:schemeClr>
+            </a:solidFill>
+          </a:ln>
+        </p:spPr>
+        <p:style>
+          <a:lnRef idx="2">
+            <a:schemeClr val="accent1"/>
+          </a:lnRef>
+          <a:fillRef idx="0">
+            <a:schemeClr val="accent1"/>
+          </a:fillRef>
+          <a:effectRef idx="1">
+            <a:schemeClr val="accent1"/>
+          </a:effectRef>
+          <a:fontRef idx="minor">
+            <a:schemeClr val="tx1"/>
+          </a:fontRef>
+        </p:style>
+      </p:cxnSp>
+      <p:sp>
+        <p:nvSpPr>
+          <p:cNvPr id="7" name="Date Placeholder 3"/>
+          <p:cNvSpPr>
+            <a:spLocks noGrp="1"/>
+          </p:cNvSpPr>
+          <p:nvPr>
+            <p:ph type="dt" sz="half" idx="10"/>
+          </p:nvPr>
+        </p:nvSpPr>
+        <p:spPr/>
+        <p:txBody>
+          <a:bodyPr/>
+          <a:lstStyle/>
+          <a:p>
+            <a:fld id="{5BCAD085-E8A6-8845-BD4E-CB4CCA059FC4}" type="datetimeFigureOut">
+              <a:rPr lang="en-US" smtClean="0"/>
+              <a:t>10/26/26</a:t>
+            </a:fld>
+            <a:endParaRPr lang="en-US"/>
+          </a:p>
+        </p:txBody>
+      </p:sp>
+      <p:sp>
+        <p:nvSpPr>
+          <p:cNvPr id="4" name="Footer Placeholder 4"/>
+          <p:cNvSpPr>
+            <a:spLocks noGrp="1"/>
+          </p:cNvSpPr>
+          <p:nvPr>
+            <p:ph type="ftr" sz="quarter" idx="11"/>
+          </p:nvPr>
+        </p:nvSpPr>
+        <p:spPr/>
+        <p:txBody>
+          <a:bodyPr/>
+          <a:lstStyle/>
+          <a:p>
+            <a:endParaRPr lang="en-US"/>
+          </a:p>
+        </p:txBody>
+      </p:sp>
+      <p:sp>
+        <p:nvSpPr>
+          <p:cNvPr id="6" name="Slide Number Placeholder 5"/>
+          <p:cNvSpPr>
+            <a:spLocks noGrp="1"/>
+          </p:cNvSpPr>
+          <p:nvPr>
+            <p:ph type="sldNum" sz="quarter" idx="12"/>
+          </p:nvPr>
+        </p:nvSpPr>
+        <p:spPr/>
+        <p:txBody>
+          <a:bodyPr/>
+          <a:lstStyle/>
+          <a:p>
+            <a:fld id="{C1FF6DA9-008F-8B48-92A6-B652298478BF}" type="slidenum">
+              <a:rPr lang="en-US" smtClean="0"/>
+              <a:t>‹#›</a:t>
+            </a:fld>
+            <a:endParaRPr lang="en-US"/>
+          </a:p>
+        </p:txBody>
+      </p:sp>
+    </p:spTree>
+    <p:extLst>
+      <p:ext uri="{BB962C8B-B14F-4D97-AF65-F5344CB8AC3E}">
+        <p14:creationId xmlns:p14="http://schemas.microsoft.com/office/powerpoint/2010/main" val="4146080566"/>
+      </p:ext>
+    </p:extLst>
+  </p:cSld>
+  <p:clrMapOvr>
+    <a:masterClrMapping/>
+  </p:clrMapOvr>
+</p:sldLayout>
+</file>
+
+<file path=ppt/slideLayouts/slideLayout16.xml><?xml version="1.0" encoding="utf-8"?>
 <p:sldLayout xmlns:a="http://schemas.openxmlformats.org/drawingml/2006/main" xmlns:r="http://schemas.openxmlformats.org/officeDocument/2006/relationships" xmlns:p="http://schemas.openxmlformats.org/presentationml/2006/main" type="vertTx" preserve="1">
   <p:cSld name="Title and Vertical Text">
     <p:spTree>
@@ -391,10 +2962,10 @@
           <a:lstStyle/>
           <a:p>
             <a:r>
-              <a:rPr lang="en-US" smtClean="0"/>
+              <a:rPr lang="en-US"/>
               <a:t>Click to edit Master title style</a:t>
             </a:r>
-            <a:endParaRPr lang="en-US"/>
+            <a:endParaRPr lang="en-US" dirty="0"/>
           </a:p>
         </p:txBody>
       </p:sp>
@@ -410,43 +2981,43 @@
         </p:nvSpPr>
         <p:spPr/>
         <p:txBody>
-          <a:bodyPr vert="eaVert"/>
+          <a:bodyPr vert="eaVert" anchor="t" anchorCtr="0"/>
           <a:lstStyle/>
           <a:p>
             <a:pPr lvl="0"/>
             <a:r>
-              <a:rPr lang="en-US" smtClean="0"/>
+              <a:rPr lang="en-US"/>
               <a:t>Click to edit Master text styles</a:t>
             </a:r>
           </a:p>
           <a:p>
             <a:pPr lvl="1"/>
             <a:r>
-              <a:rPr lang="en-US" smtClean="0"/>
+              <a:rPr lang="en-US"/>
               <a:t>Second level</a:t>
             </a:r>
           </a:p>
           <a:p>
             <a:pPr lvl="2"/>
             <a:r>
-              <a:rPr lang="en-US" smtClean="0"/>
+              <a:rPr lang="en-US"/>
               <a:t>Third level</a:t>
             </a:r>
           </a:p>
           <a:p>
             <a:pPr lvl="3"/>
             <a:r>
-              <a:rPr lang="en-US" smtClean="0"/>
+              <a:rPr lang="en-US"/>
               <a:t>Fourth level</a:t>
             </a:r>
           </a:p>
           <a:p>
             <a:pPr lvl="4"/>
             <a:r>
-              <a:rPr lang="en-US" smtClean="0"/>
+              <a:rPr lang="en-US"/>
               <a:t>Fifth level</a:t>
             </a:r>
-            <a:endParaRPr lang="en-US"/>
+            <a:endParaRPr lang="en-US" dirty="0"/>
           </a:p>
         </p:txBody>
       </p:sp>
@@ -467,7 +3038,7 @@
           <a:p>
             <a:fld id="{5BCAD085-E8A6-8845-BD4E-CB4CCA059FC4}" type="datetimeFigureOut">
               <a:rPr lang="en-US" smtClean="0"/>
-              <a:t>1/27/13</a:t>
+              <a:t>10/26/26</a:t>
             </a:fld>
             <a:endParaRPr lang="en-US"/>
           </a:p>
@@ -518,7 +3089,7 @@
     </p:spTree>
     <p:extLst>
       <p:ext uri="{BB962C8B-B14F-4D97-AF65-F5344CB8AC3E}">
-        <p14:creationId xmlns:p14="http://schemas.microsoft.com/office/powerpoint/2010/main" val="2910927964"/>
+        <p14:creationId xmlns:p14="http://schemas.microsoft.com/office/powerpoint/2010/main" val="2998849241"/>
       </p:ext>
     </p:extLst>
   </p:cSld>
@@ -528,7 +3099,7 @@
 </p:sldLayout>
 </file>
 
-<file path=ppt/slideLayouts/slideLayout11.xml><?xml version="1.0" encoding="utf-8"?>
+<file path=ppt/slideLayouts/slideLayout17.xml><?xml version="1.0" encoding="utf-8"?>
 <p:sldLayout xmlns:a="http://schemas.openxmlformats.org/drawingml/2006/main" xmlns:r="http://schemas.openxmlformats.org/officeDocument/2006/relationships" xmlns:p="http://schemas.openxmlformats.org/presentationml/2006/main" type="vertTitleAndTx" preserve="1">
   <p:cSld name="Vertical Title and Text">
     <p:spTree>
@@ -557,19 +3128,19 @@
         </p:nvSpPr>
         <p:spPr>
           <a:xfrm>
-            <a:off x="6629400" y="274638"/>
-            <a:ext cx="2057400" cy="5851525"/>
-          </a:xfrm>
-        </p:spPr>
-        <p:txBody>
-          <a:bodyPr vert="eaVert"/>
-          <a:lstStyle/>
-          <a:p>
-            <a:r>
-              <a:rPr lang="en-US" smtClean="0"/>
+            <a:off x="8302050" y="430213"/>
+            <a:ext cx="1752145" cy="5826125"/>
+          </a:xfrm>
+        </p:spPr>
+        <p:txBody>
+          <a:bodyPr vert="eaVert" anchor="b" anchorCtr="0"/>
+          <a:lstStyle/>
+          <a:p>
+            <a:r>
+              <a:rPr lang="en-US"/>
               <a:t>Click to edit Master title style</a:t>
             </a:r>
-            <a:endParaRPr lang="en-US"/>
+            <a:endParaRPr lang="en-US" dirty="0"/>
           </a:p>
         </p:txBody>
       </p:sp>
@@ -585,8 +3156,8 @@
         </p:nvSpPr>
         <p:spPr>
           <a:xfrm>
-            <a:off x="457200" y="274638"/>
-            <a:ext cx="6019800" cy="5851525"/>
+            <a:off x="652294" y="887414"/>
+            <a:ext cx="7421216" cy="5368924"/>
           </a:xfrm>
         </p:spPr>
         <p:txBody>
@@ -595,38 +3166,38 @@
           <a:p>
             <a:pPr lvl="0"/>
             <a:r>
-              <a:rPr lang="en-US" smtClean="0"/>
+              <a:rPr lang="en-US"/>
               <a:t>Click to edit Master text styles</a:t>
             </a:r>
           </a:p>
           <a:p>
             <a:pPr lvl="1"/>
             <a:r>
-              <a:rPr lang="en-US" smtClean="0"/>
+              <a:rPr lang="en-US"/>
               <a:t>Second level</a:t>
             </a:r>
           </a:p>
           <a:p>
             <a:pPr lvl="2"/>
             <a:r>
-              <a:rPr lang="en-US" smtClean="0"/>
+              <a:rPr lang="en-US"/>
               <a:t>Third level</a:t>
             </a:r>
           </a:p>
           <a:p>
             <a:pPr lvl="3"/>
             <a:r>
-              <a:rPr lang="en-US" smtClean="0"/>
+              <a:rPr lang="en-US"/>
               <a:t>Fourth level</a:t>
             </a:r>
           </a:p>
           <a:p>
             <a:pPr lvl="4"/>
             <a:r>
-              <a:rPr lang="en-US" smtClean="0"/>
+              <a:rPr lang="en-US"/>
               <a:t>Fifth level</a:t>
             </a:r>
-            <a:endParaRPr lang="en-US"/>
+            <a:endParaRPr lang="en-US" dirty="0"/>
           </a:p>
         </p:txBody>
       </p:sp>
@@ -647,7 +3218,7 @@
           <a:p>
             <a:fld id="{5BCAD085-E8A6-8845-BD4E-CB4CCA059FC4}" type="datetimeFigureOut">
               <a:rPr lang="en-US" smtClean="0"/>
-              <a:t>1/27/13</a:t>
+              <a:t>10/26/26</a:t>
             </a:fld>
             <a:endParaRPr lang="en-US"/>
           </a:p>
@@ -698,7 +3269,7 @@
     </p:spTree>
     <p:extLst>
       <p:ext uri="{BB962C8B-B14F-4D97-AF65-F5344CB8AC3E}">
-        <p14:creationId xmlns:p14="http://schemas.microsoft.com/office/powerpoint/2010/main" val="3612223792"/>
+        <p14:creationId xmlns:p14="http://schemas.microsoft.com/office/powerpoint/2010/main" val="3264516113"/>
       </p:ext>
     </p:extLst>
   </p:cSld>
@@ -741,10 +3312,10 @@
           <a:lstStyle/>
           <a:p>
             <a:r>
-              <a:rPr lang="en-US" smtClean="0"/>
+              <a:rPr lang="en-US"/>
               <a:t>Click to edit Master title style</a:t>
             </a:r>
-            <a:endParaRPr lang="en-US"/>
+            <a:endParaRPr lang="en-US" dirty="0"/>
           </a:p>
         </p:txBody>
       </p:sp>
@@ -765,44 +3336,44 @@
           <a:p>
             <a:pPr lvl="0"/>
             <a:r>
-              <a:rPr lang="en-US" smtClean="0"/>
+              <a:rPr lang="en-US"/>
               <a:t>Click to edit Master text styles</a:t>
             </a:r>
           </a:p>
           <a:p>
             <a:pPr lvl="1"/>
             <a:r>
-              <a:rPr lang="en-US" smtClean="0"/>
+              <a:rPr lang="en-US"/>
               <a:t>Second level</a:t>
             </a:r>
           </a:p>
           <a:p>
             <a:pPr lvl="2"/>
             <a:r>
-              <a:rPr lang="en-US" smtClean="0"/>
+              <a:rPr lang="en-US"/>
               <a:t>Third level</a:t>
             </a:r>
           </a:p>
           <a:p>
             <a:pPr lvl="3"/>
             <a:r>
-              <a:rPr lang="en-US" smtClean="0"/>
+              <a:rPr lang="en-US"/>
               <a:t>Fourth level</a:t>
             </a:r>
           </a:p>
           <a:p>
             <a:pPr lvl="4"/>
             <a:r>
-              <a:rPr lang="en-US" smtClean="0"/>
+              <a:rPr lang="en-US"/>
               <a:t>Fifth level</a:t>
             </a:r>
-            <a:endParaRPr lang="en-US"/>
-          </a:p>
-        </p:txBody>
-      </p:sp>
-      <p:sp>
-        <p:nvSpPr>
-          <p:cNvPr id="4" name="Date Placeholder 3"/>
+            <a:endParaRPr lang="en-US" dirty="0"/>
+          </a:p>
+        </p:txBody>
+      </p:sp>
+      <p:sp>
+        <p:nvSpPr>
+          <p:cNvPr id="7" name="Date Placeholder 3"/>
           <p:cNvSpPr>
             <a:spLocks noGrp="1"/>
           </p:cNvSpPr>
@@ -817,7 +3388,7 @@
           <a:p>
             <a:fld id="{5BCAD085-E8A6-8845-BD4E-CB4CCA059FC4}" type="datetimeFigureOut">
               <a:rPr lang="en-US" smtClean="0"/>
-              <a:t>1/27/13</a:t>
+              <a:t>10/26/26</a:t>
             </a:fld>
             <a:endParaRPr lang="en-US"/>
           </a:p>
@@ -868,7 +3439,7 @@
     </p:spTree>
     <p:extLst>
       <p:ext uri="{BB962C8B-B14F-4D97-AF65-F5344CB8AC3E}">
-        <p14:creationId xmlns:p14="http://schemas.microsoft.com/office/powerpoint/2010/main" val="2614314258"/>
+        <p14:creationId xmlns:p14="http://schemas.microsoft.com/office/powerpoint/2010/main" val="971080589"/>
       </p:ext>
     </p:extLst>
   </p:cSld>
@@ -907,23 +3478,23 @@
         </p:nvSpPr>
         <p:spPr>
           <a:xfrm>
-            <a:off x="722313" y="4406900"/>
-            <a:ext cx="7772400" cy="1362075"/>
-          </a:xfrm>
-        </p:spPr>
-        <p:txBody>
-          <a:bodyPr anchor="t"/>
+            <a:off x="1154656" y="2861734"/>
+            <a:ext cx="8823359" cy="1915647"/>
+          </a:xfrm>
+        </p:spPr>
+        <p:txBody>
+          <a:bodyPr anchor="b"/>
           <a:lstStyle>
             <a:lvl1pPr algn="l">
-              <a:defRPr sz="4000" b="1" cap="all"/>
+              <a:defRPr sz="3999" b="0" cap="none"/>
             </a:lvl1pPr>
           </a:lstStyle>
           <a:p>
             <a:r>
-              <a:rPr lang="en-US" smtClean="0"/>
+              <a:rPr lang="en-US"/>
               <a:t>Click to edit Master title style</a:t>
             </a:r>
-            <a:endParaRPr lang="en-US"/>
+            <a:endParaRPr lang="en-US" dirty="0"/>
           </a:p>
         </p:txBody>
       </p:sp>
@@ -939,44 +3510,55 @@
         </p:nvSpPr>
         <p:spPr>
           <a:xfrm>
-            <a:off x="722313" y="2906713"/>
-            <a:ext cx="7772400" cy="1500187"/>
-          </a:xfrm>
-        </p:spPr>
-        <p:txBody>
-          <a:bodyPr anchor="b"/>
+            <a:off x="1154654" y="4777381"/>
+            <a:ext cx="8823360" cy="860400"/>
+          </a:xfrm>
+        </p:spPr>
+        <p:txBody>
+          <a:bodyPr anchor="t"/>
           <a:lstStyle>
-            <a:lvl1pPr marL="0" indent="0">
-              <a:buNone/>
-              <a:defRPr sz="2000">
+            <a:lvl1pPr marL="0" indent="0" algn="l">
+              <a:buNone/>
+              <a:defRPr sz="1999" cap="all">
+                <a:solidFill>
+                  <a:schemeClr val="bg2">
+                    <a:lumMod val="40000"/>
+                    <a:lumOff val="60000"/>
+                  </a:schemeClr>
+                </a:solidFill>
+              </a:defRPr>
+            </a:lvl1pPr>
+            <a:lvl2pPr marL="457063" indent="0">
+              <a:buNone/>
+              <a:defRPr sz="1799">
                 <a:solidFill>
                   <a:schemeClr val="tx1">
                     <a:tint val="75000"/>
                   </a:schemeClr>
                 </a:solidFill>
               </a:defRPr>
-            </a:lvl1pPr>
-            <a:lvl2pPr marL="457200" indent="0">
-              <a:buNone/>
-              <a:defRPr sz="1800">
+            </a:lvl2pPr>
+            <a:lvl3pPr marL="914126" indent="0">
+              <a:buNone/>
+              <a:defRPr sz="1600">
                 <a:solidFill>
                   <a:schemeClr val="tx1">
                     <a:tint val="75000"/>
                   </a:schemeClr>
                 </a:solidFill>
               </a:defRPr>
-            </a:lvl2pPr>
-            <a:lvl3pPr marL="914400" indent="0">
-              <a:buNone/>
-              <a:defRPr sz="1600">
+            </a:lvl3pPr>
+            <a:lvl4pPr marL="1371189" indent="0">
+              <a:buNone/>
+              <a:defRPr sz="1400">
                 <a:solidFill>
                   <a:schemeClr val="tx1">
                     <a:tint val="75000"/>
                   </a:schemeClr>
                 </a:solidFill>
               </a:defRPr>
-            </a:lvl3pPr>
-            <a:lvl4pPr marL="1371600" indent="0">
+            </a:lvl4pPr>
+            <a:lvl5pPr marL="1828251" indent="0">
               <a:buNone/>
               <a:defRPr sz="1400">
                 <a:solidFill>
@@ -985,8 +3567,8 @@
                   </a:schemeClr>
                 </a:solidFill>
               </a:defRPr>
-            </a:lvl4pPr>
-            <a:lvl5pPr marL="1828800" indent="0">
+            </a:lvl5pPr>
+            <a:lvl6pPr marL="2285314" indent="0">
               <a:buNone/>
               <a:defRPr sz="1400">
                 <a:solidFill>
@@ -995,8 +3577,8 @@
                   </a:schemeClr>
                 </a:solidFill>
               </a:defRPr>
-            </a:lvl5pPr>
-            <a:lvl6pPr marL="2286000" indent="0">
+            </a:lvl6pPr>
+            <a:lvl7pPr marL="2742377" indent="0">
               <a:buNone/>
               <a:defRPr sz="1400">
                 <a:solidFill>
@@ -1005,8 +3587,8 @@
                   </a:schemeClr>
                 </a:solidFill>
               </a:defRPr>
-            </a:lvl6pPr>
-            <a:lvl7pPr marL="2743200" indent="0">
+            </a:lvl7pPr>
+            <a:lvl8pPr marL="3199440" indent="0">
               <a:buNone/>
               <a:defRPr sz="1400">
                 <a:solidFill>
@@ -1015,8 +3597,8 @@
                   </a:schemeClr>
                 </a:solidFill>
               </a:defRPr>
-            </a:lvl7pPr>
-            <a:lvl8pPr marL="3200400" indent="0">
+            </a:lvl8pPr>
+            <a:lvl9pPr marL="3656503" indent="0">
               <a:buNone/>
               <a:defRPr sz="1400">
                 <a:solidFill>
@@ -1025,22 +3607,12 @@
                   </a:schemeClr>
                 </a:solidFill>
               </a:defRPr>
-            </a:lvl8pPr>
-            <a:lvl9pPr marL="3657600" indent="0">
-              <a:buNone/>
-              <a:defRPr sz="1400">
-                <a:solidFill>
-                  <a:schemeClr val="tx1">
-                    <a:tint val="75000"/>
-                  </a:schemeClr>
-                </a:solidFill>
-              </a:defRPr>
             </a:lvl9pPr>
           </a:lstStyle>
           <a:p>
             <a:pPr lvl="0"/>
             <a:r>
-              <a:rPr lang="en-US" smtClean="0"/>
+              <a:rPr lang="en-US"/>
               <a:t>Click to edit Master text styles</a:t>
             </a:r>
           </a:p>
@@ -1063,7 +3635,7 @@
           <a:p>
             <a:fld id="{5BCAD085-E8A6-8845-BD4E-CB4CCA059FC4}" type="datetimeFigureOut">
               <a:rPr lang="en-US" smtClean="0"/>
-              <a:t>1/27/13</a:t>
+              <a:t>10/26/26</a:t>
             </a:fld>
             <a:endParaRPr lang="en-US"/>
           </a:p>
@@ -1114,7 +3686,7 @@
     </p:spTree>
     <p:extLst>
       <p:ext uri="{BB962C8B-B14F-4D97-AF65-F5344CB8AC3E}">
-        <p14:creationId xmlns:p14="http://schemas.microsoft.com/office/powerpoint/2010/main" val="960648375"/>
+        <p14:creationId xmlns:p14="http://schemas.microsoft.com/office/powerpoint/2010/main" val="4190137984"/>
       </p:ext>
     </p:extLst>
   </p:cSld>
@@ -1157,10 +3729,10 @@
           <a:lstStyle/>
           <a:p>
             <a:r>
-              <a:rPr lang="en-US" smtClean="0"/>
+              <a:rPr lang="en-US"/>
               <a:t>Click to edit Master title style</a:t>
             </a:r>
-            <a:endParaRPr lang="en-US"/>
+            <a:endParaRPr lang="en-US" dirty="0"/>
           </a:p>
         </p:txBody>
       </p:sp>
@@ -1176,76 +3748,78 @@
         </p:nvSpPr>
         <p:spPr>
           <a:xfrm>
-            <a:off x="457200" y="1600200"/>
-            <a:ext cx="4038600" cy="4525963"/>
-          </a:xfrm>
-        </p:spPr>
-        <p:txBody>
-          <a:bodyPr/>
+            <a:off x="1103025" y="2060576"/>
+            <a:ext cx="4395194" cy="4195763"/>
+          </a:xfrm>
+        </p:spPr>
+        <p:txBody>
+          <a:bodyPr>
+            <a:normAutofit/>
+          </a:bodyPr>
           <a:lstStyle>
             <a:lvl1pPr>
-              <a:defRPr sz="2800"/>
+              <a:defRPr sz="1799"/>
             </a:lvl1pPr>
             <a:lvl2pPr>
-              <a:defRPr sz="2400"/>
+              <a:defRPr sz="1600"/>
             </a:lvl2pPr>
             <a:lvl3pPr>
-              <a:defRPr sz="2000"/>
+              <a:defRPr sz="1400"/>
             </a:lvl3pPr>
             <a:lvl4pPr>
-              <a:defRPr sz="1800"/>
+              <a:defRPr sz="1200"/>
             </a:lvl4pPr>
             <a:lvl5pPr>
-              <a:defRPr sz="1800"/>
+              <a:defRPr sz="1200"/>
             </a:lvl5pPr>
             <a:lvl6pPr>
-              <a:defRPr sz="1800"/>
+              <a:defRPr sz="1200"/>
             </a:lvl6pPr>
             <a:lvl7pPr>
-              <a:defRPr sz="1800"/>
+              <a:defRPr sz="1200"/>
             </a:lvl7pPr>
             <a:lvl8pPr>
-              <a:defRPr sz="1800"/>
+              <a:defRPr sz="1200"/>
             </a:lvl8pPr>
             <a:lvl9pPr>
-              <a:defRPr sz="1800"/>
+              <a:defRPr sz="1200"/>
             </a:lvl9pPr>
           </a:lstStyle>
           <a:p>
             <a:pPr lvl="0"/>
             <a:r>
-              <a:rPr lang="en-US" smtClean="0"/>
+              <a:rPr lang="en-US"/>
               <a:t>Click to edit Master text styles</a:t>
             </a:r>
           </a:p>
           <a:p>
             <a:pPr lvl="1"/>
             <a:r>
-              <a:rPr lang="en-US" smtClean="0"/>
+              <a:rPr lang="en-US"/>
               <a:t>Second level</a:t>
             </a:r>
           </a:p>
           <a:p>
             <a:pPr lvl="2"/>
             <a:r>
-              <a:rPr lang="en-US" smtClean="0"/>
+              <a:rPr lang="en-US"/>
               <a:t>Third level</a:t>
             </a:r>
           </a:p>
           <a:p>
             <a:pPr lvl="3"/>
             <a:r>
-              <a:rPr lang="en-US" smtClean="0"/>
+              <a:rPr lang="en-US"/>
               <a:t>Fourth level</a:t>
             </a:r>
           </a:p>
           <a:p>
             <a:pPr lvl="4"/>
             <a:r>
-              <a:rPr lang="en-US" smtClean="0"/>
+              <a:rPr lang="en-US"/>
               <a:t>Fifth level</a:t>
             </a:r>
-            <a:endParaRPr lang="en-US"/>
+            <a:endParaRPr lang="en-US" dirty="0"/>
           </a:p>
         </p:txBody>
       </p:sp>
@@ -1261,76 +3835,78 @@
         </p:nvSpPr>
         <p:spPr>
           <a:xfrm>
-            <a:off x="4648200" y="1600200"/>
-            <a:ext cx="4038600" cy="4525963"/>
-          </a:xfrm>
-        </p:spPr>
-        <p:txBody>
-          <a:bodyPr/>
+            <a:off x="5653021" y="2056092"/>
+            <a:ext cx="4395196" cy="4200245"/>
+          </a:xfrm>
+        </p:spPr>
+        <p:txBody>
+          <a:bodyPr>
+            <a:normAutofit/>
+          </a:bodyPr>
           <a:lstStyle>
             <a:lvl1pPr>
-              <a:defRPr sz="2800"/>
+              <a:defRPr sz="1799"/>
             </a:lvl1pPr>
             <a:lvl2pPr>
-              <a:defRPr sz="2400"/>
+              <a:defRPr sz="1600"/>
             </a:lvl2pPr>
             <a:lvl3pPr>
-              <a:defRPr sz="2000"/>
+              <a:defRPr sz="1400"/>
             </a:lvl3pPr>
             <a:lvl4pPr>
-              <a:defRPr sz="1800"/>
+              <a:defRPr sz="1200"/>
             </a:lvl4pPr>
             <a:lvl5pPr>
-              <a:defRPr sz="1800"/>
+              <a:defRPr sz="1200"/>
             </a:lvl5pPr>
             <a:lvl6pPr>
-              <a:defRPr sz="1800"/>
+              <a:defRPr sz="1200"/>
             </a:lvl6pPr>
             <a:lvl7pPr>
-              <a:defRPr sz="1800"/>
+              <a:defRPr sz="1200"/>
             </a:lvl7pPr>
             <a:lvl8pPr>
-              <a:defRPr sz="1800"/>
+              <a:defRPr sz="1200"/>
             </a:lvl8pPr>
             <a:lvl9pPr>
-              <a:defRPr sz="1800"/>
+              <a:defRPr sz="1200"/>
             </a:lvl9pPr>
           </a:lstStyle>
           <a:p>
             <a:pPr lvl="0"/>
             <a:r>
-              <a:rPr lang="en-US" smtClean="0"/>
+              <a:rPr lang="en-US"/>
               <a:t>Click to edit Master text styles</a:t>
             </a:r>
           </a:p>
           <a:p>
             <a:pPr lvl="1"/>
             <a:r>
-              <a:rPr lang="en-US" smtClean="0"/>
+              <a:rPr lang="en-US"/>
               <a:t>Second level</a:t>
             </a:r>
           </a:p>
           <a:p>
             <a:pPr lvl="2"/>
             <a:r>
-              <a:rPr lang="en-US" smtClean="0"/>
+              <a:rPr lang="en-US"/>
               <a:t>Third level</a:t>
             </a:r>
           </a:p>
           <a:p>
             <a:pPr lvl="3"/>
             <a:r>
-              <a:rPr lang="en-US" smtClean="0"/>
+              <a:rPr lang="en-US"/>
               <a:t>Fourth level</a:t>
             </a:r>
           </a:p>
           <a:p>
             <a:pPr lvl="4"/>
             <a:r>
-              <a:rPr lang="en-US" smtClean="0"/>
+              <a:rPr lang="en-US"/>
               <a:t>Fifth level</a:t>
             </a:r>
-            <a:endParaRPr lang="en-US"/>
+            <a:endParaRPr lang="en-US" dirty="0"/>
           </a:p>
         </p:txBody>
       </p:sp>
@@ -1351,7 +3927,7 @@
           <a:p>
             <a:fld id="{5BCAD085-E8A6-8845-BD4E-CB4CCA059FC4}" type="datetimeFigureOut">
               <a:rPr lang="en-US" smtClean="0"/>
-              <a:t>1/27/13</a:t>
+              <a:t>10/26/26</a:t>
             </a:fld>
             <a:endParaRPr lang="en-US"/>
           </a:p>
@@ -1402,7 +3978,7 @@
     </p:spTree>
     <p:extLst>
       <p:ext uri="{BB962C8B-B14F-4D97-AF65-F5344CB8AC3E}">
-        <p14:creationId xmlns:p14="http://schemas.microsoft.com/office/powerpoint/2010/main" val="2782244947"/>
+        <p14:creationId xmlns:p14="http://schemas.microsoft.com/office/powerpoint/2010/main" val="1193133837"/>
       </p:ext>
     </p:extLst>
   </p:cSld>
@@ -1449,10 +4025,10 @@
           </a:lstStyle>
           <a:p>
             <a:r>
-              <a:rPr lang="en-US" smtClean="0"/>
+              <a:rPr lang="en-US"/>
               <a:t>Click to edit Master title style</a:t>
             </a:r>
-            <a:endParaRPr lang="en-US"/>
+            <a:endParaRPr lang="en-US" dirty="0"/>
           </a:p>
         </p:txBody>
       </p:sp>
@@ -1468,46 +4044,55 @@
         </p:nvSpPr>
         <p:spPr>
           <a:xfrm>
-            <a:off x="457200" y="1535113"/>
-            <a:ext cx="4040188" cy="639762"/>
-          </a:xfrm>
-        </p:spPr>
-        <p:txBody>
-          <a:bodyPr anchor="b"/>
+            <a:off x="1103026" y="1905000"/>
+            <a:ext cx="4395193" cy="576262"/>
+          </a:xfrm>
+        </p:spPr>
+        <p:txBody>
+          <a:bodyPr anchor="b">
+            <a:noAutofit/>
+          </a:bodyPr>
           <a:lstStyle>
             <a:lvl1pPr marL="0" indent="0">
               <a:buNone/>
-              <a:defRPr sz="2400" b="1"/>
+              <a:defRPr sz="2399" b="0">
+                <a:solidFill>
+                  <a:schemeClr val="bg2">
+                    <a:lumMod val="40000"/>
+                    <a:lumOff val="60000"/>
+                  </a:schemeClr>
+                </a:solidFill>
+              </a:defRPr>
             </a:lvl1pPr>
-            <a:lvl2pPr marL="457200" indent="0">
-              <a:buNone/>
-              <a:defRPr sz="2000" b="1"/>
+            <a:lvl2pPr marL="457063" indent="0">
+              <a:buNone/>
+              <a:defRPr sz="1999" b="1"/>
             </a:lvl2pPr>
-            <a:lvl3pPr marL="914400" indent="0">
-              <a:buNone/>
-              <a:defRPr sz="1800" b="1"/>
+            <a:lvl3pPr marL="914126" indent="0">
+              <a:buNone/>
+              <a:defRPr sz="1799" b="1"/>
             </a:lvl3pPr>
-            <a:lvl4pPr marL="1371600" indent="0">
+            <a:lvl4pPr marL="1371189" indent="0">
               <a:buNone/>
               <a:defRPr sz="1600" b="1"/>
             </a:lvl4pPr>
-            <a:lvl5pPr marL="1828800" indent="0">
+            <a:lvl5pPr marL="1828251" indent="0">
               <a:buNone/>
               <a:defRPr sz="1600" b="1"/>
             </a:lvl5pPr>
-            <a:lvl6pPr marL="2286000" indent="0">
+            <a:lvl6pPr marL="2285314" indent="0">
               <a:buNone/>
               <a:defRPr sz="1600" b="1"/>
             </a:lvl6pPr>
-            <a:lvl7pPr marL="2743200" indent="0">
+            <a:lvl7pPr marL="2742377" indent="0">
               <a:buNone/>
               <a:defRPr sz="1600" b="1"/>
             </a:lvl7pPr>
-            <a:lvl8pPr marL="3200400" indent="0">
+            <a:lvl8pPr marL="3199440" indent="0">
               <a:buNone/>
               <a:defRPr sz="1600" b="1"/>
             </a:lvl8pPr>
-            <a:lvl9pPr marL="3657600" indent="0">
+            <a:lvl9pPr marL="3656503" indent="0">
               <a:buNone/>
               <a:defRPr sz="1600" b="1"/>
             </a:lvl9pPr>
@@ -1515,7 +4100,7 @@
           <a:p>
             <a:pPr lvl="0"/>
             <a:r>
-              <a:rPr lang="en-US" smtClean="0"/>
+              <a:rPr lang="en-US"/>
               <a:t>Click to edit Master text styles</a:t>
             </a:r>
           </a:p>
@@ -1533,76 +4118,78 @@
         </p:nvSpPr>
         <p:spPr>
           <a:xfrm>
-            <a:off x="457200" y="2174875"/>
-            <a:ext cx="4040188" cy="3951288"/>
-          </a:xfrm>
-        </p:spPr>
-        <p:txBody>
-          <a:bodyPr/>
+            <a:off x="1103025" y="2514600"/>
+            <a:ext cx="4395194" cy="3741738"/>
+          </a:xfrm>
+        </p:spPr>
+        <p:txBody>
+          <a:bodyPr>
+            <a:normAutofit/>
+          </a:bodyPr>
           <a:lstStyle>
             <a:lvl1pPr>
-              <a:defRPr sz="2400"/>
+              <a:defRPr sz="1799"/>
             </a:lvl1pPr>
             <a:lvl2pPr>
-              <a:defRPr sz="2000"/>
+              <a:defRPr sz="1600"/>
             </a:lvl2pPr>
             <a:lvl3pPr>
-              <a:defRPr sz="1800"/>
+              <a:defRPr sz="1400"/>
             </a:lvl3pPr>
             <a:lvl4pPr>
-              <a:defRPr sz="1600"/>
+              <a:defRPr sz="1200"/>
             </a:lvl4pPr>
             <a:lvl5pPr>
-              <a:defRPr sz="1600"/>
+              <a:defRPr sz="1200"/>
             </a:lvl5pPr>
             <a:lvl6pPr>
-              <a:defRPr sz="1600"/>
+              <a:defRPr sz="1200"/>
             </a:lvl6pPr>
             <a:lvl7pPr>
-              <a:defRPr sz="1600"/>
+              <a:defRPr sz="1200"/>
             </a:lvl7pPr>
             <a:lvl8pPr>
-              <a:defRPr sz="1600"/>
+              <a:defRPr sz="1200"/>
             </a:lvl8pPr>
             <a:lvl9pPr>
-              <a:defRPr sz="1600"/>
+              <a:defRPr sz="1200"/>
             </a:lvl9pPr>
           </a:lstStyle>
           <a:p>
             <a:pPr lvl="0"/>
             <a:r>
-              <a:rPr lang="en-US" smtClean="0"/>
+              <a:rPr lang="en-US"/>
               <a:t>Click to edit Master text styles</a:t>
             </a:r>
           </a:p>
           <a:p>
             <a:pPr lvl="1"/>
             <a:r>
-              <a:rPr lang="en-US" smtClean="0"/>
+              <a:rPr lang="en-US"/>
               <a:t>Second level</a:t>
             </a:r>
           </a:p>
           <a:p>
             <a:pPr lvl="2"/>
             <a:r>
-              <a:rPr lang="en-US" smtClean="0"/>
+              <a:rPr lang="en-US"/>
               <a:t>Third level</a:t>
             </a:r>
           </a:p>
           <a:p>
             <a:pPr lvl="3"/>
             <a:r>
-              <a:rPr lang="en-US" smtClean="0"/>
+              <a:rPr lang="en-US"/>
               <a:t>Fourth level</a:t>
             </a:r>
           </a:p>
           <a:p>
             <a:pPr lvl="4"/>
             <a:r>
-              <a:rPr lang="en-US" smtClean="0"/>
+              <a:rPr lang="en-US"/>
               <a:t>Fifth level</a:t>
             </a:r>
-            <a:endParaRPr lang="en-US"/>
+            <a:endParaRPr lang="en-US" dirty="0"/>
           </a:p>
         </p:txBody>
       </p:sp>
@@ -1618,46 +4205,55 @@
         </p:nvSpPr>
         <p:spPr>
           <a:xfrm>
-            <a:off x="4645025" y="1535113"/>
-            <a:ext cx="4041775" cy="639762"/>
-          </a:xfrm>
-        </p:spPr>
-        <p:txBody>
-          <a:bodyPr anchor="b"/>
+            <a:off x="5653023" y="1905000"/>
+            <a:ext cx="4395194" cy="576262"/>
+          </a:xfrm>
+        </p:spPr>
+        <p:txBody>
+          <a:bodyPr anchor="b">
+            <a:noAutofit/>
+          </a:bodyPr>
           <a:lstStyle>
             <a:lvl1pPr marL="0" indent="0">
               <a:buNone/>
-              <a:defRPr sz="2400" b="1"/>
+              <a:defRPr sz="2399" b="0">
+                <a:solidFill>
+                  <a:schemeClr val="bg2">
+                    <a:lumMod val="40000"/>
+                    <a:lumOff val="60000"/>
+                  </a:schemeClr>
+                </a:solidFill>
+              </a:defRPr>
             </a:lvl1pPr>
-            <a:lvl2pPr marL="457200" indent="0">
-              <a:buNone/>
-              <a:defRPr sz="2000" b="1"/>
+            <a:lvl2pPr marL="457063" indent="0">
+              <a:buNone/>
+              <a:defRPr sz="1999" b="1"/>
             </a:lvl2pPr>
-            <a:lvl3pPr marL="914400" indent="0">
-              <a:buNone/>
-              <a:defRPr sz="1800" b="1"/>
+            <a:lvl3pPr marL="914126" indent="0">
+              <a:buNone/>
+              <a:defRPr sz="1799" b="1"/>
             </a:lvl3pPr>
-            <a:lvl4pPr marL="1371600" indent="0">
+            <a:lvl4pPr marL="1371189" indent="0">
               <a:buNone/>
               <a:defRPr sz="1600" b="1"/>
             </a:lvl4pPr>
-            <a:lvl5pPr marL="1828800" indent="0">
+            <a:lvl5pPr marL="1828251" indent="0">
               <a:buNone/>
               <a:defRPr sz="1600" b="1"/>
             </a:lvl5pPr>
-            <a:lvl6pPr marL="2286000" indent="0">
+            <a:lvl6pPr marL="2285314" indent="0">
               <a:buNone/>
               <a:defRPr sz="1600" b="1"/>
             </a:lvl6pPr>
-            <a:lvl7pPr marL="2743200" indent="0">
+            <a:lvl7pPr marL="2742377" indent="0">
               <a:buNone/>
               <a:defRPr sz="1600" b="1"/>
             </a:lvl7pPr>
-            <a:lvl8pPr marL="3200400" indent="0">
+            <a:lvl8pPr marL="3199440" indent="0">
               <a:buNone/>
               <a:defRPr sz="1600" b="1"/>
             </a:lvl8pPr>
-            <a:lvl9pPr marL="3657600" indent="0">
+            <a:lvl9pPr marL="3656503" indent="0">
               <a:buNone/>
               <a:defRPr sz="1600" b="1"/>
             </a:lvl9pPr>
@@ -1665,7 +4261,7 @@
           <a:p>
             <a:pPr lvl="0"/>
             <a:r>
-              <a:rPr lang="en-US" smtClean="0"/>
+              <a:rPr lang="en-US"/>
               <a:t>Click to edit Master text styles</a:t>
             </a:r>
           </a:p>
@@ -1683,76 +4279,78 @@
         </p:nvSpPr>
         <p:spPr>
           <a:xfrm>
-            <a:off x="4645025" y="2174875"/>
-            <a:ext cx="4041775" cy="3951288"/>
-          </a:xfrm>
-        </p:spPr>
-        <p:txBody>
-          <a:bodyPr/>
+            <a:off x="5653023" y="2514600"/>
+            <a:ext cx="4395194" cy="3741738"/>
+          </a:xfrm>
+        </p:spPr>
+        <p:txBody>
+          <a:bodyPr>
+            <a:normAutofit/>
+          </a:bodyPr>
           <a:lstStyle>
             <a:lvl1pPr>
-              <a:defRPr sz="2400"/>
+              <a:defRPr sz="1799"/>
             </a:lvl1pPr>
             <a:lvl2pPr>
-              <a:defRPr sz="2000"/>
+              <a:defRPr sz="1600"/>
             </a:lvl2pPr>
             <a:lvl3pPr>
-              <a:defRPr sz="1800"/>
+              <a:defRPr sz="1400"/>
             </a:lvl3pPr>
             <a:lvl4pPr>
-              <a:defRPr sz="1600"/>
+              <a:defRPr sz="1200"/>
             </a:lvl4pPr>
             <a:lvl5pPr>
-              <a:defRPr sz="1600"/>
+              <a:defRPr sz="1200"/>
             </a:lvl5pPr>
             <a:lvl6pPr>
-              <a:defRPr sz="1600"/>
+              <a:defRPr sz="1200"/>
             </a:lvl6pPr>
             <a:lvl7pPr>
-              <a:defRPr sz="1600"/>
+              <a:defRPr sz="1200"/>
             </a:lvl7pPr>
             <a:lvl8pPr>
-              <a:defRPr sz="1600"/>
+              <a:defRPr sz="1200"/>
             </a:lvl8pPr>
             <a:lvl9pPr>
-              <a:defRPr sz="1600"/>
+              <a:defRPr sz="1200"/>
             </a:lvl9pPr>
           </a:lstStyle>
           <a:p>
             <a:pPr lvl="0"/>
             <a:r>
-              <a:rPr lang="en-US" smtClean="0"/>
+              <a:rPr lang="en-US"/>
               <a:t>Click to edit Master text styles</a:t>
             </a:r>
           </a:p>
           <a:p>
             <a:pPr lvl="1"/>
             <a:r>
-              <a:rPr lang="en-US" smtClean="0"/>
+              <a:rPr lang="en-US"/>
               <a:t>Second level</a:t>
             </a:r>
           </a:p>
           <a:p>
             <a:pPr lvl="2"/>
             <a:r>
-              <a:rPr lang="en-US" smtClean="0"/>
+              <a:rPr lang="en-US"/>
               <a:t>Third level</a:t>
             </a:r>
           </a:p>
           <a:p>
             <a:pPr lvl="3"/>
             <a:r>
-              <a:rPr lang="en-US" smtClean="0"/>
+              <a:rPr lang="en-US"/>
               <a:t>Fourth level</a:t>
             </a:r>
           </a:p>
           <a:p>
             <a:pPr lvl="4"/>
             <a:r>
-              <a:rPr lang="en-US" smtClean="0"/>
+              <a:rPr lang="en-US"/>
               <a:t>Fifth level</a:t>
             </a:r>
-            <a:endParaRPr lang="en-US"/>
+            <a:endParaRPr lang="en-US" dirty="0"/>
           </a:p>
         </p:txBody>
       </p:sp>
@@ -1773,7 +4371,7 @@
           <a:p>
             <a:fld id="{5BCAD085-E8A6-8845-BD4E-CB4CCA059FC4}" type="datetimeFigureOut">
               <a:rPr lang="en-US" smtClean="0"/>
-              <a:t>1/27/13</a:t>
+              <a:t>10/26/26</a:t>
             </a:fld>
             <a:endParaRPr lang="en-US"/>
           </a:p>
@@ -1824,7 +4422,7 @@
     </p:spTree>
     <p:extLst>
       <p:ext uri="{BB962C8B-B14F-4D97-AF65-F5344CB8AC3E}">
-        <p14:creationId xmlns:p14="http://schemas.microsoft.com/office/powerpoint/2010/main" val="990158736"/>
+        <p14:creationId xmlns:p14="http://schemas.microsoft.com/office/powerpoint/2010/main" val="1233862559"/>
       </p:ext>
     </p:extLst>
   </p:cSld>
@@ -1867,16 +4465,16 @@
           <a:lstStyle/>
           <a:p>
             <a:r>
-              <a:rPr lang="en-US" smtClean="0"/>
+              <a:rPr lang="en-US"/>
               <a:t>Click to edit Master title style</a:t>
             </a:r>
-            <a:endParaRPr lang="en-US"/>
-          </a:p>
-        </p:txBody>
-      </p:sp>
-      <p:sp>
-        <p:nvSpPr>
-          <p:cNvPr id="3" name="Date Placeholder 2"/>
+            <a:endParaRPr lang="en-US" dirty="0"/>
+          </a:p>
+        </p:txBody>
+      </p:sp>
+      <p:sp>
+        <p:nvSpPr>
+          <p:cNvPr id="7" name="Date Placeholder 2"/>
           <p:cNvSpPr>
             <a:spLocks noGrp="1"/>
           </p:cNvSpPr>
@@ -1891,7 +4489,7 @@
           <a:p>
             <a:fld id="{5BCAD085-E8A6-8845-BD4E-CB4CCA059FC4}" type="datetimeFigureOut">
               <a:rPr lang="en-US" smtClean="0"/>
-              <a:t>1/27/13</a:t>
+              <a:t>10/26/26</a:t>
             </a:fld>
             <a:endParaRPr lang="en-US"/>
           </a:p>
@@ -1899,7 +4497,7 @@
       </p:sp>
       <p:sp>
         <p:nvSpPr>
-          <p:cNvPr id="4" name="Footer Placeholder 3"/>
+          <p:cNvPr id="5" name="Footer Placeholder 3"/>
           <p:cNvSpPr>
             <a:spLocks noGrp="1"/>
           </p:cNvSpPr>
@@ -1918,7 +4516,7 @@
       </p:sp>
       <p:sp>
         <p:nvSpPr>
-          <p:cNvPr id="5" name="Slide Number Placeholder 4"/>
+          <p:cNvPr id="6" name="Slide Number Placeholder 4"/>
           <p:cNvSpPr>
             <a:spLocks noGrp="1"/>
           </p:cNvSpPr>
@@ -1942,7 +4540,7 @@
     </p:spTree>
     <p:extLst>
       <p:ext uri="{BB962C8B-B14F-4D97-AF65-F5344CB8AC3E}">
-        <p14:creationId xmlns:p14="http://schemas.microsoft.com/office/powerpoint/2010/main" val="727027711"/>
+        <p14:creationId xmlns:p14="http://schemas.microsoft.com/office/powerpoint/2010/main" val="991532978"/>
       </p:ext>
     </p:extLst>
   </p:cSld>
@@ -1971,7 +4569,7 @@
       </p:grpSpPr>
       <p:sp>
         <p:nvSpPr>
-          <p:cNvPr id="2" name="Date Placeholder 1"/>
+          <p:cNvPr id="7" name="Date Placeholder 1"/>
           <p:cNvSpPr>
             <a:spLocks noGrp="1"/>
           </p:cNvSpPr>
@@ -1986,7 +4584,7 @@
           <a:p>
             <a:fld id="{5BCAD085-E8A6-8845-BD4E-CB4CCA059FC4}" type="datetimeFigureOut">
               <a:rPr lang="en-US" smtClean="0"/>
-              <a:t>1/27/13</a:t>
+              <a:t>10/26/26</a:t>
             </a:fld>
             <a:endParaRPr lang="en-US"/>
           </a:p>
@@ -1994,7 +4592,7 @@
       </p:sp>
       <p:sp>
         <p:nvSpPr>
-          <p:cNvPr id="3" name="Footer Placeholder 2"/>
+          <p:cNvPr id="5" name="Footer Placeholder 2"/>
           <p:cNvSpPr>
             <a:spLocks noGrp="1"/>
           </p:cNvSpPr>
@@ -2013,7 +4611,7 @@
       </p:sp>
       <p:sp>
         <p:nvSpPr>
-          <p:cNvPr id="4" name="Slide Number Placeholder 3"/>
+          <p:cNvPr id="6" name="Slide Number Placeholder 3"/>
           <p:cNvSpPr>
             <a:spLocks noGrp="1"/>
           </p:cNvSpPr>
@@ -2037,7 +4635,7 @@
     </p:spTree>
     <p:extLst>
       <p:ext uri="{BB962C8B-B14F-4D97-AF65-F5344CB8AC3E}">
-        <p14:creationId xmlns:p14="http://schemas.microsoft.com/office/powerpoint/2010/main" val="1212999818"/>
+        <p14:creationId xmlns:p14="http://schemas.microsoft.com/office/powerpoint/2010/main" val="3623560241"/>
       </p:ext>
     </p:extLst>
   </p:cSld>
@@ -2076,23 +4674,23 @@
         </p:nvSpPr>
         <p:spPr>
           <a:xfrm>
-            <a:off x="457200" y="273050"/>
-            <a:ext cx="3008313" cy="1162050"/>
+            <a:off x="1154652" y="1447800"/>
+            <a:ext cx="3400178" cy="1447800"/>
           </a:xfrm>
         </p:spPr>
         <p:txBody>
           <a:bodyPr anchor="b"/>
           <a:lstStyle>
             <a:lvl1pPr algn="l">
-              <a:defRPr sz="2000" b="1"/>
+              <a:defRPr sz="2399" b="0"/>
             </a:lvl1pPr>
           </a:lstStyle>
           <a:p>
             <a:r>
-              <a:rPr lang="en-US" smtClean="0"/>
+              <a:rPr lang="en-US"/>
               <a:t>Click to edit Master title style</a:t>
             </a:r>
-            <a:endParaRPr lang="en-US"/>
+            <a:endParaRPr lang="en-US" dirty="0"/>
           </a:p>
         </p:txBody>
       </p:sp>
@@ -2108,76 +4706,78 @@
         </p:nvSpPr>
         <p:spPr>
           <a:xfrm>
-            <a:off x="3575050" y="273050"/>
-            <a:ext cx="5111750" cy="5853113"/>
-          </a:xfrm>
-        </p:spPr>
-        <p:txBody>
-          <a:bodyPr/>
+            <a:off x="4783370" y="1447800"/>
+            <a:ext cx="5194644" cy="4572000"/>
+          </a:xfrm>
+        </p:spPr>
+        <p:txBody>
+          <a:bodyPr anchor="ctr">
+            <a:normAutofit/>
+          </a:bodyPr>
           <a:lstStyle>
             <a:lvl1pPr>
-              <a:defRPr sz="3200"/>
+              <a:defRPr sz="1999"/>
             </a:lvl1pPr>
             <a:lvl2pPr>
-              <a:defRPr sz="2800"/>
+              <a:defRPr sz="1799"/>
             </a:lvl2pPr>
             <a:lvl3pPr>
-              <a:defRPr sz="2400"/>
+              <a:defRPr sz="1600"/>
             </a:lvl3pPr>
             <a:lvl4pPr>
-              <a:defRPr sz="2000"/>
+              <a:defRPr sz="1400"/>
             </a:lvl4pPr>
             <a:lvl5pPr>
-              <a:defRPr sz="2000"/>
+              <a:defRPr sz="1400"/>
             </a:lvl5pPr>
             <a:lvl6pPr>
-              <a:defRPr sz="2000"/>
+              <a:defRPr sz="1400"/>
             </a:lvl6pPr>
             <a:lvl7pPr>
-              <a:defRPr sz="2000"/>
+              <a:defRPr sz="1400"/>
             </a:lvl7pPr>
             <a:lvl8pPr>
-              <a:defRPr sz="2000"/>
+              <a:defRPr sz="1400"/>
             </a:lvl8pPr>
             <a:lvl9pPr>
-              <a:defRPr sz="2000"/>
+              <a:defRPr sz="1400"/>
             </a:lvl9pPr>
           </a:lstStyle>
           <a:p>
             <a:pPr lvl="0"/>
             <a:r>
-              <a:rPr lang="en-US" smtClean="0"/>
+              <a:rPr lang="en-US"/>
               <a:t>Click to edit Master text styles</a:t>
             </a:r>
           </a:p>
           <a:p>
             <a:pPr lvl="1"/>
             <a:r>
-              <a:rPr lang="en-US" smtClean="0"/>
+              <a:rPr lang="en-US"/>
               <a:t>Second level</a:t>
             </a:r>
           </a:p>
           <a:p>
             <a:pPr lvl="2"/>
             <a:r>
-              <a:rPr lang="en-US" smtClean="0"/>
+              <a:rPr lang="en-US"/>
               <a:t>Third level</a:t>
             </a:r>
           </a:p>
           <a:p>
             <a:pPr lvl="3"/>
             <a:r>
-              <a:rPr lang="en-US" smtClean="0"/>
+              <a:rPr lang="en-US"/>
               <a:t>Fourth level</a:t>
             </a:r>
           </a:p>
           <a:p>
             <a:pPr lvl="4"/>
             <a:r>
-              <a:rPr lang="en-US" smtClean="0"/>
+              <a:rPr lang="en-US"/>
               <a:t>Fifth level</a:t>
             </a:r>
-            <a:endParaRPr lang="en-US"/>
+            <a:endParaRPr lang="en-US" dirty="0"/>
           </a:p>
         </p:txBody>
       </p:sp>
@@ -2193,8 +4793,8 @@
         </p:nvSpPr>
         <p:spPr>
           <a:xfrm>
-            <a:off x="457200" y="1435100"/>
-            <a:ext cx="3008313" cy="4691063"/>
+            <a:off x="1154653" y="3129281"/>
+            <a:ext cx="3400177" cy="2895599"/>
           </a:xfrm>
         </p:spPr>
         <p:txBody>
@@ -2204,35 +4804,35 @@
               <a:buNone/>
               <a:defRPr sz="1400"/>
             </a:lvl1pPr>
-            <a:lvl2pPr marL="457200" indent="0">
+            <a:lvl2pPr marL="457063" indent="0">
               <a:buNone/>
               <a:defRPr sz="1200"/>
             </a:lvl2pPr>
-            <a:lvl3pPr marL="914400" indent="0">
+            <a:lvl3pPr marL="914126" indent="0">
               <a:buNone/>
               <a:defRPr sz="1000"/>
             </a:lvl3pPr>
-            <a:lvl4pPr marL="1371600" indent="0">
+            <a:lvl4pPr marL="1371189" indent="0">
               <a:buNone/>
               <a:defRPr sz="900"/>
             </a:lvl4pPr>
-            <a:lvl5pPr marL="1828800" indent="0">
+            <a:lvl5pPr marL="1828251" indent="0">
               <a:buNone/>
               <a:defRPr sz="900"/>
             </a:lvl5pPr>
-            <a:lvl6pPr marL="2286000" indent="0">
+            <a:lvl6pPr marL="2285314" indent="0">
               <a:buNone/>
               <a:defRPr sz="900"/>
             </a:lvl6pPr>
-            <a:lvl7pPr marL="2743200" indent="0">
+            <a:lvl7pPr marL="2742377" indent="0">
               <a:buNone/>
               <a:defRPr sz="900"/>
             </a:lvl7pPr>
-            <a:lvl8pPr marL="3200400" indent="0">
+            <a:lvl8pPr marL="3199440" indent="0">
               <a:buNone/>
               <a:defRPr sz="900"/>
             </a:lvl8pPr>
-            <a:lvl9pPr marL="3657600" indent="0">
+            <a:lvl9pPr marL="3656503" indent="0">
               <a:buNone/>
               <a:defRPr sz="900"/>
             </a:lvl9pPr>
@@ -2240,7 +4840,7 @@
           <a:p>
             <a:pPr lvl="0"/>
             <a:r>
-              <a:rPr lang="en-US" smtClean="0"/>
+              <a:rPr lang="en-US"/>
               <a:t>Click to edit Master text styles</a:t>
             </a:r>
           </a:p>
@@ -2248,7 +4848,7 @@
       </p:sp>
       <p:sp>
         <p:nvSpPr>
-          <p:cNvPr id="5" name="Date Placeholder 4"/>
+          <p:cNvPr id="7" name="Date Placeholder 4"/>
           <p:cNvSpPr>
             <a:spLocks noGrp="1"/>
           </p:cNvSpPr>
@@ -2263,7 +4863,7 @@
           <a:p>
             <a:fld id="{5BCAD085-E8A6-8845-BD4E-CB4CCA059FC4}" type="datetimeFigureOut">
               <a:rPr lang="en-US" smtClean="0"/>
-              <a:t>1/27/13</a:t>
+              <a:t>10/26/26</a:t>
             </a:fld>
             <a:endParaRPr lang="en-US"/>
           </a:p>
@@ -2271,7 +4871,7 @@
       </p:sp>
       <p:sp>
         <p:nvSpPr>
-          <p:cNvPr id="6" name="Footer Placeholder 5"/>
+          <p:cNvPr id="5" name="Footer Placeholder 5"/>
           <p:cNvSpPr>
             <a:spLocks noGrp="1"/>
           </p:cNvSpPr>
@@ -2290,7 +4890,7 @@
       </p:sp>
       <p:sp>
         <p:nvSpPr>
-          <p:cNvPr id="7" name="Slide Number Placeholder 6"/>
+          <p:cNvPr id="6" name="Slide Number Placeholder 6"/>
           <p:cNvSpPr>
             <a:spLocks noGrp="1"/>
           </p:cNvSpPr>
@@ -2314,7 +4914,7 @@
     </p:spTree>
     <p:extLst>
       <p:ext uri="{BB962C8B-B14F-4D97-AF65-F5344CB8AC3E}">
-        <p14:creationId xmlns:p14="http://schemas.microsoft.com/office/powerpoint/2010/main" val="1840726560"/>
+        <p14:creationId xmlns:p14="http://schemas.microsoft.com/office/powerpoint/2010/main" val="3923725364"/>
       </p:ext>
     </p:extLst>
   </p:cSld>
@@ -2353,23 +4953,25 @@
         </p:nvSpPr>
         <p:spPr>
           <a:xfrm>
-            <a:off x="1792288" y="4800600"/>
-            <a:ext cx="5486400" cy="566738"/>
-          </a:xfrm>
-        </p:spPr>
-        <p:txBody>
-          <a:bodyPr anchor="b"/>
+            <a:off x="1153606" y="1854192"/>
+            <a:ext cx="5091580" cy="1574808"/>
+          </a:xfrm>
+        </p:spPr>
+        <p:txBody>
+          <a:bodyPr anchor="b">
+            <a:normAutofit/>
+          </a:bodyPr>
           <a:lstStyle>
             <a:lvl1pPr algn="l">
-              <a:defRPr sz="2000" b="1"/>
+              <a:defRPr sz="3599" b="0"/>
             </a:lvl1pPr>
           </a:lstStyle>
           <a:p>
             <a:r>
-              <a:rPr lang="en-US" smtClean="0"/>
+              <a:rPr lang="en-US"/>
               <a:t>Click to edit Master title style</a:t>
             </a:r>
-            <a:endParaRPr lang="en-US"/>
+            <a:endParaRPr lang="en-US" dirty="0"/>
           </a:p>
         </p:txBody>
       </p:sp>
@@ -2377,7 +4979,7 @@
         <p:nvSpPr>
           <p:cNvPr id="3" name="Picture Placeholder 2"/>
           <p:cNvSpPr>
-            <a:spLocks noGrp="1"/>
+            <a:spLocks noGrp="1" noChangeAspect="1"/>
           </p:cNvSpPr>
           <p:nvPr>
             <p:ph type="pic" idx="1"/>
@@ -2385,52 +4987,66 @@
         </p:nvSpPr>
         <p:spPr>
           <a:xfrm>
-            <a:off x="1792288" y="612775"/>
-            <a:ext cx="5486400" cy="4114800"/>
-          </a:xfrm>
-        </p:spPr>
-        <p:txBody>
-          <a:bodyPr/>
+            <a:off x="6947736" y="1143000"/>
+            <a:ext cx="3199567" cy="4572000"/>
+          </a:xfrm>
+          <a:prstGeom prst="roundRect">
+            <a:avLst>
+              <a:gd name="adj" fmla="val 1858"/>
+            </a:avLst>
+          </a:prstGeom>
+          <a:effectLst>
+            <a:outerShdw blurRad="50800" dist="50800" dir="5400000" algn="tl" rotWithShape="0">
+              <a:srgbClr val="000000">
+                <a:alpha val="43000"/>
+              </a:srgbClr>
+            </a:outerShdw>
+          </a:effectLst>
+        </p:spPr>
+        <p:txBody>
+          <a:bodyPr anchor="t">
+            <a:normAutofit/>
+          </a:bodyPr>
           <a:lstStyle>
-            <a:lvl1pPr marL="0" indent="0">
-              <a:buNone/>
-              <a:defRPr sz="3200"/>
+            <a:lvl1pPr marL="0" indent="0" algn="ctr">
+              <a:buNone/>
+              <a:defRPr sz="1600"/>
             </a:lvl1pPr>
-            <a:lvl2pPr marL="457200" indent="0">
-              <a:buNone/>
-              <a:defRPr sz="2800"/>
+            <a:lvl2pPr marL="457063" indent="0">
+              <a:buNone/>
+              <a:defRPr sz="1600"/>
             </a:lvl2pPr>
-            <a:lvl3pPr marL="914400" indent="0">
-              <a:buNone/>
-              <a:defRPr sz="2400"/>
+            <a:lvl3pPr marL="914126" indent="0">
+              <a:buNone/>
+              <a:defRPr sz="1600"/>
             </a:lvl3pPr>
-            <a:lvl4pPr marL="1371600" indent="0">
-              <a:buNone/>
-              <a:defRPr sz="2000"/>
+            <a:lvl4pPr marL="1371189" indent="0">
+              <a:buNone/>
+              <a:defRPr sz="1600"/>
             </a:lvl4pPr>
-            <a:lvl5pPr marL="1828800" indent="0">
-              <a:buNone/>
-              <a:defRPr sz="2000"/>
+            <a:lvl5pPr marL="1828251" indent="0">
+              <a:buNone/>
+              <a:defRPr sz="1600"/>
             </a:lvl5pPr>
-            <a:lvl6pPr marL="2286000" indent="0">
-              <a:buNone/>
-              <a:defRPr sz="2000"/>
+            <a:lvl6pPr marL="2285314" indent="0">
+              <a:buNone/>
+              <a:defRPr sz="1600"/>
             </a:lvl6pPr>
-            <a:lvl7pPr marL="2743200" indent="0">
-              <a:buNone/>
-              <a:defRPr sz="2000"/>
+            <a:lvl7pPr marL="2742377" indent="0">
+              <a:buNone/>
+              <a:defRPr sz="1600"/>
             </a:lvl7pPr>
-            <a:lvl8pPr marL="3200400" indent="0">
-              <a:buNone/>
-              <a:defRPr sz="2000"/>
+            <a:lvl8pPr marL="3199440" indent="0">
+              <a:buNone/>
+              <a:defRPr sz="1600"/>
             </a:lvl8pPr>
-            <a:lvl9pPr marL="3657600" indent="0">
-              <a:buNone/>
-              <a:defRPr sz="2000"/>
+            <a:lvl9pPr marL="3656503" indent="0">
+              <a:buNone/>
+              <a:defRPr sz="1600"/>
             </a:lvl9pPr>
           </a:lstStyle>
           <a:p>
-            <a:endParaRPr lang="en-US"/>
+            <a:endParaRPr lang="en-US" dirty="0"/>
           </a:p>
         </p:txBody>
       </p:sp>
@@ -2446,46 +5062,48 @@
         </p:nvSpPr>
         <p:spPr>
           <a:xfrm>
-            <a:off x="1792288" y="5367338"/>
-            <a:ext cx="5486400" cy="804862"/>
-          </a:xfrm>
-        </p:spPr>
-        <p:txBody>
-          <a:bodyPr/>
+            <a:off x="1154654" y="3657600"/>
+            <a:ext cx="5083655" cy="1371600"/>
+          </a:xfrm>
+        </p:spPr>
+        <p:txBody>
+          <a:bodyPr>
+            <a:normAutofit/>
+          </a:bodyPr>
           <a:lstStyle>
             <a:lvl1pPr marL="0" indent="0">
               <a:buNone/>
               <a:defRPr sz="1400"/>
             </a:lvl1pPr>
-            <a:lvl2pPr marL="457200" indent="0">
+            <a:lvl2pPr marL="457063" indent="0">
               <a:buNone/>
               <a:defRPr sz="1200"/>
             </a:lvl2pPr>
-            <a:lvl3pPr marL="914400" indent="0">
+            <a:lvl3pPr marL="914126" indent="0">
               <a:buNone/>
               <a:defRPr sz="1000"/>
             </a:lvl3pPr>
-            <a:lvl4pPr marL="1371600" indent="0">
+            <a:lvl4pPr marL="1371189" indent="0">
               <a:buNone/>
               <a:defRPr sz="900"/>
             </a:lvl4pPr>
-            <a:lvl5pPr marL="1828800" indent="0">
+            <a:lvl5pPr marL="1828251" indent="0">
               <a:buNone/>
               <a:defRPr sz="900"/>
             </a:lvl5pPr>
-            <a:lvl6pPr marL="2286000" indent="0">
+            <a:lvl6pPr marL="2285314" indent="0">
               <a:buNone/>
               <a:defRPr sz="900"/>
             </a:lvl6pPr>
-            <a:lvl7pPr marL="2743200" indent="0">
+            <a:lvl7pPr marL="2742377" indent="0">
               <a:buNone/>
               <a:defRPr sz="900"/>
             </a:lvl7pPr>
-            <a:lvl8pPr marL="3200400" indent="0">
+            <a:lvl8pPr marL="3199440" indent="0">
               <a:buNone/>
               <a:defRPr sz="900"/>
             </a:lvl8pPr>
-            <a:lvl9pPr marL="3657600" indent="0">
+            <a:lvl9pPr marL="3656503" indent="0">
               <a:buNone/>
               <a:defRPr sz="900"/>
             </a:lvl9pPr>
@@ -2493,7 +5111,7 @@
           <a:p>
             <a:pPr lvl="0"/>
             <a:r>
-              <a:rPr lang="en-US" smtClean="0"/>
+              <a:rPr lang="en-US"/>
               <a:t>Click to edit Master text styles</a:t>
             </a:r>
           </a:p>
@@ -2516,7 +5134,7 @@
           <a:p>
             <a:fld id="{5BCAD085-E8A6-8845-BD4E-CB4CCA059FC4}" type="datetimeFigureOut">
               <a:rPr lang="en-US" smtClean="0"/>
-              <a:t>1/27/13</a:t>
+              <a:t>10/26/26</a:t>
             </a:fld>
             <a:endParaRPr lang="en-US"/>
           </a:p>
@@ -2567,7 +5185,7 @@
     </p:spTree>
     <p:extLst>
       <p:ext uri="{BB962C8B-B14F-4D97-AF65-F5344CB8AC3E}">
-        <p14:creationId xmlns:p14="http://schemas.microsoft.com/office/powerpoint/2010/main" val="3889236939"/>
+        <p14:creationId xmlns:p14="http://schemas.microsoft.com/office/powerpoint/2010/main" val="3588928178"/>
       </p:ext>
     </p:extLst>
   </p:cSld>
@@ -2581,8 +5199,8 @@
 <p:sldMaster xmlns:a="http://schemas.openxmlformats.org/drawingml/2006/main" xmlns:r="http://schemas.openxmlformats.org/officeDocument/2006/relationships" xmlns:p="http://schemas.openxmlformats.org/presentationml/2006/main">
   <p:cSld>
     <p:bg>
-      <p:bgRef idx="1001">
-        <a:schemeClr val="bg1"/>
+      <p:bgRef idx="1003">
+        <a:schemeClr val="bg2"/>
       </p:bgRef>
     </p:bg>
     <p:spTree>
@@ -2599,6 +5217,221 @@
           <a:chExt cx="0" cy="0"/>
         </a:xfrm>
       </p:grpSpPr>
+      <p:pic>
+        <p:nvPicPr>
+          <p:cNvPr id="8" name="Picture 7"/>
+          <p:cNvPicPr>
+            <a:picLocks noChangeAspect="1"/>
+          </p:cNvPicPr>
+          <p:nvPr/>
+        </p:nvPicPr>
+        <p:blipFill rotWithShape="1">
+          <a:blip r:embed="rId19">
+            <a:extLst>
+              <a:ext uri="{28A0092B-C50C-407E-A947-70E740481C1C}">
+                <a14:useLocalDpi xmlns:a14="http://schemas.microsoft.com/office/drawing/2010/main" val="0"/>
+              </a:ext>
+            </a:extLst>
+          </a:blip>
+          <a:srcRect l="3613"/>
+          <a:stretch/>
+        </p:blipFill>
+        <p:spPr>
+          <a:xfrm>
+            <a:off x="0" y="2669686"/>
+            <a:ext cx="4035961" cy="4188315"/>
+          </a:xfrm>
+          <a:prstGeom prst="rect">
+            <a:avLst/>
+          </a:prstGeom>
+        </p:spPr>
+      </p:pic>
+      <p:pic>
+        <p:nvPicPr>
+          <p:cNvPr id="7" name="Picture 6"/>
+          <p:cNvPicPr>
+            <a:picLocks noChangeAspect="1"/>
+          </p:cNvPicPr>
+          <p:nvPr/>
+        </p:nvPicPr>
+        <p:blipFill rotWithShape="1">
+          <a:blip r:embed="rId20">
+            <a:extLst>
+              <a:ext uri="{28A0092B-C50C-407E-A947-70E740481C1C}">
+                <a14:useLocalDpi xmlns:a14="http://schemas.microsoft.com/office/drawing/2010/main" val="0"/>
+              </a:ext>
+            </a:extLst>
+          </a:blip>
+          <a:srcRect l="35640"/>
+          <a:stretch/>
+        </p:blipFill>
+        <p:spPr>
+          <a:xfrm>
+            <a:off x="0" y="2892348"/>
+            <a:ext cx="1522016" cy="2365453"/>
+          </a:xfrm>
+          <a:prstGeom prst="rect">
+            <a:avLst/>
+          </a:prstGeom>
+        </p:spPr>
+      </p:pic>
+      <p:sp>
+        <p:nvSpPr>
+          <p:cNvPr id="16" name="Oval 15"/>
+          <p:cNvSpPr/>
+          <p:nvPr/>
+        </p:nvSpPr>
+        <p:spPr>
+          <a:xfrm>
+            <a:off x="8606770" y="1676400"/>
+            <a:ext cx="2818666" cy="2819400"/>
+          </a:xfrm>
+          <a:prstGeom prst="ellipse">
+            <a:avLst/>
+          </a:prstGeom>
+          <a:gradFill flip="none" rotWithShape="1">
+            <a:gsLst>
+              <a:gs pos="0">
+                <a:schemeClr val="bg2">
+                  <a:lumMod val="60000"/>
+                  <a:lumOff val="40000"/>
+                  <a:alpha val="7000"/>
+                </a:schemeClr>
+              </a:gs>
+              <a:gs pos="69000">
+                <a:schemeClr val="bg2">
+                  <a:lumMod val="60000"/>
+                  <a:lumOff val="40000"/>
+                  <a:alpha val="0"/>
+                </a:schemeClr>
+              </a:gs>
+              <a:gs pos="36000">
+                <a:schemeClr val="bg2">
+                  <a:lumMod val="60000"/>
+                  <a:lumOff val="40000"/>
+                  <a:alpha val="6000"/>
+                </a:schemeClr>
+              </a:gs>
+            </a:gsLst>
+            <a:path path="circle">
+              <a:fillToRect l="50000" t="50000" r="50000" b="50000"/>
+            </a:path>
+            <a:tileRect/>
+          </a:gradFill>
+          <a:ln>
+            <a:noFill/>
+          </a:ln>
+          <a:effectLst/>
+        </p:spPr>
+        <p:style>
+          <a:lnRef idx="1">
+            <a:schemeClr val="accent1"/>
+          </a:lnRef>
+          <a:fillRef idx="3">
+            <a:schemeClr val="accent1"/>
+          </a:fillRef>
+          <a:effectRef idx="2">
+            <a:schemeClr val="accent1"/>
+          </a:effectRef>
+          <a:fontRef idx="minor">
+            <a:schemeClr val="lt1"/>
+          </a:fontRef>
+        </p:style>
+      </p:sp>
+      <p:pic>
+        <p:nvPicPr>
+          <p:cNvPr id="9" name="Picture 8"/>
+          <p:cNvPicPr>
+            <a:picLocks noChangeAspect="1"/>
+          </p:cNvPicPr>
+          <p:nvPr/>
+        </p:nvPicPr>
+        <p:blipFill rotWithShape="1">
+          <a:blip r:embed="rId21">
+            <a:extLst>
+              <a:ext uri="{28A0092B-C50C-407E-A947-70E740481C1C}">
+                <a14:useLocalDpi xmlns:a14="http://schemas.microsoft.com/office/drawing/2010/main" val="0"/>
+              </a:ext>
+            </a:extLst>
+          </a:blip>
+          <a:srcRect t="28813"/>
+          <a:stretch/>
+        </p:blipFill>
+        <p:spPr>
+          <a:xfrm>
+            <a:off x="7997330" y="0"/>
+            <a:ext cx="1602969" cy="1141407"/>
+          </a:xfrm>
+          <a:prstGeom prst="rect">
+            <a:avLst/>
+          </a:prstGeom>
+        </p:spPr>
+      </p:pic>
+      <p:pic>
+        <p:nvPicPr>
+          <p:cNvPr id="10" name="Picture 9"/>
+          <p:cNvPicPr>
+            <a:picLocks noChangeAspect="1"/>
+          </p:cNvPicPr>
+          <p:nvPr/>
+        </p:nvPicPr>
+        <p:blipFill rotWithShape="1">
+          <a:blip r:embed="rId22">
+            <a:extLst>
+              <a:ext uri="{28A0092B-C50C-407E-A947-70E740481C1C}">
+                <a14:useLocalDpi xmlns:a14="http://schemas.microsoft.com/office/drawing/2010/main" val="0"/>
+              </a:ext>
+            </a:extLst>
+          </a:blip>
+          <a:srcRect b="23320"/>
+          <a:stretch/>
+        </p:blipFill>
+        <p:spPr>
+          <a:xfrm>
+            <a:off x="8603637" y="6096000"/>
+            <a:ext cx="993475" cy="762000"/>
+          </a:xfrm>
+          <a:prstGeom prst="rect">
+            <a:avLst/>
+          </a:prstGeom>
+        </p:spPr>
+      </p:pic>
+      <p:sp>
+        <p:nvSpPr>
+          <p:cNvPr id="14" name="Rectangle 13"/>
+          <p:cNvSpPr/>
+          <p:nvPr/>
+        </p:nvSpPr>
+        <p:spPr>
+          <a:xfrm>
+            <a:off x="10435094" y="0"/>
+            <a:ext cx="685621" cy="1143000"/>
+          </a:xfrm>
+          <a:prstGeom prst="rect">
+            <a:avLst/>
+          </a:prstGeom>
+          <a:solidFill>
+            <a:schemeClr val="accent1"/>
+          </a:solidFill>
+          <a:ln>
+            <a:noFill/>
+          </a:ln>
+        </p:spPr>
+        <p:style>
+          <a:lnRef idx="1">
+            <a:schemeClr val="accent1"/>
+          </a:lnRef>
+          <a:fillRef idx="3">
+            <a:schemeClr val="accent1"/>
+          </a:fillRef>
+          <a:effectRef idx="2">
+            <a:schemeClr val="accent1"/>
+          </a:effectRef>
+          <a:fontRef idx="minor">
+            <a:schemeClr val="lt1"/>
+          </a:fontRef>
+        </p:style>
+      </p:sp>
       <p:sp>
         <p:nvSpPr>
           <p:cNvPr id="2" name="Title Placeholder 1"/>
@@ -2611,24 +5444,24 @@
         </p:nvSpPr>
         <p:spPr>
           <a:xfrm>
-            <a:off x="457200" y="274638"/>
-            <a:ext cx="8229600" cy="1143000"/>
-          </a:xfrm>
-          <a:prstGeom prst="rect">
-            <a:avLst/>
-          </a:prstGeom>
-        </p:spPr>
-        <p:txBody>
-          <a:bodyPr vert="horz" lIns="91440" tIns="45720" rIns="91440" bIns="45720" rtlCol="0" anchor="ctr">
-            <a:normAutofit/>
-          </a:bodyPr>
-          <a:lstStyle/>
-          <a:p>
-            <a:r>
-              <a:rPr lang="en-US" smtClean="0"/>
+            <a:off x="645943" y="452718"/>
+            <a:ext cx="9402274" cy="1400530"/>
+          </a:xfrm>
+          <a:prstGeom prst="rect">
+            <a:avLst/>
+          </a:prstGeom>
+        </p:spPr>
+        <p:txBody>
+          <a:bodyPr vert="horz" lIns="91440" tIns="45720" rIns="91440" bIns="45720" rtlCol="0" anchor="t">
+            <a:noAutofit/>
+          </a:bodyPr>
+          <a:lstStyle/>
+          <a:p>
+            <a:r>
+              <a:rPr lang="en-US"/>
               <a:t>Click to edit Master title style</a:t>
             </a:r>
-            <a:endParaRPr lang="en-US"/>
+            <a:endParaRPr lang="en-US" dirty="0"/>
           </a:p>
         </p:txBody>
       </p:sp>
@@ -2644,8 +5477,8 @@
         </p:nvSpPr>
         <p:spPr>
           <a:xfrm>
-            <a:off x="457200" y="1600200"/>
-            <a:ext cx="8229600" cy="4525963"/>
+            <a:off x="1103025" y="2052919"/>
+            <a:ext cx="8944211" cy="4195481"/>
           </a:xfrm>
           <a:prstGeom prst="rect">
             <a:avLst/>
@@ -2659,38 +5492,38 @@
           <a:p>
             <a:pPr lvl="0"/>
             <a:r>
-              <a:rPr lang="en-US" smtClean="0"/>
+              <a:rPr lang="en-US"/>
               <a:t>Click to edit Master text styles</a:t>
             </a:r>
           </a:p>
           <a:p>
             <a:pPr lvl="1"/>
             <a:r>
-              <a:rPr lang="en-US" smtClean="0"/>
+              <a:rPr lang="en-US"/>
               <a:t>Second level</a:t>
             </a:r>
           </a:p>
           <a:p>
             <a:pPr lvl="2"/>
             <a:r>
-              <a:rPr lang="en-US" smtClean="0"/>
+              <a:rPr lang="en-US"/>
               <a:t>Third level</a:t>
             </a:r>
           </a:p>
           <a:p>
             <a:pPr lvl="3"/>
             <a:r>
-              <a:rPr lang="en-US" smtClean="0"/>
+              <a:rPr lang="en-US"/>
               <a:t>Fourth level</a:t>
             </a:r>
           </a:p>
           <a:p>
             <a:pPr lvl="4"/>
             <a:r>
-              <a:rPr lang="en-US" smtClean="0"/>
+              <a:rPr lang="en-US"/>
               <a:t>Fifth level</a:t>
             </a:r>
-            <a:endParaRPr lang="en-US"/>
+            <a:endParaRPr lang="en-US" dirty="0"/>
           </a:p>
         </p:txBody>
       </p:sp>
@@ -2705,22 +5538,23 @@
           </p:nvPr>
         </p:nvSpPr>
         <p:spPr>
-          <a:xfrm>
-            <a:off x="457200" y="6356350"/>
-            <a:ext cx="2133600" cy="365125"/>
-          </a:xfrm>
-          <a:prstGeom prst="rect">
-            <a:avLst/>
-          </a:prstGeom>
-        </p:spPr>
-        <p:txBody>
-          <a:bodyPr vert="horz" lIns="91440" tIns="45720" rIns="91440" bIns="45720" rtlCol="0" anchor="ctr"/>
+          <a:xfrm rot="5400000">
+            <a:off x="10152866" y="1790741"/>
+            <a:ext cx="990599" cy="304720"/>
+          </a:xfrm>
+          <a:prstGeom prst="rect">
+            <a:avLst/>
+          </a:prstGeom>
+        </p:spPr>
+        <p:txBody>
+          <a:bodyPr vert="horz" lIns="91440" tIns="45720" rIns="91440" bIns="45720" rtlCol="0" anchor="t"/>
           <a:lstStyle>
             <a:lvl1pPr algn="l">
-              <a:defRPr sz="1200">
+              <a:defRPr sz="1100" b="0" i="0">
                 <a:solidFill>
                   <a:schemeClr val="tx1">
                     <a:tint val="75000"/>
+                    <a:alpha val="60000"/>
                   </a:schemeClr>
                 </a:solidFill>
               </a:defRPr>
@@ -2729,7 +5563,7 @@
           <a:p>
             <a:fld id="{5BCAD085-E8A6-8845-BD4E-CB4CCA059FC4}" type="datetimeFigureOut">
               <a:rPr lang="en-US" smtClean="0"/>
-              <a:t>1/27/13</a:t>
+              <a:t>10/26/26</a:t>
             </a:fld>
             <a:endParaRPr lang="en-US"/>
           </a:p>
@@ -2746,22 +5580,23 @@
           </p:nvPr>
         </p:nvSpPr>
         <p:spPr>
-          <a:xfrm>
-            <a:off x="3124200" y="6356350"/>
-            <a:ext cx="2895600" cy="365125"/>
-          </a:xfrm>
-          <a:prstGeom prst="rect">
-            <a:avLst/>
-          </a:prstGeom>
-        </p:spPr>
-        <p:txBody>
-          <a:bodyPr vert="horz" lIns="91440" tIns="45720" rIns="91440" bIns="45720" rtlCol="0" anchor="ctr"/>
+          <a:xfrm rot="5400000">
+            <a:off x="8948740" y="3225337"/>
+            <a:ext cx="3859795" cy="304722"/>
+          </a:xfrm>
+          <a:prstGeom prst="rect">
+            <a:avLst/>
+          </a:prstGeom>
+        </p:spPr>
+        <p:txBody>
+          <a:bodyPr vert="horz" lIns="91440" tIns="45720" rIns="91440" bIns="45720" rtlCol="0" anchor="b"/>
           <a:lstStyle>
-            <a:lvl1pPr algn="ctr">
-              <a:defRPr sz="1200">
+            <a:lvl1pPr algn="l">
+              <a:defRPr sz="1100" b="0" i="0">
                 <a:solidFill>
                   <a:schemeClr val="tx1">
                     <a:tint val="75000"/>
+                    <a:alpha val="60000"/>
                   </a:schemeClr>
                 </a:solidFill>
               </a:defRPr>
@@ -2782,20 +5617,20 @@
             <p:ph type="sldNum" sz="quarter" idx="4"/>
           </p:nvPr>
         </p:nvSpPr>
-        <p:spPr>
-          <a:xfrm>
-            <a:off x="6553200" y="6356350"/>
-            <a:ext cx="2133600" cy="365125"/>
-          </a:xfrm>
-          <a:prstGeom prst="rect">
-            <a:avLst/>
-          </a:prstGeom>
-        </p:spPr>
-        <p:txBody>
-          <a:bodyPr vert="horz" lIns="91440" tIns="45720" rIns="91440" bIns="45720" rtlCol="0" anchor="ctr"/>
+        <p:spPr bwMode="gray">
+          <a:xfrm>
+            <a:off x="10349844" y="295730"/>
+            <a:ext cx="837981" cy="767687"/>
+          </a:xfrm>
+          <a:prstGeom prst="rect">
+            <a:avLst/>
+          </a:prstGeom>
+        </p:spPr>
+        <p:txBody>
+          <a:bodyPr vert="horz" lIns="91440" tIns="45720" rIns="91440" bIns="45720" rtlCol="0" anchor="b"/>
           <a:lstStyle>
-            <a:lvl1pPr algn="r">
-              <a:defRPr sz="1200">
+            <a:lvl1pPr algn="ctr">
+              <a:defRPr sz="2799" b="0" i="0">
                 <a:solidFill>
                   <a:schemeClr val="tx1">
                     <a:tint val="75000"/>
@@ -2816,32 +5651,121 @@
     </p:spTree>
     <p:extLst>
       <p:ext uri="{BB962C8B-B14F-4D97-AF65-F5344CB8AC3E}">
-        <p14:creationId xmlns:p14="http://schemas.microsoft.com/office/powerpoint/2010/main" val="2209977519"/>
+        <p14:creationId xmlns:p14="http://schemas.microsoft.com/office/powerpoint/2010/main" val="2316466989"/>
       </p:ext>
     </p:extLst>
   </p:cSld>
-  <p:clrMap bg1="lt1" tx1="dk1" bg2="lt2" tx2="dk2" accent1="accent1" accent2="accent2" accent3="accent3" accent4="accent4" accent5="accent5" accent6="accent6" hlink="hlink" folHlink="folHlink"/>
+  <p:clrMap bg1="dk1" tx1="lt1" bg2="dk2" tx2="lt2" accent1="accent1" accent2="accent2" accent3="accent3" accent4="accent4" accent5="accent5" accent6="accent6" hlink="hlink" folHlink="folHlink"/>
   <p:sldLayoutIdLst>
-    <p:sldLayoutId id="2147483649" r:id="rId1"/>
-    <p:sldLayoutId id="2147483650" r:id="rId2"/>
-    <p:sldLayoutId id="2147483651" r:id="rId3"/>
-    <p:sldLayoutId id="2147483652" r:id="rId4"/>
-    <p:sldLayoutId id="2147483653" r:id="rId5"/>
-    <p:sldLayoutId id="2147483654" r:id="rId6"/>
-    <p:sldLayoutId id="2147483655" r:id="rId7"/>
-    <p:sldLayoutId id="2147483656" r:id="rId8"/>
-    <p:sldLayoutId id="2147483657" r:id="rId9"/>
-    <p:sldLayoutId id="2147483658" r:id="rId10"/>
-    <p:sldLayoutId id="2147483659" r:id="rId11"/>
+    <p:sldLayoutId id="2147483887" r:id="rId1"/>
+    <p:sldLayoutId id="2147483888" r:id="rId2"/>
+    <p:sldLayoutId id="2147483889" r:id="rId3"/>
+    <p:sldLayoutId id="2147483890" r:id="rId4"/>
+    <p:sldLayoutId id="2147483891" r:id="rId5"/>
+    <p:sldLayoutId id="2147483892" r:id="rId6"/>
+    <p:sldLayoutId id="2147483893" r:id="rId7"/>
+    <p:sldLayoutId id="2147483894" r:id="rId8"/>
+    <p:sldLayoutId id="2147483895" r:id="rId9"/>
+    <p:sldLayoutId id="2147483896" r:id="rId10"/>
+    <p:sldLayoutId id="2147483897" r:id="rId11"/>
+    <p:sldLayoutId id="2147483898" r:id="rId12"/>
+    <p:sldLayoutId id="2147483899" r:id="rId13"/>
+    <p:sldLayoutId id="2147483900" r:id="rId14"/>
+    <p:sldLayoutId id="2147483901" r:id="rId15"/>
+    <p:sldLayoutId id="2147483902" r:id="rId16"/>
+    <p:sldLayoutId id="2147483903" r:id="rId17"/>
   </p:sldLayoutIdLst>
   <p:txStyles>
     <p:titleStyle>
-      <a:lvl1pPr algn="ctr" defTabSz="457200" rtl="0" eaLnBrk="1" latinLnBrk="0" hangingPunct="1">
+      <a:lvl1pPr algn="l" defTabSz="457063" rtl="0" eaLnBrk="1" latinLnBrk="0" hangingPunct="1">
         <a:spcBef>
           <a:spcPct val="0"/>
         </a:spcBef>
         <a:buNone/>
-        <a:defRPr sz="4400" kern="1200">
+        <a:defRPr sz="4199" b="0" i="0" kern="1200">
+          <a:solidFill>
+            <a:schemeClr val="tx2"/>
+          </a:solidFill>
+          <a:latin typeface="+mj-lt"/>
+          <a:ea typeface="+mj-ea"/>
+          <a:cs typeface="+mj-cs"/>
+        </a:defRPr>
+      </a:lvl1pPr>
+      <a:lvl2pPr eaLnBrk="1" hangingPunct="1">
+        <a:defRPr>
+          <a:solidFill>
+            <a:schemeClr val="tx2"/>
+          </a:solidFill>
+        </a:defRPr>
+      </a:lvl2pPr>
+      <a:lvl3pPr eaLnBrk="1" hangingPunct="1">
+        <a:defRPr>
+          <a:solidFill>
+            <a:schemeClr val="tx2"/>
+          </a:solidFill>
+        </a:defRPr>
+      </a:lvl3pPr>
+      <a:lvl4pPr eaLnBrk="1" hangingPunct="1">
+        <a:defRPr>
+          <a:solidFill>
+            <a:schemeClr val="tx2"/>
+          </a:solidFill>
+        </a:defRPr>
+      </a:lvl4pPr>
+      <a:lvl5pPr eaLnBrk="1" hangingPunct="1">
+        <a:defRPr>
+          <a:solidFill>
+            <a:schemeClr val="tx2"/>
+          </a:solidFill>
+        </a:defRPr>
+      </a:lvl5pPr>
+      <a:lvl6pPr eaLnBrk="1" hangingPunct="1">
+        <a:defRPr>
+          <a:solidFill>
+            <a:schemeClr val="tx2"/>
+          </a:solidFill>
+        </a:defRPr>
+      </a:lvl6pPr>
+      <a:lvl7pPr eaLnBrk="1" hangingPunct="1">
+        <a:defRPr>
+          <a:solidFill>
+            <a:schemeClr val="tx2"/>
+          </a:solidFill>
+        </a:defRPr>
+      </a:lvl7pPr>
+      <a:lvl8pPr eaLnBrk="1" hangingPunct="1">
+        <a:defRPr>
+          <a:solidFill>
+            <a:schemeClr val="tx2"/>
+          </a:solidFill>
+        </a:defRPr>
+      </a:lvl8pPr>
+      <a:lvl9pPr eaLnBrk="1" hangingPunct="1">
+        <a:defRPr>
+          <a:solidFill>
+            <a:schemeClr val="tx2"/>
+          </a:solidFill>
+        </a:defRPr>
+      </a:lvl9pPr>
+    </p:titleStyle>
+    <p:bodyStyle>
+      <a:lvl1pPr marL="342797" indent="-342797" algn="l" defTabSz="457063" rtl="0" eaLnBrk="1" latinLnBrk="0" hangingPunct="1">
+        <a:spcBef>
+          <a:spcPts val="1000"/>
+        </a:spcBef>
+        <a:spcAft>
+          <a:spcPts val="0"/>
+        </a:spcAft>
+        <a:buClr>
+          <a:schemeClr val="bg2">
+            <a:lumMod val="40000"/>
+            <a:lumOff val="60000"/>
+          </a:schemeClr>
+        </a:buClr>
+        <a:buSzPct val="80000"/>
+        <a:buFont typeface="Wingdings 3" charset="2"/>
+        <a:buChar char=""/>
+        <a:defRPr sz="1999" b="0" i="0" kern="1200">
           <a:solidFill>
             <a:schemeClr val="tx1"/>
           </a:solidFill>
@@ -2850,15 +5774,213 @@
           <a:cs typeface="+mj-cs"/>
         </a:defRPr>
       </a:lvl1pPr>
-    </p:titleStyle>
-    <p:bodyStyle>
-      <a:lvl1pPr marL="342900" indent="-342900" algn="l" defTabSz="457200" rtl="0" eaLnBrk="1" latinLnBrk="0" hangingPunct="1">
+      <a:lvl2pPr marL="742727" indent="-285664" algn="l" defTabSz="457063" rtl="0" eaLnBrk="1" latinLnBrk="0" hangingPunct="1">
         <a:spcBef>
-          <a:spcPct val="20000"/>
+          <a:spcPts val="1000"/>
         </a:spcBef>
-        <a:buFont typeface="Arial"/>
-        <a:buChar char="•"/>
-        <a:defRPr sz="3200" kern="1200">
+        <a:spcAft>
+          <a:spcPts val="0"/>
+        </a:spcAft>
+        <a:buClr>
+          <a:schemeClr val="bg2">
+            <a:lumMod val="40000"/>
+            <a:lumOff val="60000"/>
+          </a:schemeClr>
+        </a:buClr>
+        <a:buSzPct val="80000"/>
+        <a:buFont typeface="Wingdings 3" charset="2"/>
+        <a:buChar char=""/>
+        <a:defRPr sz="1799" b="0" i="0" kern="1200">
+          <a:solidFill>
+            <a:schemeClr val="tx1"/>
+          </a:solidFill>
+          <a:latin typeface="+mj-lt"/>
+          <a:ea typeface="+mj-ea"/>
+          <a:cs typeface="+mj-cs"/>
+        </a:defRPr>
+      </a:lvl2pPr>
+      <a:lvl3pPr marL="1142657" indent="-228531" algn="l" defTabSz="457063" rtl="0" eaLnBrk="1" latinLnBrk="0" hangingPunct="1">
+        <a:spcBef>
+          <a:spcPts val="1000"/>
+        </a:spcBef>
+        <a:spcAft>
+          <a:spcPts val="0"/>
+        </a:spcAft>
+        <a:buClr>
+          <a:schemeClr val="bg2">
+            <a:lumMod val="40000"/>
+            <a:lumOff val="60000"/>
+          </a:schemeClr>
+        </a:buClr>
+        <a:buSzPct val="80000"/>
+        <a:buFont typeface="Wingdings 3" charset="2"/>
+        <a:buChar char=""/>
+        <a:defRPr sz="1600" b="0" i="0" kern="1200">
+          <a:solidFill>
+            <a:schemeClr val="tx1"/>
+          </a:solidFill>
+          <a:latin typeface="+mj-lt"/>
+          <a:ea typeface="+mj-ea"/>
+          <a:cs typeface="+mj-cs"/>
+        </a:defRPr>
+      </a:lvl3pPr>
+      <a:lvl4pPr marL="1599720" indent="-228531" algn="l" defTabSz="457063" rtl="0" eaLnBrk="1" latinLnBrk="0" hangingPunct="1">
+        <a:spcBef>
+          <a:spcPts val="1000"/>
+        </a:spcBef>
+        <a:spcAft>
+          <a:spcPts val="0"/>
+        </a:spcAft>
+        <a:buClr>
+          <a:schemeClr val="bg2">
+            <a:lumMod val="40000"/>
+            <a:lumOff val="60000"/>
+          </a:schemeClr>
+        </a:buClr>
+        <a:buSzPct val="80000"/>
+        <a:buFont typeface="Wingdings 3" charset="2"/>
+        <a:buChar char=""/>
+        <a:defRPr sz="1400" b="0" i="0" kern="1200">
+          <a:solidFill>
+            <a:schemeClr val="tx1"/>
+          </a:solidFill>
+          <a:latin typeface="+mj-lt"/>
+          <a:ea typeface="+mj-ea"/>
+          <a:cs typeface="+mj-cs"/>
+        </a:defRPr>
+      </a:lvl4pPr>
+      <a:lvl5pPr marL="2056783" indent="-228531" algn="l" defTabSz="457063" rtl="0" eaLnBrk="1" latinLnBrk="0" hangingPunct="1">
+        <a:spcBef>
+          <a:spcPts val="1000"/>
+        </a:spcBef>
+        <a:spcAft>
+          <a:spcPts val="0"/>
+        </a:spcAft>
+        <a:buClr>
+          <a:schemeClr val="bg2">
+            <a:lumMod val="40000"/>
+            <a:lumOff val="60000"/>
+          </a:schemeClr>
+        </a:buClr>
+        <a:buSzPct val="80000"/>
+        <a:buFont typeface="Wingdings 3" charset="2"/>
+        <a:buChar char=""/>
+        <a:defRPr sz="1400" b="0" i="0" kern="1200">
+          <a:solidFill>
+            <a:schemeClr val="tx1"/>
+          </a:solidFill>
+          <a:latin typeface="+mj-lt"/>
+          <a:ea typeface="+mj-ea"/>
+          <a:cs typeface="+mj-cs"/>
+        </a:defRPr>
+      </a:lvl5pPr>
+      <a:lvl6pPr marL="2505248" indent="-228531" algn="l" defTabSz="457063" rtl="0" eaLnBrk="1" latinLnBrk="0" hangingPunct="1">
+        <a:spcBef>
+          <a:spcPts val="1000"/>
+        </a:spcBef>
+        <a:spcAft>
+          <a:spcPts val="0"/>
+        </a:spcAft>
+        <a:buClr>
+          <a:schemeClr val="bg2">
+            <a:lumMod val="40000"/>
+            <a:lumOff val="60000"/>
+          </a:schemeClr>
+        </a:buClr>
+        <a:buSzPct val="80000"/>
+        <a:buFont typeface="Wingdings 3" charset="2"/>
+        <a:buChar char=""/>
+        <a:defRPr sz="1400" b="0" i="0" kern="1200">
+          <a:solidFill>
+            <a:schemeClr val="tx1"/>
+          </a:solidFill>
+          <a:latin typeface="+mj-lt"/>
+          <a:ea typeface="+mj-ea"/>
+          <a:cs typeface="+mj-cs"/>
+        </a:defRPr>
+      </a:lvl6pPr>
+      <a:lvl7pPr marL="2970908" indent="-228531" algn="l" defTabSz="457063" rtl="0" eaLnBrk="1" latinLnBrk="0" hangingPunct="1">
+        <a:spcBef>
+          <a:spcPts val="1000"/>
+        </a:spcBef>
+        <a:spcAft>
+          <a:spcPts val="0"/>
+        </a:spcAft>
+        <a:buClr>
+          <a:schemeClr val="bg2">
+            <a:lumMod val="40000"/>
+            <a:lumOff val="60000"/>
+          </a:schemeClr>
+        </a:buClr>
+        <a:buSzPct val="80000"/>
+        <a:buFont typeface="Wingdings 3" charset="2"/>
+        <a:buChar char=""/>
+        <a:defRPr sz="1400" b="0" i="0" kern="1200">
+          <a:solidFill>
+            <a:schemeClr val="tx1"/>
+          </a:solidFill>
+          <a:latin typeface="+mj-lt"/>
+          <a:ea typeface="+mj-ea"/>
+          <a:cs typeface="+mj-cs"/>
+        </a:defRPr>
+      </a:lvl7pPr>
+      <a:lvl8pPr marL="3427971" indent="-228531" algn="l" defTabSz="457063" rtl="0" eaLnBrk="1" latinLnBrk="0" hangingPunct="1">
+        <a:spcBef>
+          <a:spcPts val="1000"/>
+        </a:spcBef>
+        <a:spcAft>
+          <a:spcPts val="0"/>
+        </a:spcAft>
+        <a:buClr>
+          <a:schemeClr val="bg2">
+            <a:lumMod val="40000"/>
+            <a:lumOff val="60000"/>
+          </a:schemeClr>
+        </a:buClr>
+        <a:buSzPct val="80000"/>
+        <a:buFont typeface="Wingdings 3" charset="2"/>
+        <a:buChar char=""/>
+        <a:defRPr sz="1400" b="0" i="0" kern="1200">
+          <a:solidFill>
+            <a:schemeClr val="tx1"/>
+          </a:solidFill>
+          <a:latin typeface="+mj-lt"/>
+          <a:ea typeface="+mj-ea"/>
+          <a:cs typeface="+mj-cs"/>
+        </a:defRPr>
+      </a:lvl8pPr>
+      <a:lvl9pPr marL="3885034" indent="-228531" algn="l" defTabSz="457063" rtl="0" eaLnBrk="1" latinLnBrk="0" hangingPunct="1">
+        <a:spcBef>
+          <a:spcPts val="1000"/>
+        </a:spcBef>
+        <a:spcAft>
+          <a:spcPts val="0"/>
+        </a:spcAft>
+        <a:buClr>
+          <a:schemeClr val="bg2">
+            <a:lumMod val="40000"/>
+            <a:lumOff val="60000"/>
+          </a:schemeClr>
+        </a:buClr>
+        <a:buSzPct val="80000"/>
+        <a:buFont typeface="Wingdings 3" charset="2"/>
+        <a:buChar char=""/>
+        <a:defRPr sz="1400" b="0" i="0" kern="1200">
+          <a:solidFill>
+            <a:schemeClr val="tx1"/>
+          </a:solidFill>
+          <a:latin typeface="+mj-lt"/>
+          <a:ea typeface="+mj-ea"/>
+          <a:cs typeface="+mj-cs"/>
+        </a:defRPr>
+      </a:lvl9pPr>
+    </p:bodyStyle>
+    <p:otherStyle>
+      <a:defPPr>
+        <a:defRPr lang="en-US"/>
+      </a:defPPr>
+      <a:lvl1pPr marL="0" algn="l" defTabSz="457063" rtl="0" eaLnBrk="1" latinLnBrk="0" hangingPunct="1">
+        <a:defRPr sz="1799" kern="1200">
           <a:solidFill>
             <a:schemeClr val="tx1"/>
           </a:solidFill>
@@ -2867,13 +5989,8 @@
           <a:cs typeface="+mn-cs"/>
         </a:defRPr>
       </a:lvl1pPr>
-      <a:lvl2pPr marL="742950" indent="-285750" algn="l" defTabSz="457200" rtl="0" eaLnBrk="1" latinLnBrk="0" hangingPunct="1">
-        <a:spcBef>
-          <a:spcPct val="20000"/>
-        </a:spcBef>
-        <a:buFont typeface="Arial"/>
-        <a:buChar char="–"/>
-        <a:defRPr sz="2800" kern="1200">
+      <a:lvl2pPr marL="457063" algn="l" defTabSz="457063" rtl="0" eaLnBrk="1" latinLnBrk="0" hangingPunct="1">
+        <a:defRPr sz="1799" kern="1200">
           <a:solidFill>
             <a:schemeClr val="tx1"/>
           </a:solidFill>
@@ -2882,13 +5999,8 @@
           <a:cs typeface="+mn-cs"/>
         </a:defRPr>
       </a:lvl2pPr>
-      <a:lvl3pPr marL="1143000" indent="-228600" algn="l" defTabSz="457200" rtl="0" eaLnBrk="1" latinLnBrk="0" hangingPunct="1">
-        <a:spcBef>
-          <a:spcPct val="20000"/>
-        </a:spcBef>
-        <a:buFont typeface="Arial"/>
-        <a:buChar char="•"/>
-        <a:defRPr sz="2400" kern="1200">
+      <a:lvl3pPr marL="914126" algn="l" defTabSz="457063" rtl="0" eaLnBrk="1" latinLnBrk="0" hangingPunct="1">
+        <a:defRPr sz="1799" kern="1200">
           <a:solidFill>
             <a:schemeClr val="tx1"/>
           </a:solidFill>
@@ -2897,13 +6009,8 @@
           <a:cs typeface="+mn-cs"/>
         </a:defRPr>
       </a:lvl3pPr>
-      <a:lvl4pPr marL="1600200" indent="-228600" algn="l" defTabSz="457200" rtl="0" eaLnBrk="1" latinLnBrk="0" hangingPunct="1">
-        <a:spcBef>
-          <a:spcPct val="20000"/>
-        </a:spcBef>
-        <a:buFont typeface="Arial"/>
-        <a:buChar char="–"/>
-        <a:defRPr sz="2000" kern="1200">
+      <a:lvl4pPr marL="1371189" algn="l" defTabSz="457063" rtl="0" eaLnBrk="1" latinLnBrk="0" hangingPunct="1">
+        <a:defRPr sz="1799" kern="1200">
           <a:solidFill>
             <a:schemeClr val="tx1"/>
           </a:solidFill>
@@ -2912,13 +6019,8 @@
           <a:cs typeface="+mn-cs"/>
         </a:defRPr>
       </a:lvl4pPr>
-      <a:lvl5pPr marL="2057400" indent="-228600" algn="l" defTabSz="457200" rtl="0" eaLnBrk="1" latinLnBrk="0" hangingPunct="1">
-        <a:spcBef>
-          <a:spcPct val="20000"/>
-        </a:spcBef>
-        <a:buFont typeface="Arial"/>
-        <a:buChar char="»"/>
-        <a:defRPr sz="2000" kern="1200">
+      <a:lvl5pPr marL="1828251" algn="l" defTabSz="457063" rtl="0" eaLnBrk="1" latinLnBrk="0" hangingPunct="1">
+        <a:defRPr sz="1799" kern="1200">
           <a:solidFill>
             <a:schemeClr val="tx1"/>
           </a:solidFill>
@@ -2927,13 +6029,8 @@
           <a:cs typeface="+mn-cs"/>
         </a:defRPr>
       </a:lvl5pPr>
-      <a:lvl6pPr marL="2514600" indent="-228600" algn="l" defTabSz="457200" rtl="0" eaLnBrk="1" latinLnBrk="0" hangingPunct="1">
-        <a:spcBef>
-          <a:spcPct val="20000"/>
-        </a:spcBef>
-        <a:buFont typeface="Arial"/>
-        <a:buChar char="•"/>
-        <a:defRPr sz="2000" kern="1200">
+      <a:lvl6pPr marL="2285314" algn="l" defTabSz="457063" rtl="0" eaLnBrk="1" latinLnBrk="0" hangingPunct="1">
+        <a:defRPr sz="1799" kern="1200">
           <a:solidFill>
             <a:schemeClr val="tx1"/>
           </a:solidFill>
@@ -2942,13 +6039,8 @@
           <a:cs typeface="+mn-cs"/>
         </a:defRPr>
       </a:lvl6pPr>
-      <a:lvl7pPr marL="2971800" indent="-228600" algn="l" defTabSz="457200" rtl="0" eaLnBrk="1" latinLnBrk="0" hangingPunct="1">
-        <a:spcBef>
-          <a:spcPct val="20000"/>
-        </a:spcBef>
-        <a:buFont typeface="Arial"/>
-        <a:buChar char="•"/>
-        <a:defRPr sz="2000" kern="1200">
+      <a:lvl7pPr marL="2742377" algn="l" defTabSz="457063" rtl="0" eaLnBrk="1" latinLnBrk="0" hangingPunct="1">
+        <a:defRPr sz="1799" kern="1200">
           <a:solidFill>
             <a:schemeClr val="tx1"/>
           </a:solidFill>
@@ -2957,13 +6049,8 @@
           <a:cs typeface="+mn-cs"/>
         </a:defRPr>
       </a:lvl7pPr>
-      <a:lvl8pPr marL="3429000" indent="-228600" algn="l" defTabSz="457200" rtl="0" eaLnBrk="1" latinLnBrk="0" hangingPunct="1">
-        <a:spcBef>
-          <a:spcPct val="20000"/>
-        </a:spcBef>
-        <a:buFont typeface="Arial"/>
-        <a:buChar char="•"/>
-        <a:defRPr sz="2000" kern="1200">
+      <a:lvl8pPr marL="3199440" algn="l" defTabSz="457063" rtl="0" eaLnBrk="1" latinLnBrk="0" hangingPunct="1">
+        <a:defRPr sz="1799" kern="1200">
           <a:solidFill>
             <a:schemeClr val="tx1"/>
           </a:solidFill>
@@ -2972,108 +6059,8 @@
           <a:cs typeface="+mn-cs"/>
         </a:defRPr>
       </a:lvl8pPr>
-      <a:lvl9pPr marL="3886200" indent="-228600" algn="l" defTabSz="457200" rtl="0" eaLnBrk="1" latinLnBrk="0" hangingPunct="1">
-        <a:spcBef>
-          <a:spcPct val="20000"/>
-        </a:spcBef>
-        <a:buFont typeface="Arial"/>
-        <a:buChar char="•"/>
-        <a:defRPr sz="2000" kern="1200">
-          <a:solidFill>
-            <a:schemeClr val="tx1"/>
-          </a:solidFill>
-          <a:latin typeface="+mn-lt"/>
-          <a:ea typeface="+mn-ea"/>
-          <a:cs typeface="+mn-cs"/>
-        </a:defRPr>
-      </a:lvl9pPr>
-    </p:bodyStyle>
-    <p:otherStyle>
-      <a:defPPr>
-        <a:defRPr lang="en-US"/>
-      </a:defPPr>
-      <a:lvl1pPr marL="0" algn="l" defTabSz="457200" rtl="0" eaLnBrk="1" latinLnBrk="0" hangingPunct="1">
-        <a:defRPr sz="1800" kern="1200">
-          <a:solidFill>
-            <a:schemeClr val="tx1"/>
-          </a:solidFill>
-          <a:latin typeface="+mn-lt"/>
-          <a:ea typeface="+mn-ea"/>
-          <a:cs typeface="+mn-cs"/>
-        </a:defRPr>
-      </a:lvl1pPr>
-      <a:lvl2pPr marL="457200" algn="l" defTabSz="457200" rtl="0" eaLnBrk="1" latinLnBrk="0" hangingPunct="1">
-        <a:defRPr sz="1800" kern="1200">
-          <a:solidFill>
-            <a:schemeClr val="tx1"/>
-          </a:solidFill>
-          <a:latin typeface="+mn-lt"/>
-          <a:ea typeface="+mn-ea"/>
-          <a:cs typeface="+mn-cs"/>
-        </a:defRPr>
-      </a:lvl2pPr>
-      <a:lvl3pPr marL="914400" algn="l" defTabSz="457200" rtl="0" eaLnBrk="1" latinLnBrk="0" hangingPunct="1">
-        <a:defRPr sz="1800" kern="1200">
-          <a:solidFill>
-            <a:schemeClr val="tx1"/>
-          </a:solidFill>
-          <a:latin typeface="+mn-lt"/>
-          <a:ea typeface="+mn-ea"/>
-          <a:cs typeface="+mn-cs"/>
-        </a:defRPr>
-      </a:lvl3pPr>
-      <a:lvl4pPr marL="1371600" algn="l" defTabSz="457200" rtl="0" eaLnBrk="1" latinLnBrk="0" hangingPunct="1">
-        <a:defRPr sz="1800" kern="1200">
-          <a:solidFill>
-            <a:schemeClr val="tx1"/>
-          </a:solidFill>
-          <a:latin typeface="+mn-lt"/>
-          <a:ea typeface="+mn-ea"/>
-          <a:cs typeface="+mn-cs"/>
-        </a:defRPr>
-      </a:lvl4pPr>
-      <a:lvl5pPr marL="1828800" algn="l" defTabSz="457200" rtl="0" eaLnBrk="1" latinLnBrk="0" hangingPunct="1">
-        <a:defRPr sz="1800" kern="1200">
-          <a:solidFill>
-            <a:schemeClr val="tx1"/>
-          </a:solidFill>
-          <a:latin typeface="+mn-lt"/>
-          <a:ea typeface="+mn-ea"/>
-          <a:cs typeface="+mn-cs"/>
-        </a:defRPr>
-      </a:lvl5pPr>
-      <a:lvl6pPr marL="2286000" algn="l" defTabSz="457200" rtl="0" eaLnBrk="1" latinLnBrk="0" hangingPunct="1">
-        <a:defRPr sz="1800" kern="1200">
-          <a:solidFill>
-            <a:schemeClr val="tx1"/>
-          </a:solidFill>
-          <a:latin typeface="+mn-lt"/>
-          <a:ea typeface="+mn-ea"/>
-          <a:cs typeface="+mn-cs"/>
-        </a:defRPr>
-      </a:lvl6pPr>
-      <a:lvl7pPr marL="2743200" algn="l" defTabSz="457200" rtl="0" eaLnBrk="1" latinLnBrk="0" hangingPunct="1">
-        <a:defRPr sz="1800" kern="1200">
-          <a:solidFill>
-            <a:schemeClr val="tx1"/>
-          </a:solidFill>
-          <a:latin typeface="+mn-lt"/>
-          <a:ea typeface="+mn-ea"/>
-          <a:cs typeface="+mn-cs"/>
-        </a:defRPr>
-      </a:lvl7pPr>
-      <a:lvl8pPr marL="3200400" algn="l" defTabSz="457200" rtl="0" eaLnBrk="1" latinLnBrk="0" hangingPunct="1">
-        <a:defRPr sz="1800" kern="1200">
-          <a:solidFill>
-            <a:schemeClr val="tx1"/>
-          </a:solidFill>
-          <a:latin typeface="+mn-lt"/>
-          <a:ea typeface="+mn-ea"/>
-          <a:cs typeface="+mn-cs"/>
-        </a:defRPr>
-      </a:lvl8pPr>
-      <a:lvl9pPr marL="3657600" algn="l" defTabSz="457200" rtl="0" eaLnBrk="1" latinLnBrk="0" hangingPunct="1">
-        <a:defRPr sz="1800" kern="1200">
+      <a:lvl9pPr marL="3656503" algn="l" defTabSz="457063" rtl="0" eaLnBrk="1" latinLnBrk="0" hangingPunct="1">
+        <a:defRPr sz="1799" kern="1200">
           <a:solidFill>
             <a:schemeClr val="tx1"/>
           </a:solidFill>
@@ -3084,11 +6071,16 @@
       </a:lvl9pPr>
     </p:otherStyle>
   </p:txStyles>
+  <p:extLst>
+    <p:ext uri="{27BBF7A9-308A-43DC-89C8-2F10F3537804}">
+      <p15:sldGuideLst xmlns:p15="http://schemas.microsoft.com/office/powerpoint/2012/main"/>
+    </p:ext>
+  </p:extLst>
 </p:sldMaster>
 </file>
 
 <file path=ppt/slides/slide1.xml><?xml version="1.0" encoding="utf-8"?>
-<p:sld xmlns:a="http://schemas.openxmlformats.org/drawingml/2006/main" xmlns:p="http://schemas.openxmlformats.org/presentationml/2006/main" xmlns:r="http://schemas.openxmlformats.org/officeDocument/2006/relationships">
+<p:sld xmlns:a="http://schemas.openxmlformats.org/drawingml/2006/main" xmlns:r="http://schemas.openxmlformats.org/officeDocument/2006/relationships" xmlns:p="http://schemas.openxmlformats.org/presentationml/2006/main">
   <p:cSld>
     <p:bg>
       <p:bgPr>
@@ -3104,7 +6096,14 @@
         <p:cNvGrpSpPr/>
         <p:nvPr/>
       </p:nvGrpSpPr>
-      <p:grpSpPr/>
+      <p:grpSpPr>
+        <a:xfrm>
+          <a:off x="0" y="0"/>
+          <a:ext cx="0" cy="0"/>
+          <a:chOff x="0" y="0"/>
+          <a:chExt cx="0" cy="0"/>
+        </a:xfrm>
+      </p:grpSpPr>
       <p:sp>
         <p:nvSpPr>
           <p:cNvPr id="2" name="Rectangle 1"/>
@@ -3145,6 +6144,7 @@
           <a:lstStyle/>
           <a:p>
             <a:pPr algn="ctr"/>
+            <a:endParaRPr/>
           </a:p>
         </p:txBody>
       </p:sp>
@@ -3190,6 +6190,7 @@
           <a:lstStyle/>
           <a:p>
             <a:pPr algn="ctr"/>
+            <a:endParaRPr/>
           </a:p>
         </p:txBody>
       </p:sp>
@@ -3371,6 +6372,7 @@
           <a:lstStyle/>
           <a:p>
             <a:pPr algn="ctr"/>
+            <a:endParaRPr/>
           </a:p>
         </p:txBody>
       </p:sp>
@@ -3450,6 +6452,7 @@
           <a:lstStyle/>
           <a:p>
             <a:pPr algn="ctr"/>
+            <a:endParaRPr/>
           </a:p>
         </p:txBody>
       </p:sp>
@@ -3529,6 +6532,7 @@
           <a:lstStyle/>
           <a:p>
             <a:pPr algn="ctr"/>
+            <a:endParaRPr/>
           </a:p>
         </p:txBody>
       </p:sp>
@@ -3608,6 +6612,7 @@
           <a:lstStyle/>
           <a:p>
             <a:pPr algn="ctr"/>
+            <a:endParaRPr/>
           </a:p>
         </p:txBody>
       </p:sp>
@@ -3687,6 +6692,7 @@
           <a:lstStyle/>
           <a:p>
             <a:pPr algn="ctr"/>
+            <a:endParaRPr/>
           </a:p>
         </p:txBody>
       </p:sp>
@@ -3766,6 +6772,7 @@
           <a:lstStyle/>
           <a:p>
             <a:pPr algn="ctr"/>
+            <a:endParaRPr/>
           </a:p>
         </p:txBody>
       </p:sp>
@@ -3845,6 +6852,7 @@
           <a:lstStyle/>
           <a:p>
             <a:pPr algn="ctr"/>
+            <a:endParaRPr/>
           </a:p>
         </p:txBody>
       </p:sp>
@@ -3891,7 +6899,7 @@
 </file>
 
 <file path=ppt/slides/slide10.xml><?xml version="1.0" encoding="utf-8"?>
-<p:sld xmlns:a="http://schemas.openxmlformats.org/drawingml/2006/main" xmlns:p="http://schemas.openxmlformats.org/presentationml/2006/main" xmlns:r="http://schemas.openxmlformats.org/officeDocument/2006/relationships">
+<p:sld xmlns:a="http://schemas.openxmlformats.org/drawingml/2006/main" xmlns:r="http://schemas.openxmlformats.org/officeDocument/2006/relationships" xmlns:p="http://schemas.openxmlformats.org/presentationml/2006/main">
   <p:cSld>
     <p:bg>
       <p:bgPr>
@@ -3907,7 +6915,14 @@
         <p:cNvGrpSpPr/>
         <p:nvPr/>
       </p:nvGrpSpPr>
-      <p:grpSpPr/>
+      <p:grpSpPr>
+        <a:xfrm>
+          <a:off x="0" y="0"/>
+          <a:ext cx="0" cy="0"/>
+          <a:chOff x="0" y="0"/>
+          <a:chExt cx="0" cy="0"/>
+        </a:xfrm>
+      </p:grpSpPr>
       <p:sp>
         <p:nvSpPr>
           <p:cNvPr id="2" name="TextBox 1"/>
@@ -4646,12 +7661,76 @@
           <a:p>
             <a:pPr algn="l"/>
             <a:r>
-              <a:rPr sz="1250" b="0" i="0">
+              <a:rPr sz="1250" b="0" i="0" dirty="0">
                 <a:solidFill>
                   <a:srgbClr val="60A5FA"/>
                 </a:solidFill>
               </a:rPr>
-              <a:t>48 test · README (5 qadam) · ASSUMPTIONS.md (10 qaror) · 4 rol + Super Admin</a:t>
+              <a:t>48 test · README (5 </a:t>
+            </a:r>
+            <a:r>
+              <a:rPr sz="1250" b="0" i="0" dirty="0" err="1">
+                <a:solidFill>
+                  <a:srgbClr val="60A5FA"/>
+                </a:solidFill>
+              </a:rPr>
+              <a:t>qadam</a:t>
+            </a:r>
+            <a:r>
+              <a:rPr sz="1250" b="0" i="0" dirty="0">
+                <a:solidFill>
+                  <a:srgbClr val="60A5FA"/>
+                </a:solidFill>
+              </a:rPr>
+              <a:t>) · </a:t>
+            </a:r>
+            <a:r>
+              <a:rPr sz="1250" b="0" i="0" dirty="0" err="1">
+                <a:solidFill>
+                  <a:srgbClr val="60A5FA"/>
+                </a:solidFill>
+              </a:rPr>
+              <a:t>ASSUMPTIONS.md</a:t>
+            </a:r>
+            <a:r>
+              <a:rPr sz="1250" b="0" i="0" dirty="0">
+                <a:solidFill>
+                  <a:srgbClr val="60A5FA"/>
+                </a:solidFill>
+              </a:rPr>
+              <a:t> (10 </a:t>
+            </a:r>
+            <a:r>
+              <a:rPr sz="1250" b="0" i="0" dirty="0" err="1">
+                <a:solidFill>
+                  <a:srgbClr val="60A5FA"/>
+                </a:solidFill>
+              </a:rPr>
+              <a:t>qaror</a:t>
+            </a:r>
+            <a:r>
+              <a:rPr sz="1250" b="0" i="0" dirty="0">
+                <a:solidFill>
+                  <a:srgbClr val="60A5FA"/>
+                </a:solidFill>
+              </a:rPr>
+              <a:t>) · 4 </a:t>
+            </a:r>
+            <a:r>
+              <a:rPr sz="1250" b="0" i="0" dirty="0" err="1">
+                <a:solidFill>
+                  <a:srgbClr val="60A5FA"/>
+                </a:solidFill>
+              </a:rPr>
+              <a:t>rol</a:t>
+            </a:r>
+            <a:r>
+              <a:rPr sz="1250" b="0" i="0" dirty="0">
+                <a:solidFill>
+                  <a:srgbClr val="60A5FA"/>
+                </a:solidFill>
+              </a:rPr>
+              <a:t> + Super Admin</a:t>
             </a:r>
           </a:p>
         </p:txBody>
@@ -4665,7 +7744,7 @@
 </file>
 
 <file path=ppt/slides/slide2.xml><?xml version="1.0" encoding="utf-8"?>
-<p:sld xmlns:a="http://schemas.openxmlformats.org/drawingml/2006/main" xmlns:p="http://schemas.openxmlformats.org/presentationml/2006/main" xmlns:r="http://schemas.openxmlformats.org/officeDocument/2006/relationships">
+<p:sld xmlns:a="http://schemas.openxmlformats.org/drawingml/2006/main" xmlns:r="http://schemas.openxmlformats.org/officeDocument/2006/relationships" xmlns:p="http://schemas.openxmlformats.org/presentationml/2006/main">
   <p:cSld>
     <p:bg>
       <p:bgPr>
@@ -4681,7 +7760,14 @@
         <p:cNvGrpSpPr/>
         <p:nvPr/>
       </p:nvGrpSpPr>
-      <p:grpSpPr/>
+      <p:grpSpPr>
+        <a:xfrm>
+          <a:off x="0" y="0"/>
+          <a:ext cx="0" cy="0"/>
+          <a:chOff x="0" y="0"/>
+          <a:chExt cx="0" cy="0"/>
+        </a:xfrm>
+      </p:grpSpPr>
       <p:sp>
         <p:nvSpPr>
           <p:cNvPr id="2" name="TextBox 1"/>
@@ -4792,6 +7878,7 @@
           <a:lstStyle/>
           <a:p>
             <a:pPr algn="ctr"/>
+            <a:endParaRPr/>
           </a:p>
         </p:txBody>
       </p:sp>
@@ -4903,6 +7990,7 @@
           <a:lstStyle/>
           <a:p>
             <a:pPr algn="ctr"/>
+            <a:endParaRPr/>
           </a:p>
         </p:txBody>
       </p:sp>
@@ -4985,6 +8073,7 @@
           <a:lstStyle/>
           <a:p>
             <a:pPr algn="ctr"/>
+            <a:endParaRPr/>
           </a:p>
         </p:txBody>
       </p:sp>
@@ -5096,6 +8185,7 @@
           <a:lstStyle/>
           <a:p>
             <a:pPr algn="ctr"/>
+            <a:endParaRPr/>
           </a:p>
         </p:txBody>
       </p:sp>
@@ -5178,6 +8268,7 @@
           <a:lstStyle/>
           <a:p>
             <a:pPr algn="ctr"/>
+            <a:endParaRPr/>
           </a:p>
         </p:txBody>
       </p:sp>
@@ -5289,6 +8380,7 @@
           <a:lstStyle/>
           <a:p>
             <a:pPr algn="ctr"/>
+            <a:endParaRPr/>
           </a:p>
         </p:txBody>
       </p:sp>
@@ -5338,7 +8430,7 @@
 </file>
 
 <file path=ppt/slides/slide3.xml><?xml version="1.0" encoding="utf-8"?>
-<p:sld xmlns:a="http://schemas.openxmlformats.org/drawingml/2006/main" xmlns:p="http://schemas.openxmlformats.org/presentationml/2006/main" xmlns:r="http://schemas.openxmlformats.org/officeDocument/2006/relationships">
+<p:sld xmlns:a="http://schemas.openxmlformats.org/drawingml/2006/main" xmlns:r="http://schemas.openxmlformats.org/officeDocument/2006/relationships" xmlns:p="http://schemas.openxmlformats.org/presentationml/2006/main">
   <p:cSld>
     <p:bg>
       <p:bgPr>
@@ -5354,7 +8446,14 @@
         <p:cNvGrpSpPr/>
         <p:nvPr/>
       </p:nvGrpSpPr>
-      <p:grpSpPr/>
+      <p:grpSpPr>
+        <a:xfrm>
+          <a:off x="0" y="0"/>
+          <a:ext cx="0" cy="0"/>
+          <a:chOff x="0" y="0"/>
+          <a:chExt cx="0" cy="0"/>
+        </a:xfrm>
+      </p:grpSpPr>
       <p:sp>
         <p:nvSpPr>
           <p:cNvPr id="2" name="TextBox 1"/>
@@ -5465,6 +8564,7 @@
           <a:lstStyle/>
           <a:p>
             <a:pPr algn="ctr"/>
+            <a:endParaRPr/>
           </a:p>
         </p:txBody>
       </p:sp>
@@ -5647,6 +8747,7 @@
           <a:lstStyle/>
           <a:p>
             <a:pPr algn="ctr"/>
+            <a:endParaRPr/>
           </a:p>
         </p:txBody>
       </p:sp>
@@ -5829,6 +8930,7 @@
           <a:lstStyle/>
           <a:p>
             <a:pPr algn="ctr"/>
+            <a:endParaRPr/>
           </a:p>
         </p:txBody>
       </p:sp>
@@ -5977,6 +9079,7 @@
           <a:lstStyle/>
           <a:p>
             <a:pPr algn="ctr"/>
+            <a:endParaRPr/>
           </a:p>
         </p:txBody>
       </p:sp>
@@ -6127,6 +9230,7 @@
           <a:lstStyle/>
           <a:p>
             <a:pPr algn="ctr"/>
+            <a:endParaRPr/>
           </a:p>
         </p:txBody>
       </p:sp>
@@ -6244,7 +9348,7 @@
 </file>
 
 <file path=ppt/slides/slide4.xml><?xml version="1.0" encoding="utf-8"?>
-<p:sld xmlns:a="http://schemas.openxmlformats.org/drawingml/2006/main" xmlns:p="http://schemas.openxmlformats.org/presentationml/2006/main" xmlns:r="http://schemas.openxmlformats.org/officeDocument/2006/relationships">
+<p:sld xmlns:a="http://schemas.openxmlformats.org/drawingml/2006/main" xmlns:r="http://schemas.openxmlformats.org/officeDocument/2006/relationships" xmlns:p="http://schemas.openxmlformats.org/presentationml/2006/main">
   <p:cSld>
     <p:bg>
       <p:bgPr>
@@ -6260,7 +9364,14 @@
         <p:cNvGrpSpPr/>
         <p:nvPr/>
       </p:nvGrpSpPr>
-      <p:grpSpPr/>
+      <p:grpSpPr>
+        <a:xfrm>
+          <a:off x="0" y="0"/>
+          <a:ext cx="0" cy="0"/>
+          <a:chOff x="0" y="0"/>
+          <a:chExt cx="0" cy="0"/>
+        </a:xfrm>
+      </p:grpSpPr>
       <p:sp>
         <p:nvSpPr>
           <p:cNvPr id="2" name="TextBox 1"/>
@@ -6371,6 +9482,7 @@
           <a:lstStyle/>
           <a:p>
             <a:pPr algn="ctr"/>
+            <a:endParaRPr/>
           </a:p>
         </p:txBody>
       </p:sp>
@@ -6484,6 +9596,7 @@
           <a:lstStyle/>
           <a:p>
             <a:pPr algn="ctr"/>
+            <a:endParaRPr/>
           </a:p>
         </p:txBody>
       </p:sp>
@@ -6597,6 +9710,7 @@
           <a:lstStyle/>
           <a:p>
             <a:pPr algn="ctr"/>
+            <a:endParaRPr/>
           </a:p>
         </p:txBody>
       </p:sp>
@@ -6709,6 +9823,7 @@
           <a:lstStyle/>
           <a:p>
             <a:pPr algn="ctr"/>
+            <a:endParaRPr/>
           </a:p>
         </p:txBody>
       </p:sp>
@@ -6788,6 +9903,7 @@
           <a:lstStyle/>
           <a:p>
             <a:pPr algn="ctr"/>
+            <a:endParaRPr/>
           </a:p>
         </p:txBody>
       </p:sp>
@@ -6900,6 +10016,7 @@
           <a:lstStyle/>
           <a:p>
             <a:pPr algn="ctr"/>
+            <a:endParaRPr/>
           </a:p>
         </p:txBody>
       </p:sp>
@@ -6979,6 +10096,7 @@
           <a:lstStyle/>
           <a:p>
             <a:pPr algn="ctr"/>
+            <a:endParaRPr/>
           </a:p>
         </p:txBody>
       </p:sp>
@@ -7091,6 +10209,7 @@
           <a:lstStyle/>
           <a:p>
             <a:pPr algn="ctr"/>
+            <a:endParaRPr/>
           </a:p>
         </p:txBody>
       </p:sp>
@@ -7170,6 +10289,7 @@
           <a:lstStyle/>
           <a:p>
             <a:pPr algn="ctr"/>
+            <a:endParaRPr/>
           </a:p>
         </p:txBody>
       </p:sp>
@@ -7282,6 +10402,7 @@
           <a:lstStyle/>
           <a:p>
             <a:pPr algn="ctr"/>
+            <a:endParaRPr/>
           </a:p>
         </p:txBody>
       </p:sp>
@@ -7328,7 +10449,7 @@
 </file>
 
 <file path=ppt/slides/slide5.xml><?xml version="1.0" encoding="utf-8"?>
-<p:sld xmlns:a="http://schemas.openxmlformats.org/drawingml/2006/main" xmlns:p="http://schemas.openxmlformats.org/presentationml/2006/main" xmlns:r="http://schemas.openxmlformats.org/officeDocument/2006/relationships">
+<p:sld xmlns:a="http://schemas.openxmlformats.org/drawingml/2006/main" xmlns:r="http://schemas.openxmlformats.org/officeDocument/2006/relationships" xmlns:p="http://schemas.openxmlformats.org/presentationml/2006/main">
   <p:cSld>
     <p:bg>
       <p:bgPr>
@@ -7344,7 +10465,14 @@
         <p:cNvGrpSpPr/>
         <p:nvPr/>
       </p:nvGrpSpPr>
-      <p:grpSpPr/>
+      <p:grpSpPr>
+        <a:xfrm>
+          <a:off x="0" y="0"/>
+          <a:ext cx="0" cy="0"/>
+          <a:chOff x="0" y="0"/>
+          <a:chExt cx="0" cy="0"/>
+        </a:xfrm>
+      </p:grpSpPr>
       <p:sp>
         <p:nvSpPr>
           <p:cNvPr id="2" name="TextBox 1"/>
@@ -7455,6 +10583,7 @@
           <a:lstStyle/>
           <a:p>
             <a:pPr algn="ctr"/>
+            <a:endParaRPr/>
           </a:p>
         </p:txBody>
       </p:sp>
@@ -7534,6 +10663,7 @@
           <a:lstStyle/>
           <a:p>
             <a:pPr algn="ctr"/>
+            <a:endParaRPr/>
           </a:p>
         </p:txBody>
       </p:sp>
@@ -7613,6 +10743,7 @@
           <a:lstStyle/>
           <a:p>
             <a:pPr algn="ctr"/>
+            <a:endParaRPr/>
           </a:p>
         </p:txBody>
       </p:sp>
@@ -7692,6 +10823,7 @@
           <a:lstStyle/>
           <a:p>
             <a:pPr algn="ctr"/>
+            <a:endParaRPr/>
           </a:p>
         </p:txBody>
       </p:sp>
@@ -7771,6 +10903,7 @@
           <a:lstStyle/>
           <a:p>
             <a:pPr algn="ctr"/>
+            <a:endParaRPr/>
           </a:p>
         </p:txBody>
       </p:sp>
@@ -7850,6 +10983,7 @@
           <a:lstStyle/>
           <a:p>
             <a:pPr algn="ctr"/>
+            <a:endParaRPr/>
           </a:p>
         </p:txBody>
       </p:sp>
@@ -7929,6 +11063,7 @@
           <a:lstStyle/>
           <a:p>
             <a:pPr algn="ctr"/>
+            <a:endParaRPr/>
           </a:p>
         </p:txBody>
       </p:sp>
@@ -8008,6 +11143,7 @@
           <a:lstStyle/>
           <a:p>
             <a:pPr algn="ctr"/>
+            <a:endParaRPr/>
           </a:p>
         </p:txBody>
       </p:sp>
@@ -8087,6 +11223,7 @@
           <a:lstStyle/>
           <a:p>
             <a:pPr algn="ctr"/>
+            <a:endParaRPr/>
           </a:p>
         </p:txBody>
       </p:sp>
@@ -8166,6 +11303,7 @@
           <a:lstStyle/>
           <a:p>
             <a:pPr algn="ctr"/>
+            <a:endParaRPr/>
           </a:p>
         </p:txBody>
       </p:sp>
@@ -8245,6 +11383,7 @@
           <a:lstStyle/>
           <a:p>
             <a:pPr algn="ctr"/>
+            <a:endParaRPr/>
           </a:p>
         </p:txBody>
       </p:sp>
@@ -8324,6 +11463,7 @@
           <a:lstStyle/>
           <a:p>
             <a:pPr algn="ctr"/>
+            <a:endParaRPr/>
           </a:p>
         </p:txBody>
       </p:sp>
@@ -8403,6 +11543,7 @@
           <a:lstStyle/>
           <a:p>
             <a:pPr algn="ctr"/>
+            <a:endParaRPr/>
           </a:p>
         </p:txBody>
       </p:sp>
@@ -8482,6 +11623,7 @@
           <a:lstStyle/>
           <a:p>
             <a:pPr algn="ctr"/>
+            <a:endParaRPr/>
           </a:p>
         </p:txBody>
       </p:sp>
@@ -8561,6 +11703,7 @@
           <a:lstStyle/>
           <a:p>
             <a:pPr algn="ctr"/>
+            <a:endParaRPr/>
           </a:p>
         </p:txBody>
       </p:sp>
@@ -8640,6 +11783,7 @@
           <a:lstStyle/>
           <a:p>
             <a:pPr algn="ctr"/>
+            <a:endParaRPr/>
           </a:p>
         </p:txBody>
       </p:sp>
@@ -8789,6 +11933,7 @@
           <a:lstStyle/>
           <a:p>
             <a:pPr algn="ctr"/>
+            <a:endParaRPr/>
           </a:p>
         </p:txBody>
       </p:sp>
@@ -8938,6 +12083,7 @@
           <a:lstStyle/>
           <a:p>
             <a:pPr algn="ctr"/>
+            <a:endParaRPr/>
           </a:p>
         </p:txBody>
       </p:sp>
@@ -9054,7 +12200,7 @@
 </file>
 
 <file path=ppt/slides/slide6.xml><?xml version="1.0" encoding="utf-8"?>
-<p:sld xmlns:a="http://schemas.openxmlformats.org/drawingml/2006/main" xmlns:p="http://schemas.openxmlformats.org/presentationml/2006/main" xmlns:r="http://schemas.openxmlformats.org/officeDocument/2006/relationships">
+<p:sld xmlns:a="http://schemas.openxmlformats.org/drawingml/2006/main" xmlns:r="http://schemas.openxmlformats.org/officeDocument/2006/relationships" xmlns:p="http://schemas.openxmlformats.org/presentationml/2006/main">
   <p:cSld>
     <p:bg>
       <p:bgPr>
@@ -9070,7 +12216,14 @@
         <p:cNvGrpSpPr/>
         <p:nvPr/>
       </p:nvGrpSpPr>
-      <p:grpSpPr/>
+      <p:grpSpPr>
+        <a:xfrm>
+          <a:off x="0" y="0"/>
+          <a:ext cx="0" cy="0"/>
+          <a:chOff x="0" y="0"/>
+          <a:chExt cx="0" cy="0"/>
+        </a:xfrm>
+      </p:grpSpPr>
       <p:sp>
         <p:nvSpPr>
           <p:cNvPr id="2" name="TextBox 1"/>
@@ -9181,6 +12334,7 @@
           <a:lstStyle/>
           <a:p>
             <a:pPr algn="ctr"/>
+            <a:endParaRPr/>
           </a:p>
         </p:txBody>
       </p:sp>
@@ -9226,6 +12380,7 @@
           <a:lstStyle/>
           <a:p>
             <a:pPr algn="ctr"/>
+            <a:endParaRPr/>
           </a:p>
         </p:txBody>
       </p:sp>
@@ -9373,6 +12528,7 @@
           <a:lstStyle/>
           <a:p>
             <a:pPr algn="ctr"/>
+            <a:endParaRPr/>
           </a:p>
         </p:txBody>
       </p:sp>
@@ -9418,6 +12574,7 @@
           <a:lstStyle/>
           <a:p>
             <a:pPr algn="ctr"/>
+            <a:endParaRPr/>
           </a:p>
         </p:txBody>
       </p:sp>
@@ -9565,6 +12722,7 @@
           <a:lstStyle/>
           <a:p>
             <a:pPr algn="ctr"/>
+            <a:endParaRPr/>
           </a:p>
         </p:txBody>
       </p:sp>
@@ -9610,6 +12768,7 @@
           <a:lstStyle/>
           <a:p>
             <a:pPr algn="ctr"/>
+            <a:endParaRPr/>
           </a:p>
         </p:txBody>
       </p:sp>
@@ -9757,6 +12916,7 @@
           <a:lstStyle/>
           <a:p>
             <a:pPr algn="ctr"/>
+            <a:endParaRPr/>
           </a:p>
         </p:txBody>
       </p:sp>
@@ -9802,6 +12962,7 @@
           <a:lstStyle/>
           <a:p>
             <a:pPr algn="ctr"/>
+            <a:endParaRPr/>
           </a:p>
         </p:txBody>
       </p:sp>
@@ -9949,6 +13110,7 @@
           <a:lstStyle/>
           <a:p>
             <a:pPr algn="ctr"/>
+            <a:endParaRPr/>
           </a:p>
         </p:txBody>
       </p:sp>
@@ -9994,6 +13156,7 @@
           <a:lstStyle/>
           <a:p>
             <a:pPr algn="ctr"/>
+            <a:endParaRPr/>
           </a:p>
         </p:txBody>
       </p:sp>
@@ -10108,7 +13271,7 @@
 </file>
 
 <file path=ppt/slides/slide7.xml><?xml version="1.0" encoding="utf-8"?>
-<p:sld xmlns:a="http://schemas.openxmlformats.org/drawingml/2006/main" xmlns:p="http://schemas.openxmlformats.org/presentationml/2006/main" xmlns:r="http://schemas.openxmlformats.org/officeDocument/2006/relationships">
+<p:sld xmlns:a="http://schemas.openxmlformats.org/drawingml/2006/main" xmlns:r="http://schemas.openxmlformats.org/officeDocument/2006/relationships" xmlns:p="http://schemas.openxmlformats.org/presentationml/2006/main">
   <p:cSld>
     <p:bg>
       <p:bgPr>
@@ -10124,7 +13287,14 @@
         <p:cNvGrpSpPr/>
         <p:nvPr/>
       </p:nvGrpSpPr>
-      <p:grpSpPr/>
+      <p:grpSpPr>
+        <a:xfrm>
+          <a:off x="0" y="0"/>
+          <a:ext cx="0" cy="0"/>
+          <a:chOff x="0" y="0"/>
+          <a:chExt cx="0" cy="0"/>
+        </a:xfrm>
+      </p:grpSpPr>
       <p:sp>
         <p:nvSpPr>
           <p:cNvPr id="2" name="TextBox 1"/>
@@ -10235,6 +13405,7 @@
           <a:lstStyle/>
           <a:p>
             <a:pPr algn="ctr"/>
+            <a:endParaRPr/>
           </a:p>
         </p:txBody>
       </p:sp>
@@ -10450,6 +13621,7 @@
           <a:lstStyle/>
           <a:p>
             <a:pPr algn="ctr"/>
+            <a:endParaRPr/>
           </a:p>
         </p:txBody>
       </p:sp>
@@ -10665,6 +13837,7 @@
           <a:lstStyle/>
           <a:p>
             <a:pPr algn="ctr"/>
+            <a:endParaRPr/>
           </a:p>
         </p:txBody>
       </p:sp>
@@ -10880,6 +14053,7 @@
           <a:lstStyle/>
           <a:p>
             <a:pPr algn="ctr"/>
+            <a:endParaRPr/>
           </a:p>
         </p:txBody>
       </p:sp>
@@ -11062,7 +14236,7 @@
 </file>
 
 <file path=ppt/slides/slide8.xml><?xml version="1.0" encoding="utf-8"?>
-<p:sld xmlns:a="http://schemas.openxmlformats.org/drawingml/2006/main" xmlns:p="http://schemas.openxmlformats.org/presentationml/2006/main" xmlns:r="http://schemas.openxmlformats.org/officeDocument/2006/relationships">
+<p:sld xmlns:a="http://schemas.openxmlformats.org/drawingml/2006/main" xmlns:r="http://schemas.openxmlformats.org/officeDocument/2006/relationships" xmlns:p="http://schemas.openxmlformats.org/presentationml/2006/main">
   <p:cSld>
     <p:bg>
       <p:bgPr>
@@ -11078,7 +14252,14 @@
         <p:cNvGrpSpPr/>
         <p:nvPr/>
       </p:nvGrpSpPr>
-      <p:grpSpPr/>
+      <p:grpSpPr>
+        <a:xfrm>
+          <a:off x="0" y="0"/>
+          <a:ext cx="0" cy="0"/>
+          <a:chOff x="0" y="0"/>
+          <a:chExt cx="0" cy="0"/>
+        </a:xfrm>
+      </p:grpSpPr>
       <p:sp>
         <p:nvSpPr>
           <p:cNvPr id="2" name="TextBox 1"/>
@@ -11189,6 +14370,7 @@
           <a:lstStyle/>
           <a:p>
             <a:pPr algn="ctr"/>
+            <a:endParaRPr/>
           </a:p>
         </p:txBody>
       </p:sp>
@@ -11300,6 +14482,7 @@
           <a:lstStyle/>
           <a:p>
             <a:pPr algn="ctr"/>
+            <a:endParaRPr/>
           </a:p>
         </p:txBody>
       </p:sp>
@@ -11382,6 +14565,7 @@
           <a:lstStyle/>
           <a:p>
             <a:pPr algn="ctr"/>
+            <a:endParaRPr/>
           </a:p>
         </p:txBody>
       </p:sp>
@@ -11493,6 +14677,7 @@
           <a:lstStyle/>
           <a:p>
             <a:pPr algn="ctr"/>
+            <a:endParaRPr/>
           </a:p>
         </p:txBody>
       </p:sp>
@@ -11575,6 +14760,7 @@
           <a:lstStyle/>
           <a:p>
             <a:pPr algn="ctr"/>
+            <a:endParaRPr/>
           </a:p>
         </p:txBody>
       </p:sp>
@@ -11686,6 +14872,7 @@
           <a:lstStyle/>
           <a:p>
             <a:pPr algn="ctr"/>
+            <a:endParaRPr/>
           </a:p>
         </p:txBody>
       </p:sp>
@@ -11768,6 +14955,7 @@
           <a:lstStyle/>
           <a:p>
             <a:pPr algn="ctr"/>
+            <a:endParaRPr/>
           </a:p>
         </p:txBody>
       </p:sp>
@@ -11879,6 +15067,7 @@
           <a:lstStyle/>
           <a:p>
             <a:pPr algn="ctr"/>
+            <a:endParaRPr/>
           </a:p>
         </p:txBody>
       </p:sp>
@@ -11928,7 +15117,7 @@
 </file>
 
 <file path=ppt/slides/slide9.xml><?xml version="1.0" encoding="utf-8"?>
-<p:sld xmlns:a="http://schemas.openxmlformats.org/drawingml/2006/main" xmlns:p="http://schemas.openxmlformats.org/presentationml/2006/main" xmlns:r="http://schemas.openxmlformats.org/officeDocument/2006/relationships">
+<p:sld xmlns:a="http://schemas.openxmlformats.org/drawingml/2006/main" xmlns:r="http://schemas.openxmlformats.org/officeDocument/2006/relationships" xmlns:p="http://schemas.openxmlformats.org/presentationml/2006/main">
   <p:cSld>
     <p:bg>
       <p:bgPr>
@@ -11944,7 +15133,14 @@
         <p:cNvGrpSpPr/>
         <p:nvPr/>
       </p:nvGrpSpPr>
-      <p:grpSpPr/>
+      <p:grpSpPr>
+        <a:xfrm>
+          <a:off x="0" y="0"/>
+          <a:ext cx="0" cy="0"/>
+          <a:chOff x="0" y="0"/>
+          <a:chExt cx="0" cy="0"/>
+        </a:xfrm>
+      </p:grpSpPr>
       <p:sp>
         <p:nvSpPr>
           <p:cNvPr id="2" name="TextBox 1"/>
@@ -12055,6 +15251,7 @@
           <a:lstStyle/>
           <a:p>
             <a:pPr algn="ctr"/>
+            <a:endParaRPr/>
           </a:p>
         </p:txBody>
       </p:sp>
@@ -12168,6 +15365,7 @@
           <a:lstStyle/>
           <a:p>
             <a:pPr algn="ctr"/>
+            <a:endParaRPr/>
           </a:p>
         </p:txBody>
       </p:sp>
@@ -12281,6 +15479,7 @@
           <a:lstStyle/>
           <a:p>
             <a:pPr algn="ctr"/>
+            <a:endParaRPr/>
           </a:p>
         </p:txBody>
       </p:sp>
@@ -12394,6 +15593,7 @@
           <a:lstStyle/>
           <a:p>
             <a:pPr algn="ctr"/>
+            <a:endParaRPr/>
           </a:p>
         </p:txBody>
       </p:sp>
@@ -12507,6 +15707,7 @@
           <a:lstStyle/>
           <a:p>
             <a:pPr algn="ctr"/>
+            <a:endParaRPr/>
           </a:p>
         </p:txBody>
       </p:sp>
@@ -12688,6 +15889,7 @@
           <a:lstStyle/>
           <a:p>
             <a:pPr algn="ctr"/>
+            <a:endParaRPr/>
           </a:p>
         </p:txBody>
       </p:sp>
@@ -12869,6 +16071,7 @@
           <a:lstStyle/>
           <a:p>
             <a:pPr algn="ctr"/>
+            <a:endParaRPr/>
           </a:p>
         </p:txBody>
       </p:sp>
@@ -13050,6 +16253,7 @@
           <a:lstStyle/>
           <a:p>
             <a:pPr algn="ctr"/>
+            <a:endParaRPr/>
           </a:p>
         </p:txBody>
       </p:sp>
@@ -13198,9 +16402,9 @@
 </file>
 
 <file path=ppt/theme/theme1.xml><?xml version="1.0" encoding="utf-8"?>
-<a:theme xmlns:a="http://schemas.openxmlformats.org/drawingml/2006/main" name="Office Theme">
+<a:theme xmlns:a="http://schemas.openxmlformats.org/drawingml/2006/main" name="Ion">
   <a:themeElements>
-    <a:clrScheme name="Office">
+    <a:clrScheme name="Ion">
       <a:dk1>
         <a:sysClr val="windowText" lastClr="000000"/>
       </a:dk1>
@@ -13208,42 +16412,42 @@
         <a:sysClr val="window" lastClr="FFFFFF"/>
       </a:lt1>
       <a:dk2>
-        <a:srgbClr val="1F497D"/>
+        <a:srgbClr val="1E5155"/>
       </a:dk2>
       <a:lt2>
-        <a:srgbClr val="EEECE1"/>
+        <a:srgbClr val="EBEBEB"/>
       </a:lt2>
       <a:accent1>
-        <a:srgbClr val="4F81BD"/>
+        <a:srgbClr val="B01513"/>
       </a:accent1>
       <a:accent2>
-        <a:srgbClr val="C0504D"/>
+        <a:srgbClr val="EA6312"/>
       </a:accent2>
       <a:accent3>
-        <a:srgbClr val="9BBB59"/>
+        <a:srgbClr val="E6B729"/>
       </a:accent3>
       <a:accent4>
-        <a:srgbClr val="8064A2"/>
+        <a:srgbClr val="6AAC90"/>
       </a:accent4>
       <a:accent5>
-        <a:srgbClr val="4BACC6"/>
+        <a:srgbClr val="54849A"/>
       </a:accent5>
       <a:accent6>
-        <a:srgbClr val="F79646"/>
+        <a:srgbClr val="9E5E9B"/>
       </a:accent6>
       <a:hlink>
-        <a:srgbClr val="0000FF"/>
+        <a:srgbClr val="58C1BA"/>
       </a:hlink>
       <a:folHlink>
-        <a:srgbClr val="800080"/>
+        <a:srgbClr val="9DFFCB"/>
       </a:folHlink>
     </a:clrScheme>
-    <a:fontScheme name="Office">
+    <a:fontScheme name="Ion">
       <a:majorFont>
-        <a:latin typeface="Calibri"/>
+        <a:latin typeface="Century Gothic" panose="020B0502020202020204"/>
         <a:ea typeface=""/>
         <a:cs typeface=""/>
-        <a:font script="Jpan" typeface="ＭＳ Ｐゴシック"/>
+        <a:font script="Jpan" typeface="メイリオ"/>
         <a:font script="Hang" typeface="맑은 고딕"/>
         <a:font script="Hans" typeface="宋体"/>
         <a:font script="Hant" typeface="新細明體"/>
@@ -13275,10 +16479,10 @@
         <a:font script="Geor" typeface="Sylfaen"/>
       </a:majorFont>
       <a:minorFont>
-        <a:latin typeface="Calibri"/>
+        <a:latin typeface="Century Gothic" panose="020B0502020202020204"/>
         <a:ea typeface=""/>
         <a:cs typeface=""/>
-        <a:font script="Jpan" typeface="ＭＳ Ｐゴシック"/>
+        <a:font script="Jpan" typeface="メイリオ"/>
         <a:font script="Hang" typeface="맑은 고딕"/>
         <a:font script="Hans" typeface="宋体"/>
         <a:font script="Hant" typeface="新細明體"/>
@@ -13310,7 +16514,7 @@
         <a:font script="Geor" typeface="Sylfaen"/>
       </a:minorFont>
     </a:fontScheme>
-    <a:fmtScheme name="Office">
+    <a:fmtScheme name="Ion">
       <a:fillStyleLst>
         <a:solidFill>
           <a:schemeClr val="phClr"/>
@@ -13319,62 +16523,52 @@
           <a:gsLst>
             <a:gs pos="0">
               <a:schemeClr val="phClr">
-                <a:tint val="50000"/>
-                <a:satMod val="300000"/>
-              </a:schemeClr>
-            </a:gs>
-            <a:gs pos="35000">
-              <a:schemeClr val="phClr">
-                <a:tint val="37000"/>
-                <a:satMod val="300000"/>
+                <a:tint val="64000"/>
+                <a:lumMod val="118000"/>
               </a:schemeClr>
             </a:gs>
             <a:gs pos="100000">
               <a:schemeClr val="phClr">
-                <a:tint val="15000"/>
-                <a:satMod val="350000"/>
+                <a:tint val="92000"/>
+                <a:alpha val="100000"/>
+                <a:lumMod val="110000"/>
               </a:schemeClr>
             </a:gs>
           </a:gsLst>
-          <a:lin ang="16200000" scaled="1"/>
+          <a:lin ang="5400000" scaled="0"/>
         </a:gradFill>
         <a:gradFill rotWithShape="1">
           <a:gsLst>
             <a:gs pos="0">
               <a:schemeClr val="phClr">
-                <a:tint val="100000"/>
-                <a:shade val="100000"/>
-                <a:satMod val="130000"/>
+                <a:tint val="98000"/>
+                <a:lumMod val="114000"/>
               </a:schemeClr>
             </a:gs>
             <a:gs pos="100000">
               <a:schemeClr val="phClr">
-                <a:tint val="50000"/>
-                <a:shade val="100000"/>
-                <a:satMod val="350000"/>
+                <a:shade val="90000"/>
+                <a:lumMod val="84000"/>
               </a:schemeClr>
             </a:gs>
           </a:gsLst>
-          <a:lin ang="16200000" scaled="0"/>
+          <a:lin ang="5400000" scaled="0"/>
         </a:gradFill>
       </a:fillStyleLst>
       <a:lnStyleLst>
-        <a:ln w="9525" cap="flat" cmpd="sng" algn="ctr">
-          <a:solidFill>
-            <a:schemeClr val="phClr">
-              <a:shade val="95000"/>
-              <a:satMod val="105000"/>
-            </a:schemeClr>
-          </a:solidFill>
-          <a:prstDash val="solid"/>
-        </a:ln>
-        <a:ln w="25400" cap="flat" cmpd="sng" algn="ctr">
+        <a:ln w="9525" cap="rnd" cmpd="sng" algn="ctr">
           <a:solidFill>
             <a:schemeClr val="phClr"/>
           </a:solidFill>
           <a:prstDash val="solid"/>
         </a:ln>
-        <a:ln w="38100" cap="flat" cmpd="sng" algn="ctr">
+        <a:ln w="19050" cap="rnd" cmpd="sng" algn="ctr">
+          <a:solidFill>
+            <a:schemeClr val="phClr"/>
+          </a:solidFill>
+          <a:prstDash val="solid"/>
+        </a:ln>
+        <a:ln w="28575" cap="rnd" cmpd="sng" algn="ctr">
           <a:solidFill>
             <a:schemeClr val="phClr"/>
           </a:solidFill>
@@ -13383,28 +16577,22 @@
       </a:lnStyleLst>
       <a:effectStyleLst>
         <a:effectStyle>
+          <a:effectLst/>
+        </a:effectStyle>
+        <a:effectStyle>
           <a:effectLst>
-            <a:outerShdw blurRad="40000" dist="20000" dir="5400000" rotWithShape="0">
+            <a:outerShdw blurRad="38100" dist="25400" dir="5400000" rotWithShape="0">
               <a:srgbClr val="000000">
-                <a:alpha val="38000"/>
+                <a:alpha val="45000"/>
               </a:srgbClr>
             </a:outerShdw>
           </a:effectLst>
         </a:effectStyle>
         <a:effectStyle>
           <a:effectLst>
-            <a:outerShdw blurRad="40000" dist="23000" dir="5400000" rotWithShape="0">
+            <a:outerShdw blurRad="63500" dist="38100" dir="5400000" rotWithShape="0">
               <a:srgbClr val="000000">
-                <a:alpha val="35000"/>
-              </a:srgbClr>
-            </a:outerShdw>
-          </a:effectLst>
-        </a:effectStyle>
-        <a:effectStyle>
-          <a:effectLst>
-            <a:outerShdw blurRad="40000" dist="23000" dir="5400000" rotWithShape="0">
-              <a:srgbClr val="000000">
-                <a:alpha val="35000"/>
+                <a:alpha val="60000"/>
               </a:srgbClr>
             </a:outerShdw>
           </a:effectLst>
@@ -13412,12 +16600,10 @@
             <a:camera prst="orthographicFront">
               <a:rot lat="0" lon="0" rev="0"/>
             </a:camera>
-            <a:lightRig rig="threePt" dir="t">
-              <a:rot lat="0" lon="0" rev="1200000"/>
-            </a:lightRig>
+            <a:lightRig rig="threePt" dir="tl"/>
           </a:scene3d>
-          <a:sp3d>
-            <a:bevelT w="63500" h="25400"/>
+          <a:sp3d prstMaterial="plastic">
+            <a:bevelT w="0" h="0"/>
           </a:sp3d>
         </a:effectStyle>
       </a:effectStyleLst>
@@ -13429,90 +16615,54 @@
           <a:gsLst>
             <a:gs pos="0">
               <a:schemeClr val="phClr">
-                <a:tint val="40000"/>
-                <a:satMod val="350000"/>
-              </a:schemeClr>
-            </a:gs>
-            <a:gs pos="40000">
-              <a:schemeClr val="phClr">
-                <a:tint val="45000"/>
-                <a:shade val="99000"/>
-                <a:satMod val="350000"/>
+                <a:tint val="97000"/>
+                <a:hueMod val="88000"/>
+                <a:satMod val="130000"/>
+                <a:lumMod val="124000"/>
               </a:schemeClr>
             </a:gs>
             <a:gs pos="100000">
               <a:schemeClr val="phClr">
-                <a:shade val="20000"/>
-                <a:satMod val="255000"/>
+                <a:tint val="96000"/>
+                <a:shade val="88000"/>
+                <a:hueMod val="108000"/>
+                <a:satMod val="164000"/>
+                <a:lumMod val="76000"/>
               </a:schemeClr>
             </a:gs>
           </a:gsLst>
           <a:path path="circle">
-            <a:fillToRect l="50000" t="-80000" r="50000" b="180000"/>
+            <a:fillToRect l="45000" t="65000" r="125000" b="100000"/>
           </a:path>
         </a:gradFill>
-        <a:gradFill rotWithShape="1">
-          <a:gsLst>
-            <a:gs pos="0">
+        <a:blipFill rotWithShape="1">
+          <a:blip xmlns:r="http://schemas.openxmlformats.org/officeDocument/2006/relationships" r:embed="rId1">
+            <a:duotone>
               <a:schemeClr val="phClr">
-                <a:tint val="80000"/>
-                <a:satMod val="300000"/>
+                <a:shade val="69000"/>
+                <a:hueMod val="108000"/>
+                <a:satMod val="164000"/>
+                <a:lumMod val="74000"/>
               </a:schemeClr>
-            </a:gs>
-            <a:gs pos="100000">
               <a:schemeClr val="phClr">
-                <a:shade val="30000"/>
-                <a:satMod val="200000"/>
+                <a:tint val="96000"/>
+                <a:hueMod val="88000"/>
+                <a:satMod val="140000"/>
+                <a:lumMod val="132000"/>
               </a:schemeClr>
-            </a:gs>
-          </a:gsLst>
-          <a:path path="circle">
-            <a:fillToRect l="50000" t="50000" r="50000" b="50000"/>
-          </a:path>
-        </a:gradFill>
+            </a:duotone>
+          </a:blip>
+          <a:stretch/>
+        </a:blipFill>
       </a:bgFillStyleLst>
     </a:fmtScheme>
   </a:themeElements>
-  <a:objectDefaults>
-    <a:spDef>
-      <a:spPr/>
-      <a:bodyPr/>
-      <a:lstStyle/>
-      <a:style>
-        <a:lnRef idx="1">
-          <a:schemeClr val="accent1"/>
-        </a:lnRef>
-        <a:fillRef idx="3">
-          <a:schemeClr val="accent1"/>
-        </a:fillRef>
-        <a:effectRef idx="2">
-          <a:schemeClr val="accent1"/>
-        </a:effectRef>
-        <a:fontRef idx="minor">
-          <a:schemeClr val="lt1"/>
-        </a:fontRef>
-      </a:style>
-    </a:spDef>
-    <a:lnDef>
-      <a:spPr/>
-      <a:bodyPr/>
-      <a:lstStyle/>
-      <a:style>
-        <a:lnRef idx="2">
-          <a:schemeClr val="accent1"/>
-        </a:lnRef>
-        <a:fillRef idx="0">
-          <a:schemeClr val="accent1"/>
-        </a:fillRef>
-        <a:effectRef idx="1">
-          <a:schemeClr val="accent1"/>
-        </a:effectRef>
-        <a:fontRef idx="minor">
-          <a:schemeClr val="tx1"/>
-        </a:fontRef>
-      </a:style>
-    </a:lnDef>
-  </a:objectDefaults>
+  <a:objectDefaults/>
   <a:extraClrSchemeLst/>
+  <a:extLst>
+    <a:ext uri="{05A4C25C-085E-4340-85A3-A5531E510DB2}">
+      <thm15:themeFamily xmlns:thm15="http://schemas.microsoft.com/office/thememl/2012/main" name="Ion" id="{B8441ADB-2E43-4AF7-B97A-BD870242C6A8}" vid="{292E63A9-BB86-4E3D-B92A-7223C6510D2E}"/>
+    </a:ext>
+  </a:extLst>
 </a:theme>
 </file>